--- a/documentacao/Guia-Sistema-FNP-v2.pptx
+++ b/documentacao/Guia-Sistema-FNP-v2.pptx
@@ -2,35 +2,35 @@
 <file path=ppt/presentation.xml><?xml version="1.0" encoding="utf-8"?>
 <p:presentation xmlns:a="http://schemas.openxmlformats.org/drawingml/2006/main" xmlns:r="http://schemas.openxmlformats.org/officeDocument/2006/relationships" xmlns:p="http://schemas.openxmlformats.org/presentationml/2006/main" saveSubsetFonts="1" autoCompressPictures="0">
   <p:sldMasterIdLst>
-    <p:sldMasterId id="2147483648" r:id="rId1"/>
+    <p:sldMasterId id="2147483684" r:id="rId1"/>
   </p:sldMasterIdLst>
   <p:sldIdLst>
-    <p:sldId id="256" r:id="rId7"/>
-    <p:sldId id="257" r:id="rId8"/>
-    <p:sldId id="258" r:id="rId9"/>
-    <p:sldId id="259" r:id="rId10"/>
-    <p:sldId id="260" r:id="rId11"/>
-    <p:sldId id="261" r:id="rId12"/>
-    <p:sldId id="262" r:id="rId13"/>
-    <p:sldId id="263" r:id="rId14"/>
-    <p:sldId id="264" r:id="rId15"/>
-    <p:sldId id="265" r:id="rId16"/>
-    <p:sldId id="266" r:id="rId17"/>
-    <p:sldId id="267" r:id="rId18"/>
-    <p:sldId id="268" r:id="rId19"/>
-    <p:sldId id="269" r:id="rId20"/>
-    <p:sldId id="270" r:id="rId21"/>
-    <p:sldId id="271" r:id="rId22"/>
-    <p:sldId id="272" r:id="rId23"/>
-    <p:sldId id="273" r:id="rId24"/>
-    <p:sldId id="274" r:id="rId25"/>
-    <p:sldId id="275" r:id="rId26"/>
-    <p:sldId id="276" r:id="rId27"/>
-    <p:sldId id="277" r:id="rId28"/>
-    <p:sldId id="278" r:id="rId29"/>
-    <p:sldId id="279" r:id="rId30"/>
+    <p:sldId id="306" r:id="rId2"/>
+    <p:sldId id="302" r:id="rId3"/>
+    <p:sldId id="303" r:id="rId4"/>
+    <p:sldId id="283" r:id="rId5"/>
+    <p:sldId id="291" r:id="rId6"/>
+    <p:sldId id="284" r:id="rId7"/>
+    <p:sldId id="292" r:id="rId8"/>
+    <p:sldId id="285" r:id="rId9"/>
+    <p:sldId id="293" r:id="rId10"/>
+    <p:sldId id="294" r:id="rId11"/>
+    <p:sldId id="286" r:id="rId12"/>
+    <p:sldId id="295" r:id="rId13"/>
+    <p:sldId id="296" r:id="rId14"/>
+    <p:sldId id="287" r:id="rId15"/>
+    <p:sldId id="297" r:id="rId16"/>
+    <p:sldId id="288" r:id="rId17"/>
+    <p:sldId id="298" r:id="rId18"/>
+    <p:sldId id="299" r:id="rId19"/>
+    <p:sldId id="289" r:id="rId20"/>
+    <p:sldId id="300" r:id="rId21"/>
+    <p:sldId id="290" r:id="rId22"/>
+    <p:sldId id="301" r:id="rId23"/>
+    <p:sldId id="304" r:id="rId24"/>
+    <p:sldId id="282" r:id="rId25"/>
   </p:sldIdLst>
-  <p:sldSz cx="12191695" cy="6858000" type="screen4x3"/>
+  <p:sldSz cx="12192000" cy="6858000"/>
   <p:notesSz cx="6858000" cy="9144000"/>
   <p:defaultTextStyle>
     <a:defPPr>
@@ -127,11 +127,27 @@
       </a:defRPr>
     </a:lvl9pPr>
   </p:defaultTextStyle>
+  <p:extLst>
+    <p:ext uri="{EFAFB233-063F-42B5-8137-9DF3F51BA10A}">
+      <p15:sldGuideLst xmlns:p15="http://schemas.microsoft.com/office/powerpoint/2012/main">
+        <p15:guide id="1" orient="horz" pos="2160">
+          <p15:clr>
+            <a:srgbClr val="A4A3A4"/>
+          </p15:clr>
+        </p15:guide>
+        <p15:guide id="2" pos="2880">
+          <p15:clr>
+            <a:srgbClr val="A4A3A4"/>
+          </p15:clr>
+        </p15:guide>
+      </p15:sldGuideLst>
+    </p:ext>
+  </p:extLst>
 </p:presentation>
 </file>
 
 <file path=ppt/slideLayouts/slideLayout1.xml><?xml version="1.0" encoding="utf-8"?>
-<p:sldLayout xmlns:a="http://schemas.openxmlformats.org/drawingml/2006/main" xmlns:r="http://schemas.openxmlformats.org/officeDocument/2006/relationships" xmlns:p="http://schemas.openxmlformats.org/presentationml/2006/main" type="title" preserve="1">
+<p:sldLayout xmlns:a="http://schemas.openxmlformats.org/drawingml/2006/main" xmlns:r="http://schemas.openxmlformats.org/officeDocument/2006/relationships" xmlns:p="http://schemas.openxmlformats.org/presentationml/2006/main" type="title">
   <p:cSld name="Title Slide">
     <p:spTree>
       <p:nvGrpSpPr>
@@ -168,10 +184,9 @@
           <a:lstStyle/>
           <a:p>
             <a:r>
-              <a:rPr lang="en-US" smtClean="0"/>
+              <a:rPr lang="en-US"/>
               <a:t>Click to edit Master title style</a:t>
             </a:r>
-            <a:endParaRPr lang="en-US"/>
           </a:p>
         </p:txBody>
       </p:sp>
@@ -287,10 +302,9 @@
           </a:lstStyle>
           <a:p>
             <a:r>
-              <a:rPr lang="en-US" smtClean="0"/>
+              <a:rPr lang="en-US"/>
               <a:t>Click to edit Master subtitle style</a:t>
             </a:r>
-            <a:endParaRPr lang="en-US"/>
           </a:p>
         </p:txBody>
       </p:sp>
@@ -311,7 +325,7 @@
           <a:p>
             <a:fld id="{5BCAD085-E8A6-8845-BD4E-CB4CCA059FC4}" type="datetimeFigureOut">
               <a:rPr lang="en-US" smtClean="0"/>
-              <a:t>1/27/13</a:t>
+              <a:t>4/7/2026</a:t>
             </a:fld>
             <a:endParaRPr lang="en-US"/>
           </a:p>
@@ -353,7 +367,7 @@
           <a:p>
             <a:fld id="{C1FF6DA9-008F-8B48-92A6-B652298478BF}" type="slidenum">
               <a:rPr lang="en-US" smtClean="0"/>
-              <a:t>‹#›</a:t>
+              <a:t>‹nº›</a:t>
             </a:fld>
             <a:endParaRPr lang="en-US"/>
           </a:p>
@@ -373,7 +387,7 @@
 </file>
 
 <file path=ppt/slideLayouts/slideLayout10.xml><?xml version="1.0" encoding="utf-8"?>
-<p:sldLayout xmlns:a="http://schemas.openxmlformats.org/drawingml/2006/main" xmlns:r="http://schemas.openxmlformats.org/officeDocument/2006/relationships" xmlns:p="http://schemas.openxmlformats.org/presentationml/2006/main" type="vertTx" preserve="1">
+<p:sldLayout xmlns:a="http://schemas.openxmlformats.org/drawingml/2006/main" xmlns:r="http://schemas.openxmlformats.org/officeDocument/2006/relationships" xmlns:p="http://schemas.openxmlformats.org/presentationml/2006/main" type="vertTx">
   <p:cSld name="Title and Vertical Text">
     <p:spTree>
       <p:nvGrpSpPr>
@@ -405,10 +419,9 @@
           <a:lstStyle/>
           <a:p>
             <a:r>
-              <a:rPr lang="en-US" smtClean="0"/>
+              <a:rPr lang="en-US"/>
               <a:t>Click to edit Master title style</a:t>
             </a:r>
-            <a:endParaRPr lang="en-US"/>
           </a:p>
         </p:txBody>
       </p:sp>
@@ -429,38 +442,37 @@
           <a:p>
             <a:pPr lvl="0"/>
             <a:r>
-              <a:rPr lang="en-US" smtClean="0"/>
+              <a:rPr lang="en-US"/>
               <a:t>Click to edit Master text styles</a:t>
             </a:r>
           </a:p>
           <a:p>
             <a:pPr lvl="1"/>
             <a:r>
-              <a:rPr lang="en-US" smtClean="0"/>
+              <a:rPr lang="en-US"/>
               <a:t>Second level</a:t>
             </a:r>
           </a:p>
           <a:p>
             <a:pPr lvl="2"/>
             <a:r>
-              <a:rPr lang="en-US" smtClean="0"/>
+              <a:rPr lang="en-US"/>
               <a:t>Third level</a:t>
             </a:r>
           </a:p>
           <a:p>
             <a:pPr lvl="3"/>
             <a:r>
-              <a:rPr lang="en-US" smtClean="0"/>
+              <a:rPr lang="en-US"/>
               <a:t>Fourth level</a:t>
             </a:r>
           </a:p>
           <a:p>
             <a:pPr lvl="4"/>
             <a:r>
-              <a:rPr lang="en-US" smtClean="0"/>
+              <a:rPr lang="en-US"/>
               <a:t>Fifth level</a:t>
             </a:r>
-            <a:endParaRPr lang="en-US"/>
           </a:p>
         </p:txBody>
       </p:sp>
@@ -481,7 +493,7 @@
           <a:p>
             <a:fld id="{5BCAD085-E8A6-8845-BD4E-CB4CCA059FC4}" type="datetimeFigureOut">
               <a:rPr lang="en-US" smtClean="0"/>
-              <a:t>1/27/13</a:t>
+              <a:t>4/7/2026</a:t>
             </a:fld>
             <a:endParaRPr lang="en-US"/>
           </a:p>
@@ -523,7 +535,7 @@
           <a:p>
             <a:fld id="{C1FF6DA9-008F-8B48-92A6-B652298478BF}" type="slidenum">
               <a:rPr lang="en-US" smtClean="0"/>
-              <a:t>‹#›</a:t>
+              <a:t>‹nº›</a:t>
             </a:fld>
             <a:endParaRPr lang="en-US"/>
           </a:p>
@@ -543,7 +555,7 @@
 </file>
 
 <file path=ppt/slideLayouts/slideLayout11.xml><?xml version="1.0" encoding="utf-8"?>
-<p:sldLayout xmlns:a="http://schemas.openxmlformats.org/drawingml/2006/main" xmlns:r="http://schemas.openxmlformats.org/officeDocument/2006/relationships" xmlns:p="http://schemas.openxmlformats.org/presentationml/2006/main" type="vertTitleAndTx" preserve="1">
+<p:sldLayout xmlns:a="http://schemas.openxmlformats.org/drawingml/2006/main" xmlns:r="http://schemas.openxmlformats.org/officeDocument/2006/relationships" xmlns:p="http://schemas.openxmlformats.org/presentationml/2006/main" type="vertTitleAndTx">
   <p:cSld name="Vertical Title and Text">
     <p:spTree>
       <p:nvGrpSpPr>
@@ -580,10 +592,9 @@
           <a:lstStyle/>
           <a:p>
             <a:r>
-              <a:rPr lang="en-US" smtClean="0"/>
+              <a:rPr lang="en-US"/>
               <a:t>Click to edit Master title style</a:t>
             </a:r>
-            <a:endParaRPr lang="en-US"/>
           </a:p>
         </p:txBody>
       </p:sp>
@@ -609,38 +620,37 @@
           <a:p>
             <a:pPr lvl="0"/>
             <a:r>
-              <a:rPr lang="en-US" smtClean="0"/>
+              <a:rPr lang="en-US"/>
               <a:t>Click to edit Master text styles</a:t>
             </a:r>
           </a:p>
           <a:p>
             <a:pPr lvl="1"/>
             <a:r>
-              <a:rPr lang="en-US" smtClean="0"/>
+              <a:rPr lang="en-US"/>
               <a:t>Second level</a:t>
             </a:r>
           </a:p>
           <a:p>
             <a:pPr lvl="2"/>
             <a:r>
-              <a:rPr lang="en-US" smtClean="0"/>
+              <a:rPr lang="en-US"/>
               <a:t>Third level</a:t>
             </a:r>
           </a:p>
           <a:p>
             <a:pPr lvl="3"/>
             <a:r>
-              <a:rPr lang="en-US" smtClean="0"/>
+              <a:rPr lang="en-US"/>
               <a:t>Fourth level</a:t>
             </a:r>
           </a:p>
           <a:p>
             <a:pPr lvl="4"/>
             <a:r>
-              <a:rPr lang="en-US" smtClean="0"/>
+              <a:rPr lang="en-US"/>
               <a:t>Fifth level</a:t>
             </a:r>
-            <a:endParaRPr lang="en-US"/>
           </a:p>
         </p:txBody>
       </p:sp>
@@ -661,7 +671,7 @@
           <a:p>
             <a:fld id="{5BCAD085-E8A6-8845-BD4E-CB4CCA059FC4}" type="datetimeFigureOut">
               <a:rPr lang="en-US" smtClean="0"/>
-              <a:t>1/27/13</a:t>
+              <a:t>4/7/2026</a:t>
             </a:fld>
             <a:endParaRPr lang="en-US"/>
           </a:p>
@@ -703,7 +713,7 @@
           <a:p>
             <a:fld id="{C1FF6DA9-008F-8B48-92A6-B652298478BF}" type="slidenum">
               <a:rPr lang="en-US" smtClean="0"/>
-              <a:t>‹#›</a:t>
+              <a:t>‹nº›</a:t>
             </a:fld>
             <a:endParaRPr lang="en-US"/>
           </a:p>
@@ -723,7 +733,7 @@
 </file>
 
 <file path=ppt/slideLayouts/slideLayout2.xml><?xml version="1.0" encoding="utf-8"?>
-<p:sldLayout xmlns:a="http://schemas.openxmlformats.org/drawingml/2006/main" xmlns:r="http://schemas.openxmlformats.org/officeDocument/2006/relationships" xmlns:p="http://schemas.openxmlformats.org/presentationml/2006/main" type="obj" preserve="1">
+<p:sldLayout xmlns:a="http://schemas.openxmlformats.org/drawingml/2006/main" xmlns:r="http://schemas.openxmlformats.org/officeDocument/2006/relationships" xmlns:p="http://schemas.openxmlformats.org/presentationml/2006/main" type="obj">
   <p:cSld name="Title and Content">
     <p:spTree>
       <p:nvGrpSpPr>
@@ -755,10 +765,9 @@
           <a:lstStyle/>
           <a:p>
             <a:r>
-              <a:rPr lang="en-US" smtClean="0"/>
+              <a:rPr lang="en-US"/>
               <a:t>Click to edit Master title style</a:t>
             </a:r>
-            <a:endParaRPr lang="en-US"/>
           </a:p>
         </p:txBody>
       </p:sp>
@@ -779,38 +788,37 @@
           <a:p>
             <a:pPr lvl="0"/>
             <a:r>
-              <a:rPr lang="en-US" smtClean="0"/>
+              <a:rPr lang="en-US"/>
               <a:t>Click to edit Master text styles</a:t>
             </a:r>
           </a:p>
           <a:p>
             <a:pPr lvl="1"/>
             <a:r>
-              <a:rPr lang="en-US" smtClean="0"/>
+              <a:rPr lang="en-US"/>
               <a:t>Second level</a:t>
             </a:r>
           </a:p>
           <a:p>
             <a:pPr lvl="2"/>
             <a:r>
-              <a:rPr lang="en-US" smtClean="0"/>
+              <a:rPr lang="en-US"/>
               <a:t>Third level</a:t>
             </a:r>
           </a:p>
           <a:p>
             <a:pPr lvl="3"/>
             <a:r>
-              <a:rPr lang="en-US" smtClean="0"/>
+              <a:rPr lang="en-US"/>
               <a:t>Fourth level</a:t>
             </a:r>
           </a:p>
           <a:p>
             <a:pPr lvl="4"/>
             <a:r>
-              <a:rPr lang="en-US" smtClean="0"/>
+              <a:rPr lang="en-US"/>
               <a:t>Fifth level</a:t>
             </a:r>
-            <a:endParaRPr lang="en-US"/>
           </a:p>
         </p:txBody>
       </p:sp>
@@ -831,7 +839,7 @@
           <a:p>
             <a:fld id="{5BCAD085-E8A6-8845-BD4E-CB4CCA059FC4}" type="datetimeFigureOut">
               <a:rPr lang="en-US" smtClean="0"/>
-              <a:t>1/27/13</a:t>
+              <a:t>4/7/2026</a:t>
             </a:fld>
             <a:endParaRPr lang="en-US"/>
           </a:p>
@@ -873,7 +881,7 @@
           <a:p>
             <a:fld id="{C1FF6DA9-008F-8B48-92A6-B652298478BF}" type="slidenum">
               <a:rPr lang="en-US" smtClean="0"/>
-              <a:t>‹#›</a:t>
+              <a:t>‹nº›</a:t>
             </a:fld>
             <a:endParaRPr lang="en-US"/>
           </a:p>
@@ -893,7 +901,7 @@
 </file>
 
 <file path=ppt/slideLayouts/slideLayout3.xml><?xml version="1.0" encoding="utf-8"?>
-<p:sldLayout xmlns:a="http://schemas.openxmlformats.org/drawingml/2006/main" xmlns:r="http://schemas.openxmlformats.org/officeDocument/2006/relationships" xmlns:p="http://schemas.openxmlformats.org/presentationml/2006/main" type="secHead" preserve="1">
+<p:sldLayout xmlns:a="http://schemas.openxmlformats.org/drawingml/2006/main" xmlns:r="http://schemas.openxmlformats.org/officeDocument/2006/relationships" xmlns:p="http://schemas.openxmlformats.org/presentationml/2006/main" type="secHead">
   <p:cSld name="Section Header">
     <p:spTree>
       <p:nvGrpSpPr>
@@ -934,10 +942,9 @@
           </a:lstStyle>
           <a:p>
             <a:r>
-              <a:rPr lang="en-US" smtClean="0"/>
+              <a:rPr lang="en-US"/>
               <a:t>Click to edit Master title style</a:t>
             </a:r>
-            <a:endParaRPr lang="en-US"/>
           </a:p>
         </p:txBody>
       </p:sp>
@@ -1054,7 +1061,7 @@
           <a:p>
             <a:pPr lvl="0"/>
             <a:r>
-              <a:rPr lang="en-US" smtClean="0"/>
+              <a:rPr lang="en-US"/>
               <a:t>Click to edit Master text styles</a:t>
             </a:r>
           </a:p>
@@ -1077,7 +1084,7 @@
           <a:p>
             <a:fld id="{5BCAD085-E8A6-8845-BD4E-CB4CCA059FC4}" type="datetimeFigureOut">
               <a:rPr lang="en-US" smtClean="0"/>
-              <a:t>1/27/13</a:t>
+              <a:t>4/7/2026</a:t>
             </a:fld>
             <a:endParaRPr lang="en-US"/>
           </a:p>
@@ -1119,7 +1126,7 @@
           <a:p>
             <a:fld id="{C1FF6DA9-008F-8B48-92A6-B652298478BF}" type="slidenum">
               <a:rPr lang="en-US" smtClean="0"/>
-              <a:t>‹#›</a:t>
+              <a:t>‹nº›</a:t>
             </a:fld>
             <a:endParaRPr lang="en-US"/>
           </a:p>
@@ -1139,7 +1146,7 @@
 </file>
 
 <file path=ppt/slideLayouts/slideLayout4.xml><?xml version="1.0" encoding="utf-8"?>
-<p:sldLayout xmlns:a="http://schemas.openxmlformats.org/drawingml/2006/main" xmlns:r="http://schemas.openxmlformats.org/officeDocument/2006/relationships" xmlns:p="http://schemas.openxmlformats.org/presentationml/2006/main" type="twoObj" preserve="1">
+<p:sldLayout xmlns:a="http://schemas.openxmlformats.org/drawingml/2006/main" xmlns:r="http://schemas.openxmlformats.org/officeDocument/2006/relationships" xmlns:p="http://schemas.openxmlformats.org/presentationml/2006/main" type="twoObj">
   <p:cSld name="Two Content">
     <p:spTree>
       <p:nvGrpSpPr>
@@ -1171,10 +1178,9 @@
           <a:lstStyle/>
           <a:p>
             <a:r>
-              <a:rPr lang="en-US" smtClean="0"/>
+              <a:rPr lang="en-US"/>
               <a:t>Click to edit Master title style</a:t>
             </a:r>
-            <a:endParaRPr lang="en-US"/>
           </a:p>
         </p:txBody>
       </p:sp>
@@ -1228,38 +1234,37 @@
           <a:p>
             <a:pPr lvl="0"/>
             <a:r>
-              <a:rPr lang="en-US" smtClean="0"/>
+              <a:rPr lang="en-US"/>
               <a:t>Click to edit Master text styles</a:t>
             </a:r>
           </a:p>
           <a:p>
             <a:pPr lvl="1"/>
             <a:r>
-              <a:rPr lang="en-US" smtClean="0"/>
+              <a:rPr lang="en-US"/>
               <a:t>Second level</a:t>
             </a:r>
           </a:p>
           <a:p>
             <a:pPr lvl="2"/>
             <a:r>
-              <a:rPr lang="en-US" smtClean="0"/>
+              <a:rPr lang="en-US"/>
               <a:t>Third level</a:t>
             </a:r>
           </a:p>
           <a:p>
             <a:pPr lvl="3"/>
             <a:r>
-              <a:rPr lang="en-US" smtClean="0"/>
+              <a:rPr lang="en-US"/>
               <a:t>Fourth level</a:t>
             </a:r>
           </a:p>
           <a:p>
             <a:pPr lvl="4"/>
             <a:r>
-              <a:rPr lang="en-US" smtClean="0"/>
+              <a:rPr lang="en-US"/>
               <a:t>Fifth level</a:t>
             </a:r>
-            <a:endParaRPr lang="en-US"/>
           </a:p>
         </p:txBody>
       </p:sp>
@@ -1313,38 +1318,37 @@
           <a:p>
             <a:pPr lvl="0"/>
             <a:r>
-              <a:rPr lang="en-US" smtClean="0"/>
+              <a:rPr lang="en-US"/>
               <a:t>Click to edit Master text styles</a:t>
             </a:r>
           </a:p>
           <a:p>
             <a:pPr lvl="1"/>
             <a:r>
-              <a:rPr lang="en-US" smtClean="0"/>
+              <a:rPr lang="en-US"/>
               <a:t>Second level</a:t>
             </a:r>
           </a:p>
           <a:p>
             <a:pPr lvl="2"/>
             <a:r>
-              <a:rPr lang="en-US" smtClean="0"/>
+              <a:rPr lang="en-US"/>
               <a:t>Third level</a:t>
             </a:r>
           </a:p>
           <a:p>
             <a:pPr lvl="3"/>
             <a:r>
-              <a:rPr lang="en-US" smtClean="0"/>
+              <a:rPr lang="en-US"/>
               <a:t>Fourth level</a:t>
             </a:r>
           </a:p>
           <a:p>
             <a:pPr lvl="4"/>
             <a:r>
-              <a:rPr lang="en-US" smtClean="0"/>
+              <a:rPr lang="en-US"/>
               <a:t>Fifth level</a:t>
             </a:r>
-            <a:endParaRPr lang="en-US"/>
           </a:p>
         </p:txBody>
       </p:sp>
@@ -1365,7 +1369,7 @@
           <a:p>
             <a:fld id="{5BCAD085-E8A6-8845-BD4E-CB4CCA059FC4}" type="datetimeFigureOut">
               <a:rPr lang="en-US" smtClean="0"/>
-              <a:t>1/27/13</a:t>
+              <a:t>4/7/2026</a:t>
             </a:fld>
             <a:endParaRPr lang="en-US"/>
           </a:p>
@@ -1407,7 +1411,7 @@
           <a:p>
             <a:fld id="{C1FF6DA9-008F-8B48-92A6-B652298478BF}" type="slidenum">
               <a:rPr lang="en-US" smtClean="0"/>
-              <a:t>‹#›</a:t>
+              <a:t>‹nº›</a:t>
             </a:fld>
             <a:endParaRPr lang="en-US"/>
           </a:p>
@@ -1427,7 +1431,7 @@
 </file>
 
 <file path=ppt/slideLayouts/slideLayout5.xml><?xml version="1.0" encoding="utf-8"?>
-<p:sldLayout xmlns:a="http://schemas.openxmlformats.org/drawingml/2006/main" xmlns:r="http://schemas.openxmlformats.org/officeDocument/2006/relationships" xmlns:p="http://schemas.openxmlformats.org/presentationml/2006/main" type="twoTxTwoObj" preserve="1">
+<p:sldLayout xmlns:a="http://schemas.openxmlformats.org/drawingml/2006/main" xmlns:r="http://schemas.openxmlformats.org/officeDocument/2006/relationships" xmlns:p="http://schemas.openxmlformats.org/presentationml/2006/main" type="twoTxTwoObj">
   <p:cSld name="Comparison">
     <p:spTree>
       <p:nvGrpSpPr>
@@ -1463,10 +1467,9 @@
           </a:lstStyle>
           <a:p>
             <a:r>
-              <a:rPr lang="en-US" smtClean="0"/>
+              <a:rPr lang="en-US"/>
               <a:t>Click to edit Master title style</a:t>
             </a:r>
-            <a:endParaRPr lang="en-US"/>
           </a:p>
         </p:txBody>
       </p:sp>
@@ -1529,7 +1532,7 @@
           <a:p>
             <a:pPr lvl="0"/>
             <a:r>
-              <a:rPr lang="en-US" smtClean="0"/>
+              <a:rPr lang="en-US"/>
               <a:t>Click to edit Master text styles</a:t>
             </a:r>
           </a:p>
@@ -1585,38 +1588,37 @@
           <a:p>
             <a:pPr lvl="0"/>
             <a:r>
-              <a:rPr lang="en-US" smtClean="0"/>
+              <a:rPr lang="en-US"/>
               <a:t>Click to edit Master text styles</a:t>
             </a:r>
           </a:p>
           <a:p>
             <a:pPr lvl="1"/>
             <a:r>
-              <a:rPr lang="en-US" smtClean="0"/>
+              <a:rPr lang="en-US"/>
               <a:t>Second level</a:t>
             </a:r>
           </a:p>
           <a:p>
             <a:pPr lvl="2"/>
             <a:r>
-              <a:rPr lang="en-US" smtClean="0"/>
+              <a:rPr lang="en-US"/>
               <a:t>Third level</a:t>
             </a:r>
           </a:p>
           <a:p>
             <a:pPr lvl="3"/>
             <a:r>
-              <a:rPr lang="en-US" smtClean="0"/>
+              <a:rPr lang="en-US"/>
               <a:t>Fourth level</a:t>
             </a:r>
           </a:p>
           <a:p>
             <a:pPr lvl="4"/>
             <a:r>
-              <a:rPr lang="en-US" smtClean="0"/>
+              <a:rPr lang="en-US"/>
               <a:t>Fifth level</a:t>
             </a:r>
-            <a:endParaRPr lang="en-US"/>
           </a:p>
         </p:txBody>
       </p:sp>
@@ -1679,7 +1681,7 @@
           <a:p>
             <a:pPr lvl="0"/>
             <a:r>
-              <a:rPr lang="en-US" smtClean="0"/>
+              <a:rPr lang="en-US"/>
               <a:t>Click to edit Master text styles</a:t>
             </a:r>
           </a:p>
@@ -1735,38 +1737,37 @@
           <a:p>
             <a:pPr lvl="0"/>
             <a:r>
-              <a:rPr lang="en-US" smtClean="0"/>
+              <a:rPr lang="en-US"/>
               <a:t>Click to edit Master text styles</a:t>
             </a:r>
           </a:p>
           <a:p>
             <a:pPr lvl="1"/>
             <a:r>
-              <a:rPr lang="en-US" smtClean="0"/>
+              <a:rPr lang="en-US"/>
               <a:t>Second level</a:t>
             </a:r>
           </a:p>
           <a:p>
             <a:pPr lvl="2"/>
             <a:r>
-              <a:rPr lang="en-US" smtClean="0"/>
+              <a:rPr lang="en-US"/>
               <a:t>Third level</a:t>
             </a:r>
           </a:p>
           <a:p>
             <a:pPr lvl="3"/>
             <a:r>
-              <a:rPr lang="en-US" smtClean="0"/>
+              <a:rPr lang="en-US"/>
               <a:t>Fourth level</a:t>
             </a:r>
           </a:p>
           <a:p>
             <a:pPr lvl="4"/>
             <a:r>
-              <a:rPr lang="en-US" smtClean="0"/>
+              <a:rPr lang="en-US"/>
               <a:t>Fifth level</a:t>
             </a:r>
-            <a:endParaRPr lang="en-US"/>
           </a:p>
         </p:txBody>
       </p:sp>
@@ -1787,7 +1788,7 @@
           <a:p>
             <a:fld id="{5BCAD085-E8A6-8845-BD4E-CB4CCA059FC4}" type="datetimeFigureOut">
               <a:rPr lang="en-US" smtClean="0"/>
-              <a:t>1/27/13</a:t>
+              <a:t>4/7/2026</a:t>
             </a:fld>
             <a:endParaRPr lang="en-US"/>
           </a:p>
@@ -1829,7 +1830,7 @@
           <a:p>
             <a:fld id="{C1FF6DA9-008F-8B48-92A6-B652298478BF}" type="slidenum">
               <a:rPr lang="en-US" smtClean="0"/>
-              <a:t>‹#›</a:t>
+              <a:t>‹nº›</a:t>
             </a:fld>
             <a:endParaRPr lang="en-US"/>
           </a:p>
@@ -1849,7 +1850,7 @@
 </file>
 
 <file path=ppt/slideLayouts/slideLayout6.xml><?xml version="1.0" encoding="utf-8"?>
-<p:sldLayout xmlns:a="http://schemas.openxmlformats.org/drawingml/2006/main" xmlns:r="http://schemas.openxmlformats.org/officeDocument/2006/relationships" xmlns:p="http://schemas.openxmlformats.org/presentationml/2006/main" type="titleOnly" preserve="1">
+<p:sldLayout xmlns:a="http://schemas.openxmlformats.org/drawingml/2006/main" xmlns:r="http://schemas.openxmlformats.org/officeDocument/2006/relationships" xmlns:p="http://schemas.openxmlformats.org/presentationml/2006/main" type="titleOnly">
   <p:cSld name="Title Only">
     <p:spTree>
       <p:nvGrpSpPr>
@@ -1881,10 +1882,9 @@
           <a:lstStyle/>
           <a:p>
             <a:r>
-              <a:rPr lang="en-US" smtClean="0"/>
+              <a:rPr lang="en-US"/>
               <a:t>Click to edit Master title style</a:t>
             </a:r>
-            <a:endParaRPr lang="en-US"/>
           </a:p>
         </p:txBody>
       </p:sp>
@@ -1905,7 +1905,7 @@
           <a:p>
             <a:fld id="{5BCAD085-E8A6-8845-BD4E-CB4CCA059FC4}" type="datetimeFigureOut">
               <a:rPr lang="en-US" smtClean="0"/>
-              <a:t>1/27/13</a:t>
+              <a:t>4/7/2026</a:t>
             </a:fld>
             <a:endParaRPr lang="en-US"/>
           </a:p>
@@ -1947,7 +1947,7 @@
           <a:p>
             <a:fld id="{C1FF6DA9-008F-8B48-92A6-B652298478BF}" type="slidenum">
               <a:rPr lang="en-US" smtClean="0"/>
-              <a:t>‹#›</a:t>
+              <a:t>‹nº›</a:t>
             </a:fld>
             <a:endParaRPr lang="en-US"/>
           </a:p>
@@ -1967,7 +1967,7 @@
 </file>
 
 <file path=ppt/slideLayouts/slideLayout7.xml><?xml version="1.0" encoding="utf-8"?>
-<p:sldLayout xmlns:a="http://schemas.openxmlformats.org/drawingml/2006/main" xmlns:r="http://schemas.openxmlformats.org/officeDocument/2006/relationships" xmlns:p="http://schemas.openxmlformats.org/presentationml/2006/main" type="blank" preserve="1">
+<p:sldLayout xmlns:a="http://schemas.openxmlformats.org/drawingml/2006/main" xmlns:r="http://schemas.openxmlformats.org/officeDocument/2006/relationships" xmlns:p="http://schemas.openxmlformats.org/presentationml/2006/main" type="blank">
   <p:cSld name="Blank">
     <p:spTree>
       <p:nvGrpSpPr>
@@ -2000,7 +2000,7 @@
           <a:p>
             <a:fld id="{5BCAD085-E8A6-8845-BD4E-CB4CCA059FC4}" type="datetimeFigureOut">
               <a:rPr lang="en-US" smtClean="0"/>
-              <a:t>1/27/13</a:t>
+              <a:t>4/7/2026</a:t>
             </a:fld>
             <a:endParaRPr lang="en-US"/>
           </a:p>
@@ -2042,7 +2042,7 @@
           <a:p>
             <a:fld id="{C1FF6DA9-008F-8B48-92A6-B652298478BF}" type="slidenum">
               <a:rPr lang="en-US" smtClean="0"/>
-              <a:t>‹#›</a:t>
+              <a:t>‹nº›</a:t>
             </a:fld>
             <a:endParaRPr lang="en-US"/>
           </a:p>
@@ -2062,7 +2062,7 @@
 </file>
 
 <file path=ppt/slideLayouts/slideLayout8.xml><?xml version="1.0" encoding="utf-8"?>
-<p:sldLayout xmlns:a="http://schemas.openxmlformats.org/drawingml/2006/main" xmlns:r="http://schemas.openxmlformats.org/officeDocument/2006/relationships" xmlns:p="http://schemas.openxmlformats.org/presentationml/2006/main" type="objTx" preserve="1">
+<p:sldLayout xmlns:a="http://schemas.openxmlformats.org/drawingml/2006/main" xmlns:r="http://schemas.openxmlformats.org/officeDocument/2006/relationships" xmlns:p="http://schemas.openxmlformats.org/presentationml/2006/main" type="objTx">
   <p:cSld name="Content with Caption">
     <p:spTree>
       <p:nvGrpSpPr>
@@ -2103,10 +2103,9 @@
           </a:lstStyle>
           <a:p>
             <a:r>
-              <a:rPr lang="en-US" smtClean="0"/>
+              <a:rPr lang="en-US"/>
               <a:t>Click to edit Master title style</a:t>
             </a:r>
-            <a:endParaRPr lang="en-US"/>
           </a:p>
         </p:txBody>
       </p:sp>
@@ -2160,38 +2159,37 @@
           <a:p>
             <a:pPr lvl="0"/>
             <a:r>
-              <a:rPr lang="en-US" smtClean="0"/>
+              <a:rPr lang="en-US"/>
               <a:t>Click to edit Master text styles</a:t>
             </a:r>
           </a:p>
           <a:p>
             <a:pPr lvl="1"/>
             <a:r>
-              <a:rPr lang="en-US" smtClean="0"/>
+              <a:rPr lang="en-US"/>
               <a:t>Second level</a:t>
             </a:r>
           </a:p>
           <a:p>
             <a:pPr lvl="2"/>
             <a:r>
-              <a:rPr lang="en-US" smtClean="0"/>
+              <a:rPr lang="en-US"/>
               <a:t>Third level</a:t>
             </a:r>
           </a:p>
           <a:p>
             <a:pPr lvl="3"/>
             <a:r>
-              <a:rPr lang="en-US" smtClean="0"/>
+              <a:rPr lang="en-US"/>
               <a:t>Fourth level</a:t>
             </a:r>
           </a:p>
           <a:p>
             <a:pPr lvl="4"/>
             <a:r>
-              <a:rPr lang="en-US" smtClean="0"/>
+              <a:rPr lang="en-US"/>
               <a:t>Fifth level</a:t>
             </a:r>
-            <a:endParaRPr lang="en-US"/>
           </a:p>
         </p:txBody>
       </p:sp>
@@ -2254,7 +2252,7 @@
           <a:p>
             <a:pPr lvl="0"/>
             <a:r>
-              <a:rPr lang="en-US" smtClean="0"/>
+              <a:rPr lang="en-US"/>
               <a:t>Click to edit Master text styles</a:t>
             </a:r>
           </a:p>
@@ -2277,7 +2275,7 @@
           <a:p>
             <a:fld id="{5BCAD085-E8A6-8845-BD4E-CB4CCA059FC4}" type="datetimeFigureOut">
               <a:rPr lang="en-US" smtClean="0"/>
-              <a:t>1/27/13</a:t>
+              <a:t>4/7/2026</a:t>
             </a:fld>
             <a:endParaRPr lang="en-US"/>
           </a:p>
@@ -2319,7 +2317,7 @@
           <a:p>
             <a:fld id="{C1FF6DA9-008F-8B48-92A6-B652298478BF}" type="slidenum">
               <a:rPr lang="en-US" smtClean="0"/>
-              <a:t>‹#›</a:t>
+              <a:t>‹nº›</a:t>
             </a:fld>
             <a:endParaRPr lang="en-US"/>
           </a:p>
@@ -2339,7 +2337,7 @@
 </file>
 
 <file path=ppt/slideLayouts/slideLayout9.xml><?xml version="1.0" encoding="utf-8"?>
-<p:sldLayout xmlns:a="http://schemas.openxmlformats.org/drawingml/2006/main" xmlns:r="http://schemas.openxmlformats.org/officeDocument/2006/relationships" xmlns:p="http://schemas.openxmlformats.org/presentationml/2006/main" type="picTx" preserve="1">
+<p:sldLayout xmlns:a="http://schemas.openxmlformats.org/drawingml/2006/main" xmlns:r="http://schemas.openxmlformats.org/officeDocument/2006/relationships" xmlns:p="http://schemas.openxmlformats.org/presentationml/2006/main" type="picTx">
   <p:cSld name="Picture with Caption">
     <p:spTree>
       <p:nvGrpSpPr>
@@ -2380,10 +2378,9 @@
           </a:lstStyle>
           <a:p>
             <a:r>
-              <a:rPr lang="en-US" smtClean="0"/>
+              <a:rPr lang="en-US"/>
               <a:t>Click to edit Master title style</a:t>
             </a:r>
-            <a:endParaRPr lang="en-US"/>
           </a:p>
         </p:txBody>
       </p:sp>
@@ -2507,7 +2504,7 @@
           <a:p>
             <a:pPr lvl="0"/>
             <a:r>
-              <a:rPr lang="en-US" smtClean="0"/>
+              <a:rPr lang="en-US"/>
               <a:t>Click to edit Master text styles</a:t>
             </a:r>
           </a:p>
@@ -2530,7 +2527,7 @@
           <a:p>
             <a:fld id="{5BCAD085-E8A6-8845-BD4E-CB4CCA059FC4}" type="datetimeFigureOut">
               <a:rPr lang="en-US" smtClean="0"/>
-              <a:t>1/27/13</a:t>
+              <a:t>4/7/2026</a:t>
             </a:fld>
             <a:endParaRPr lang="en-US"/>
           </a:p>
@@ -2572,7 +2569,7 @@
           <a:p>
             <a:fld id="{C1FF6DA9-008F-8B48-92A6-B652298478BF}" type="slidenum">
               <a:rPr lang="en-US" smtClean="0"/>
-              <a:t>‹#›</a:t>
+              <a:t>‹nº›</a:t>
             </a:fld>
             <a:endParaRPr lang="en-US"/>
           </a:p>
@@ -2595,9 +2592,12 @@
 <p:sldMaster xmlns:a="http://schemas.openxmlformats.org/drawingml/2006/main" xmlns:r="http://schemas.openxmlformats.org/officeDocument/2006/relationships" xmlns:p="http://schemas.openxmlformats.org/presentationml/2006/main">
   <p:cSld>
     <p:bg>
-      <p:bgRef idx="1001">
-        <a:schemeClr val="bg1"/>
-      </p:bgRef>
+      <p:bgPr>
+        <a:solidFill>
+          <a:srgbClr val="FFFFFF"/>
+        </a:solidFill>
+        <a:effectLst/>
+      </p:bgPr>
     </p:bg>
     <p:spTree>
       <p:nvGrpSpPr>
@@ -2639,10 +2639,9 @@
           <a:lstStyle/>
           <a:p>
             <a:r>
-              <a:rPr lang="en-US" smtClean="0"/>
+              <a:rPr lang="en-US"/>
               <a:t>Click to edit Master title style</a:t>
             </a:r>
-            <a:endParaRPr lang="en-US"/>
           </a:p>
         </p:txBody>
       </p:sp>
@@ -2673,38 +2672,37 @@
           <a:p>
             <a:pPr lvl="0"/>
             <a:r>
-              <a:rPr lang="en-US" smtClean="0"/>
+              <a:rPr lang="en-US"/>
               <a:t>Click to edit Master text styles</a:t>
             </a:r>
           </a:p>
           <a:p>
             <a:pPr lvl="1"/>
             <a:r>
-              <a:rPr lang="en-US" smtClean="0"/>
+              <a:rPr lang="en-US"/>
               <a:t>Second level</a:t>
             </a:r>
           </a:p>
           <a:p>
             <a:pPr lvl="2"/>
             <a:r>
-              <a:rPr lang="en-US" smtClean="0"/>
+              <a:rPr lang="en-US"/>
               <a:t>Third level</a:t>
             </a:r>
           </a:p>
           <a:p>
             <a:pPr lvl="3"/>
             <a:r>
-              <a:rPr lang="en-US" smtClean="0"/>
+              <a:rPr lang="en-US"/>
               <a:t>Fourth level</a:t>
             </a:r>
           </a:p>
           <a:p>
             <a:pPr lvl="4"/>
             <a:r>
-              <a:rPr lang="en-US" smtClean="0"/>
+              <a:rPr lang="en-US"/>
               <a:t>Fifth level</a:t>
             </a:r>
-            <a:endParaRPr lang="en-US"/>
           </a:p>
         </p:txBody>
       </p:sp>
@@ -2743,7 +2741,7 @@
           <a:p>
             <a:fld id="{5BCAD085-E8A6-8845-BD4E-CB4CCA059FC4}" type="datetimeFigureOut">
               <a:rPr lang="en-US" smtClean="0"/>
-              <a:t>1/27/13</a:t>
+              <a:t>4/7/2026</a:t>
             </a:fld>
             <a:endParaRPr lang="en-US"/>
           </a:p>
@@ -2821,9 +2819,38 @@
           <a:p>
             <a:fld id="{C1FF6DA9-008F-8B48-92A6-B652298478BF}" type="slidenum">
               <a:rPr lang="en-US" smtClean="0"/>
-              <a:t>‹#›</a:t>
+              <a:t>‹nº›</a:t>
             </a:fld>
             <a:endParaRPr lang="en-US"/>
+          </a:p>
+        </p:txBody>
+      </p:sp>
+      <p:sp>
+        <p:nvSpPr>
+          <p:cNvPr id="900" name="AccentBar"/>
+          <p:cNvSpPr/>
+          <p:nvPr/>
+        </p:nvSpPr>
+        <p:spPr>
+          <a:xfrm>
+            <a:off x="0" y="6629400"/>
+            <a:ext cx="12192000" cy="228600"/>
+          </a:xfrm>
+          <a:prstGeom prst="rect">
+            <a:avLst/>
+          </a:prstGeom>
+          <a:solidFill>
+            <a:srgbClr val="0F7B6C"/>
+          </a:solidFill>
+          <a:ln>
+            <a:noFill/>
+          </a:ln>
+        </p:spPr>
+        <p:txBody>
+          <a:bodyPr/>
+          <a:lstStyle/>
+          <a:p>
+            <a:endParaRPr lang="pt-BR"/>
           </a:p>
         </p:txBody>
       </p:sp>
@@ -2836,17 +2863,17 @@
   </p:cSld>
   <p:clrMap bg1="lt1" tx1="dk1" bg2="lt2" tx2="dk2" accent1="accent1" accent2="accent2" accent3="accent3" accent4="accent4" accent5="accent5" accent6="accent6" hlink="hlink" folHlink="folHlink"/>
   <p:sldLayoutIdLst>
-    <p:sldLayoutId id="2147483649" r:id="rId1"/>
-    <p:sldLayoutId id="2147483650" r:id="rId2"/>
-    <p:sldLayoutId id="2147483651" r:id="rId3"/>
-    <p:sldLayoutId id="2147483652" r:id="rId4"/>
-    <p:sldLayoutId id="2147483653" r:id="rId5"/>
-    <p:sldLayoutId id="2147483654" r:id="rId6"/>
-    <p:sldLayoutId id="2147483655" r:id="rId7"/>
-    <p:sldLayoutId id="2147483656" r:id="rId8"/>
-    <p:sldLayoutId id="2147483657" r:id="rId9"/>
-    <p:sldLayoutId id="2147483658" r:id="rId10"/>
-    <p:sldLayoutId id="2147483659" r:id="rId11"/>
+    <p:sldLayoutId id="2147483685" r:id="rId1"/>
+    <p:sldLayoutId id="2147483686" r:id="rId2"/>
+    <p:sldLayoutId id="2147483687" r:id="rId3"/>
+    <p:sldLayoutId id="2147483688" r:id="rId4"/>
+    <p:sldLayoutId id="2147483689" r:id="rId5"/>
+    <p:sldLayoutId id="2147483690" r:id="rId6"/>
+    <p:sldLayoutId id="2147483691" r:id="rId7"/>
+    <p:sldLayoutId id="2147483692" r:id="rId8"/>
+    <p:sldLayoutId id="2147483693" r:id="rId9"/>
+    <p:sldLayoutId id="2147483694" r:id="rId10"/>
+    <p:sldLayoutId id="2147483695" r:id="rId11"/>
   </p:sldLayoutIdLst>
   <p:txStyles>
     <p:titleStyle>
@@ -2857,7 +2884,7 @@
         <a:buNone/>
         <a:defRPr sz="4400" kern="1200">
           <a:solidFill>
-            <a:schemeClr val="tx1"/>
+            <a:srgbClr val="1B2A4A"/>
           </a:solidFill>
           <a:latin typeface="+mj-lt"/>
           <a:ea typeface="+mj-ea"/>
@@ -2874,7 +2901,7 @@
         <a:buChar char="•"/>
         <a:defRPr sz="3200" kern="1200">
           <a:solidFill>
-            <a:schemeClr val="tx1"/>
+            <a:srgbClr val="374869"/>
           </a:solidFill>
           <a:latin typeface="+mn-lt"/>
           <a:ea typeface="+mn-ea"/>
@@ -3102,13 +3129,21 @@
 </file>
 
 <file path=ppt/slides/slide1.xml><?xml version="1.0" encoding="utf-8"?>
-<p:sld xmlns:a="http://schemas.openxmlformats.org/drawingml/2006/main" xmlns:p="http://schemas.openxmlformats.org/presentationml/2006/main" xmlns:r="http://schemas.openxmlformats.org/officeDocument/2006/relationships">
+<p:sld xmlns:a="http://schemas.openxmlformats.org/drawingml/2006/main" xmlns:r="http://schemas.openxmlformats.org/officeDocument/2006/relationships" xmlns:p="http://schemas.openxmlformats.org/presentationml/2006/main">
   <p:cSld>
     <p:bg>
       <p:bgPr>
-        <a:solidFill>
-          <a:srgbClr val="1E3A5F"/>
-        </a:solidFill>
+        <a:gradFill>
+          <a:gsLst>
+            <a:gs pos="0">
+              <a:srgbClr val="0D1A2E"/>
+            </a:gs>
+            <a:gs pos="100000">
+              <a:srgbClr val="1B2A4A"/>
+            </a:gs>
+          </a:gsLst>
+          <a:lin ang="5400000" scaled="1"/>
+        </a:gradFill>
         <a:effectLst/>
       </p:bgPr>
     </p:bg>
@@ -3118,7 +3153,14 @@
         <p:cNvGrpSpPr/>
         <p:nvPr/>
       </p:nvGrpSpPr>
-      <p:grpSpPr/>
+      <p:grpSpPr>
+        <a:xfrm>
+          <a:off x="0" y="0"/>
+          <a:ext cx="0" cy="0"/>
+          <a:chOff x="0" y="0"/>
+          <a:chExt cx="0" cy="0"/>
+        </a:xfrm>
+      </p:grpSpPr>
       <p:sp>
         <p:nvSpPr>
           <p:cNvPr id="2" name="TextBox 1"/>
@@ -3127,8 +3169,8 @@
         </p:nvSpPr>
         <p:spPr>
           <a:xfrm>
-            <a:off x="914400" y="1097280"/>
-            <a:ext cx="10058400" cy="548640"/>
+            <a:off x="914400" y="2540000"/>
+            <a:ext cx="10363200" cy="548640"/>
           </a:xfrm>
           <a:prstGeom prst="rect">
             <a:avLst/>
@@ -3142,13 +3184,17 @@
           <a:lstStyle/>
           <a:p>
             <a:pPr algn="ctr">
-              <a:defRPr sz="1400" b="1">
-                <a:solidFill>
-                  <a:srgbClr val="94B8FF"/>
-                </a:solidFill>
-              </a:defRPr>
+              <a:spcBef>
+                <a:spcPts val="0"/>
+              </a:spcBef>
             </a:pPr>
             <a:r>
+              <a:rPr lang="pt-BR" sz="1400" spc="400" dirty="0">
+                <a:solidFill>
+                  <a:srgbClr val="0F7B6C"/>
+                </a:solidFill>
+                <a:latin typeface="Montserrat"/>
+              </a:rPr>
               <a:t>FRENTE NACIONAL DE PREFEITOS</a:t>
             </a:r>
           </a:p>
@@ -3162,8 +3208,8 @@
         </p:nvSpPr>
         <p:spPr>
           <a:xfrm>
-            <a:off x="914400" y="2286000"/>
-            <a:ext cx="10058400" cy="1371600"/>
+            <a:off x="914400" y="3302000"/>
+            <a:ext cx="10363200" cy="2743200"/>
           </a:xfrm>
           <a:prstGeom prst="rect">
             <a:avLst/>
@@ -3176,35 +3222,106 @@
           </a:bodyPr>
           <a:lstStyle/>
           <a:p>
-            <a:pPr algn="ctr">
-              <a:defRPr sz="3600" b="1">
+            <a:pPr algn="ctr"/>
+            <a:r>
+              <a:rPr lang="pt-BR" sz="4400" b="1" dirty="0">
                 <a:solidFill>
                   <a:srgbClr val="FFFFFF"/>
                 </a:solidFill>
-              </a:defRPr>
-            </a:pPr>
-            <a:r>
+                <a:latin typeface="Montserrat"/>
+              </a:rPr>
               <a:t>Sistema FNP</a:t>
             </a:r>
           </a:p>
           <a:p>
             <a:pPr algn="ctr">
               <a:spcBef>
-                <a:spcPts val="1200"/>
+                <a:spcPts val="800"/>
               </a:spcBef>
-              <a:defRPr sz="1600">
-                <a:solidFill>
-                  <a:srgbClr val="94B8FF"/>
-                </a:solidFill>
-              </a:defRPr>
             </a:pPr>
             <a:r>
-              <a:t>Guia de Utilizacao — Plataforma de Gestao Institucional</a:t>
-            </a:r>
+              <a:rPr lang="pt-BR" sz="1800" dirty="0">
+                <a:solidFill>
+                  <a:srgbClr val="A8C4D4"/>
+                </a:solidFill>
+                <a:latin typeface="Inter"/>
+              </a:rPr>
+              <a:t>Guia de Utilização — Plataforma de Gestão Institucional</a:t>
+            </a:r>
+          </a:p>
+        </p:txBody>
+      </p:sp>
+      <p:sp>
+        <p:nvSpPr>
+          <p:cNvPr id="10" name="Line"/>
+          <p:cNvSpPr/>
+          <p:nvPr/>
+        </p:nvSpPr>
+        <p:spPr>
+          <a:xfrm>
+            <a:off x="4572000" y="3175000"/>
+            <a:ext cx="3048000" cy="0"/>
+          </a:xfrm>
+          <a:prstGeom prst="line">
+            <a:avLst/>
+          </a:prstGeom>
+          <a:ln w="19050">
+            <a:solidFill>
+              <a:srgbClr val="0F7B6C"/>
+            </a:solidFill>
+          </a:ln>
+        </p:spPr>
+        <p:txBody>
+          <a:bodyPr/>
+          <a:lstStyle/>
+          <a:p>
+            <a:endParaRPr lang="pt-BR"/>
+          </a:p>
+        </p:txBody>
+      </p:sp>
+      <p:sp>
+        <p:nvSpPr>
+          <p:cNvPr id="11" name="BottomBar"/>
+          <p:cNvSpPr/>
+          <p:nvPr/>
+        </p:nvSpPr>
+        <p:spPr>
+          <a:xfrm>
+            <a:off x="0" y="6553200"/>
+            <a:ext cx="12192000" cy="304800"/>
+          </a:xfrm>
+          <a:prstGeom prst="rect">
+            <a:avLst/>
+          </a:prstGeom>
+          <a:gradFill>
+            <a:gsLst>
+              <a:gs pos="0">
+                <a:srgbClr val="0F7B6C"/>
+              </a:gs>
+              <a:gs pos="100000">
+                <a:srgbClr val="0A5E53"/>
+              </a:gs>
+            </a:gsLst>
+            <a:lin ang="0" scaled="1"/>
+          </a:gradFill>
+          <a:ln>
+            <a:noFill/>
+          </a:ln>
+        </p:spPr>
+        <p:txBody>
+          <a:bodyPr/>
+          <a:lstStyle/>
+          <a:p>
+            <a:endParaRPr lang="pt-BR"/>
           </a:p>
         </p:txBody>
       </p:sp>
     </p:spTree>
+    <p:extLst>
+      <p:ext uri="{BB962C8B-B14F-4D97-AF65-F5344CB8AC3E}">
+        <p14:creationId xmlns:p14="http://schemas.microsoft.com/office/powerpoint/2010/main" val="3364133441"/>
+      </p:ext>
+    </p:extLst>
   </p:cSld>
   <p:clrMapOvr>
     <a:masterClrMapping/>
@@ -3213,7 +3330,7 @@
 </file>
 
 <file path=ppt/slides/slide10.xml><?xml version="1.0" encoding="utf-8"?>
-<p:sld xmlns:a="http://schemas.openxmlformats.org/drawingml/2006/main" xmlns:p="http://schemas.openxmlformats.org/presentationml/2006/main" xmlns:r="http://schemas.openxmlformats.org/officeDocument/2006/relationships">
+<p:sld xmlns:a="http://schemas.openxmlformats.org/drawingml/2006/main" xmlns:r="http://schemas.openxmlformats.org/officeDocument/2006/relationships" xmlns:p="http://schemas.openxmlformats.org/presentationml/2006/main">
   <p:cSld>
     <p:spTree>
       <p:nvGrpSpPr>
@@ -3221,7 +3338,14 @@
         <p:cNvGrpSpPr/>
         <p:nvPr/>
       </p:nvGrpSpPr>
-      <p:grpSpPr/>
+      <p:grpSpPr>
+        <a:xfrm>
+          <a:off x="0" y="0"/>
+          <a:ext cx="0" cy="0"/>
+          <a:chOff x="0" y="0"/>
+          <a:chExt cx="0" cy="0"/>
+        </a:xfrm>
+      </p:grpSpPr>
       <p:sp>
         <p:nvSpPr>
           <p:cNvPr id="2" name="Rectangle 1"/>
@@ -3231,13 +3355,13 @@
         <p:spPr>
           <a:xfrm>
             <a:off x="0" y="0"/>
-            <a:ext cx="12191695" cy="73152"/>
+            <a:ext cx="12191695" cy="76200"/>
           </a:xfrm>
           <a:prstGeom prst="rect">
             <a:avLst/>
           </a:prstGeom>
           <a:solidFill>
-            <a:srgbClr val="1E3A5F"/>
+            <a:srgbClr val="0F7B6C"/>
           </a:solidFill>
           <a:ln>
             <a:noFill/>
@@ -3262,6 +3386,7 @@
           <a:lstStyle/>
           <a:p>
             <a:pPr algn="ctr"/>
+            <a:endParaRPr/>
           </a:p>
         </p:txBody>
       </p:sp>
@@ -3273,8 +3398,8 @@
         </p:nvSpPr>
         <p:spPr>
           <a:xfrm>
-            <a:off x="548640" y="274320"/>
-            <a:ext cx="8229600" cy="548640"/>
+            <a:off x="457200" y="228600"/>
+            <a:ext cx="3664786" cy="523220"/>
           </a:xfrm>
           <a:prstGeom prst="rect">
             <a:avLst/>
@@ -3287,14 +3412,14 @@
           </a:bodyPr>
           <a:lstStyle/>
           <a:p>
-            <a:pPr>
-              <a:defRPr sz="2200" b="1">
-                <a:solidFill>
-                  <a:srgbClr val="1E3A5F"/>
-                </a:solidFill>
-              </a:defRPr>
-            </a:pPr>
-            <a:r>
+            <a:pPr algn="l"/>
+            <a:r>
+              <a:rPr lang="pt-BR" sz="2800" b="1" dirty="0">
+                <a:solidFill>
+                  <a:srgbClr val="1B2A4A"/>
+                </a:solidFill>
+                <a:latin typeface="Montserrat"/>
+              </a:rPr>
               <a:t>Detalhe da Pessoa</a:t>
             </a:r>
           </a:p>
@@ -3308,8 +3433,8 @@
         </p:nvSpPr>
         <p:spPr>
           <a:xfrm>
-            <a:off x="548640" y="1097280"/>
-            <a:ext cx="3474720" cy="5029200"/>
+            <a:off x="457200" y="914400"/>
+            <a:ext cx="4572000" cy="1938992"/>
           </a:xfrm>
           <a:prstGeom prst="rect">
             <a:avLst/>
@@ -3322,144 +3447,126 @@
           </a:bodyPr>
           <a:lstStyle/>
           <a:p>
-            <a:pPr>
+            <a:pPr algn="l">
               <a:spcBef>
-                <a:spcPts val="600"/>
+                <a:spcPts val="200"/>
               </a:spcBef>
-              <a:defRPr sz="1300">
-                <a:solidFill>
-                  <a:srgbClr val="6B7280"/>
-                </a:solidFill>
-              </a:defRPr>
+              <a:buFont typeface="Arial"/>
+              <a:buChar char="•"/>
             </a:pPr>
             <a:r>
-              <a:t>Avatar, nome, tipo, partido e mandato.</a:t>
-            </a:r>
-          </a:p>
-          <a:p>
-            <a:pPr>
+              <a:rPr lang="pt-BR" sz="1500" dirty="0">
+                <a:solidFill>
+                  <a:srgbClr val="374869"/>
+                </a:solidFill>
+                <a:latin typeface="Inter"/>
+              </a:rPr>
+              <a:t>Avatar, nome, tipo, partido e mandato</a:t>
+            </a:r>
+          </a:p>
+          <a:p>
+            <a:pPr algn="l">
               <a:spcBef>
-                <a:spcPts val="600"/>
+                <a:spcPts val="400"/>
               </a:spcBef>
-              <a:defRPr sz="1300">
-                <a:solidFill>
-                  <a:srgbClr val="6B7280"/>
-                </a:solidFill>
-              </a:defRPr>
+              <a:buNone/>
             </a:pPr>
-          </a:p>
-          <a:p>
-            <a:pPr>
+            <a:r>
+              <a:rPr lang="pt-BR" sz="1500" b="1" dirty="0">
+                <a:solidFill>
+                  <a:srgbClr val="0F7B6C"/>
+                </a:solidFill>
+                <a:latin typeface="Montserrat"/>
+              </a:rPr>
+              <a:t>Vínculos com Municípios</a:t>
+            </a:r>
+          </a:p>
+          <a:p>
+            <a:pPr algn="l">
               <a:spcBef>
-                <a:spcPts val="600"/>
+                <a:spcPts val="200"/>
               </a:spcBef>
-              <a:defRPr sz="1300">
-                <a:solidFill>
-                  <a:srgbClr val="6B7280"/>
-                </a:solidFill>
-              </a:defRPr>
+              <a:buFont typeface="Arial"/>
+              <a:buChar char="•"/>
             </a:pPr>
             <a:r>
-              <a:t>Vinculos com Municipios:</a:t>
-            </a:r>
-          </a:p>
-          <a:p>
-            <a:pPr>
+              <a:rPr lang="pt-BR" sz="1500" dirty="0">
+                <a:solidFill>
+                  <a:srgbClr val="374869"/>
+                </a:solidFill>
+                <a:latin typeface="Inter"/>
+              </a:rPr>
+              <a:t>Quais cidades a pessoa representa</a:t>
+            </a:r>
+          </a:p>
+          <a:p>
+            <a:pPr algn="l">
               <a:spcBef>
-                <a:spcPts val="600"/>
+                <a:spcPts val="400"/>
               </a:spcBef>
-              <a:defRPr sz="1300">
-                <a:solidFill>
-                  <a:srgbClr val="6B7280"/>
-                </a:solidFill>
-              </a:defRPr>
+              <a:buNone/>
             </a:pPr>
             <a:r>
-              <a:t>   Quais cidades a pessoa representa.</a:t>
-            </a:r>
-          </a:p>
-          <a:p>
-            <a:pPr>
+              <a:rPr lang="pt-BR" sz="1500" b="1" dirty="0">
+                <a:solidFill>
+                  <a:srgbClr val="0F7B6C"/>
+                </a:solidFill>
+                <a:latin typeface="Montserrat"/>
+              </a:rPr>
+              <a:t>Informações detalhadas</a:t>
+            </a:r>
+          </a:p>
+          <a:p>
+            <a:pPr algn="l">
               <a:spcBef>
-                <a:spcPts val="600"/>
+                <a:spcPts val="200"/>
               </a:spcBef>
-              <a:defRPr sz="1300">
-                <a:solidFill>
-                  <a:srgbClr val="6B7280"/>
-                </a:solidFill>
-              </a:defRPr>
+              <a:buFont typeface="Arial"/>
+              <a:buChar char="•"/>
             </a:pPr>
-          </a:p>
-          <a:p>
-            <a:pPr>
+            <a:r>
+              <a:rPr lang="pt-BR" sz="1500" dirty="0">
+                <a:solidFill>
+                  <a:srgbClr val="374869"/>
+                </a:solidFill>
+                <a:latin typeface="Inter"/>
+              </a:rPr>
+              <a:t>Cargo, tipo, partido, cadastro</a:t>
+            </a:r>
+          </a:p>
+          <a:p>
+            <a:pPr algn="l">
               <a:spcBef>
-                <a:spcPts val="600"/>
+                <a:spcPts val="400"/>
               </a:spcBef>
-              <a:defRPr sz="1300">
-                <a:solidFill>
-                  <a:srgbClr val="6B7280"/>
-                </a:solidFill>
-              </a:defRPr>
+              <a:buNone/>
             </a:pPr>
             <a:r>
-              <a:t>Informacoes detalhadas:</a:t>
-            </a:r>
-          </a:p>
-          <a:p>
-            <a:pPr>
+              <a:rPr lang="pt-BR" sz="1500" b="1" dirty="0">
+                <a:solidFill>
+                  <a:srgbClr val="0F7B6C"/>
+                </a:solidFill>
+                <a:latin typeface="Montserrat"/>
+              </a:rPr>
+              <a:t>Histórico de Eventos</a:t>
+            </a:r>
+          </a:p>
+          <a:p>
+            <a:pPr algn="l">
               <a:spcBef>
-                <a:spcPts val="600"/>
+                <a:spcPts val="200"/>
               </a:spcBef>
-              <a:defRPr sz="1300">
-                <a:solidFill>
-                  <a:srgbClr val="6B7280"/>
-                </a:solidFill>
-              </a:defRPr>
+              <a:buFont typeface="Arial"/>
+              <a:buChar char="•"/>
             </a:pPr>
             <a:r>
-              <a:t>   Cargo, tipo, partido, cadastro.</a:t>
-            </a:r>
-          </a:p>
-          <a:p>
-            <a:pPr>
-              <a:spcBef>
-                <a:spcPts val="600"/>
-              </a:spcBef>
-              <a:defRPr sz="1300">
-                <a:solidFill>
-                  <a:srgbClr val="6B7280"/>
-                </a:solidFill>
-              </a:defRPr>
-            </a:pPr>
-          </a:p>
-          <a:p>
-            <a:pPr>
-              <a:spcBef>
-                <a:spcPts val="600"/>
-              </a:spcBef>
-              <a:defRPr sz="1300">
-                <a:solidFill>
-                  <a:srgbClr val="6B7280"/>
-                </a:solidFill>
-              </a:defRPr>
-            </a:pPr>
-            <a:r>
-              <a:t>Historico de Eventos:</a:t>
-            </a:r>
-          </a:p>
-          <a:p>
-            <a:pPr>
-              <a:spcBef>
-                <a:spcPts val="600"/>
-              </a:spcBef>
-              <a:defRPr sz="1300">
-                <a:solidFill>
-                  <a:srgbClr val="6B7280"/>
-                </a:solidFill>
-              </a:defRPr>
-            </a:pPr>
-            <a:r>
-              <a:t>   Participacoes com pontos.</a:t>
+              <a:rPr lang="pt-BR" sz="1500" dirty="0">
+                <a:solidFill>
+                  <a:srgbClr val="374869"/>
+                </a:solidFill>
+                <a:latin typeface="Inter"/>
+              </a:rPr>
+              <a:t>Participações com pontos</a:t>
             </a:r>
           </a:p>
         </p:txBody>
@@ -3480,15 +3587,27 @@
         </p:blipFill>
         <p:spPr>
           <a:xfrm>
-            <a:off x="4389120" y="914400"/>
-            <a:ext cx="4572000" cy="2531878"/>
+            <a:off x="5029200" y="457200"/>
+            <a:ext cx="6858000" cy="5878286"/>
           </a:xfrm>
           <a:prstGeom prst="rect">
             <a:avLst/>
           </a:prstGeom>
+          <a:effectLst>
+            <a:outerShdw blurRad="76200" dist="38100" dir="5400000" algn="tl">
+              <a:srgbClr val="000000">
+                <a:alpha val="25000"/>
+              </a:srgbClr>
+            </a:outerShdw>
+          </a:effectLst>
         </p:spPr>
       </p:pic>
     </p:spTree>
+    <p:extLst>
+      <p:ext uri="{BB962C8B-B14F-4D97-AF65-F5344CB8AC3E}">
+        <p14:creationId xmlns:p14="http://schemas.microsoft.com/office/powerpoint/2010/main" val="625323168"/>
+      </p:ext>
+    </p:extLst>
   </p:cSld>
   <p:clrMapOvr>
     <a:masterClrMapping/>
@@ -3497,13 +3616,21 @@
 </file>
 
 <file path=ppt/slides/slide11.xml><?xml version="1.0" encoding="utf-8"?>
-<p:sld xmlns:a="http://schemas.openxmlformats.org/drawingml/2006/main" xmlns:p="http://schemas.openxmlformats.org/presentationml/2006/main" xmlns:r="http://schemas.openxmlformats.org/officeDocument/2006/relationships">
+<p:sld xmlns:a="http://schemas.openxmlformats.org/drawingml/2006/main" xmlns:r="http://schemas.openxmlformats.org/officeDocument/2006/relationships" xmlns:p="http://schemas.openxmlformats.org/presentationml/2006/main">
   <p:cSld>
     <p:bg>
       <p:bgPr>
-        <a:solidFill>
-          <a:srgbClr val="1E3A5F"/>
-        </a:solidFill>
+        <a:gradFill>
+          <a:gsLst>
+            <a:gs pos="0">
+              <a:srgbClr val="0D1A2E"/>
+            </a:gs>
+            <a:gs pos="100000">
+              <a:srgbClr val="1B2A4A"/>
+            </a:gs>
+          </a:gsLst>
+          <a:lin ang="5400000" scaled="1"/>
+        </a:gradFill>
         <a:effectLst/>
       </p:bgPr>
     </p:bg>
@@ -3513,7 +3640,14 @@
         <p:cNvGrpSpPr/>
         <p:nvPr/>
       </p:nvGrpSpPr>
-      <p:grpSpPr/>
+      <p:grpSpPr>
+        <a:xfrm>
+          <a:off x="0" y="0"/>
+          <a:ext cx="0" cy="0"/>
+          <a:chOff x="0" y="0"/>
+          <a:chExt cx="0" cy="0"/>
+        </a:xfrm>
+      </p:grpSpPr>
       <p:sp>
         <p:nvSpPr>
           <p:cNvPr id="2" name="TextBox 1"/>
@@ -3522,8 +3656,8 @@
         </p:nvSpPr>
         <p:spPr>
           <a:xfrm>
-            <a:off x="914400" y="1828800"/>
-            <a:ext cx="10058400" cy="914400"/>
+            <a:off x="914400" y="2286000"/>
+            <a:ext cx="10363200" cy="1371600"/>
           </a:xfrm>
           <a:prstGeom prst="rect">
             <a:avLst/>
@@ -3536,14 +3670,14 @@
           </a:bodyPr>
           <a:lstStyle/>
           <a:p>
-            <a:pPr algn="ctr">
-              <a:defRPr sz="7200" b="1">
-                <a:solidFill>
-                  <a:srgbClr val="94B8FF"/>
-                </a:solidFill>
-              </a:defRPr>
-            </a:pPr>
-            <a:r>
+            <a:pPr algn="l"/>
+            <a:r>
+              <a:rPr lang="pt-BR" sz="8000" b="1" dirty="0">
+                <a:solidFill>
+                  <a:srgbClr val="0F7B6C"/>
+                </a:solidFill>
+                <a:latin typeface="Montserrat"/>
+              </a:rPr>
               <a:t>04</a:t>
             </a:r>
           </a:p>
@@ -3557,8 +3691,8 @@
         </p:nvSpPr>
         <p:spPr>
           <a:xfrm>
-            <a:off x="914400" y="2926080"/>
-            <a:ext cx="10058400" cy="914400"/>
+            <a:off x="914400" y="3810000"/>
+            <a:ext cx="10363200" cy="914400"/>
           </a:xfrm>
           <a:prstGeom prst="rect">
             <a:avLst/>
@@ -3571,20 +3705,53 @@
           </a:bodyPr>
           <a:lstStyle/>
           <a:p>
-            <a:pPr algn="ctr">
-              <a:defRPr sz="3200" b="1">
+            <a:pPr algn="l"/>
+            <a:r>
+              <a:rPr lang="pt-BR" sz="3200" b="1" dirty="0">
                 <a:solidFill>
                   <a:srgbClr val="FFFFFF"/>
                 </a:solidFill>
-              </a:defRPr>
-            </a:pPr>
-            <a:r>
-              <a:t>Cadastro de Municipios</a:t>
-            </a:r>
+                <a:latin typeface="Montserrat"/>
+              </a:rPr>
+              <a:t>Cadastro de Municípios</a:t>
+            </a:r>
+          </a:p>
+        </p:txBody>
+      </p:sp>
+      <p:sp>
+        <p:nvSpPr>
+          <p:cNvPr id="10" name="AccentLine"/>
+          <p:cNvSpPr/>
+          <p:nvPr/>
+        </p:nvSpPr>
+        <p:spPr>
+          <a:xfrm>
+            <a:off x="914400" y="3708400"/>
+            <a:ext cx="1828800" cy="0"/>
+          </a:xfrm>
+          <a:prstGeom prst="line">
+            <a:avLst/>
+          </a:prstGeom>
+          <a:ln w="25400">
+            <a:solidFill>
+              <a:srgbClr val="0F7B6C"/>
+            </a:solidFill>
+          </a:ln>
+        </p:spPr>
+        <p:txBody>
+          <a:bodyPr/>
+          <a:lstStyle/>
+          <a:p>
+            <a:endParaRPr lang="pt-BR"/>
           </a:p>
         </p:txBody>
       </p:sp>
     </p:spTree>
+    <p:extLst>
+      <p:ext uri="{BB962C8B-B14F-4D97-AF65-F5344CB8AC3E}">
+        <p14:creationId xmlns:p14="http://schemas.microsoft.com/office/powerpoint/2010/main" val="3315700648"/>
+      </p:ext>
+    </p:extLst>
   </p:cSld>
   <p:clrMapOvr>
     <a:masterClrMapping/>
@@ -3593,7 +3760,7 @@
 </file>
 
 <file path=ppt/slides/slide12.xml><?xml version="1.0" encoding="utf-8"?>
-<p:sld xmlns:a="http://schemas.openxmlformats.org/drawingml/2006/main" xmlns:p="http://schemas.openxmlformats.org/presentationml/2006/main" xmlns:r="http://schemas.openxmlformats.org/officeDocument/2006/relationships">
+<p:sld xmlns:a="http://schemas.openxmlformats.org/drawingml/2006/main" xmlns:r="http://schemas.openxmlformats.org/officeDocument/2006/relationships" xmlns:p="http://schemas.openxmlformats.org/presentationml/2006/main">
   <p:cSld>
     <p:spTree>
       <p:nvGrpSpPr>
@@ -3601,7 +3768,14 @@
         <p:cNvGrpSpPr/>
         <p:nvPr/>
       </p:nvGrpSpPr>
-      <p:grpSpPr/>
+      <p:grpSpPr>
+        <a:xfrm>
+          <a:off x="0" y="0"/>
+          <a:ext cx="0" cy="0"/>
+          <a:chOff x="0" y="0"/>
+          <a:chExt cx="0" cy="0"/>
+        </a:xfrm>
+      </p:grpSpPr>
       <p:sp>
         <p:nvSpPr>
           <p:cNvPr id="2" name="Rectangle 1"/>
@@ -3611,13 +3785,13 @@
         <p:spPr>
           <a:xfrm>
             <a:off x="0" y="0"/>
-            <a:ext cx="12191695" cy="73152"/>
+            <a:ext cx="12191695" cy="76200"/>
           </a:xfrm>
           <a:prstGeom prst="rect">
             <a:avLst/>
           </a:prstGeom>
           <a:solidFill>
-            <a:srgbClr val="1E3A5F"/>
+            <a:srgbClr val="0F7B6C"/>
           </a:solidFill>
           <a:ln>
             <a:noFill/>
@@ -3642,6 +3816,7 @@
           <a:lstStyle/>
           <a:p>
             <a:pPr algn="ctr"/>
+            <a:endParaRPr/>
           </a:p>
         </p:txBody>
       </p:sp>
@@ -3653,8 +3828,8 @@
         </p:nvSpPr>
         <p:spPr>
           <a:xfrm>
-            <a:off x="548640" y="274320"/>
-            <a:ext cx="8229600" cy="548640"/>
+            <a:off x="457200" y="228600"/>
+            <a:ext cx="3799438" cy="523220"/>
           </a:xfrm>
           <a:prstGeom prst="rect">
             <a:avLst/>
@@ -3667,15 +3842,15 @@
           </a:bodyPr>
           <a:lstStyle/>
           <a:p>
-            <a:pPr>
-              <a:defRPr sz="2200" b="1">
-                <a:solidFill>
-                  <a:srgbClr val="1E3A5F"/>
-                </a:solidFill>
-              </a:defRPr>
-            </a:pPr>
-            <a:r>
-              <a:t>Lista de Municipios</a:t>
+            <a:pPr algn="l"/>
+            <a:r>
+              <a:rPr lang="pt-BR" sz="2800" b="1" dirty="0">
+                <a:solidFill>
+                  <a:srgbClr val="1B2A4A"/>
+                </a:solidFill>
+                <a:latin typeface="Montserrat"/>
+              </a:rPr>
+              <a:t>Lista de Municípios</a:t>
             </a:r>
           </a:p>
         </p:txBody>
@@ -3688,8 +3863,8 @@
         </p:nvSpPr>
         <p:spPr>
           <a:xfrm>
-            <a:off x="548640" y="1097280"/>
-            <a:ext cx="3474720" cy="5029200"/>
+            <a:off x="457200" y="914400"/>
+            <a:ext cx="4572000" cy="1169551"/>
           </a:xfrm>
           <a:prstGeom prst="rect">
             <a:avLst/>
@@ -3702,99 +3877,75 @@
           </a:bodyPr>
           <a:lstStyle/>
           <a:p>
-            <a:pPr>
+            <a:pPr algn="l">
               <a:spcBef>
-                <a:spcPts val="600"/>
+                <a:spcPts val="400"/>
               </a:spcBef>
-              <a:defRPr sz="1300">
-                <a:solidFill>
-                  <a:srgbClr val="6B7280"/>
-                </a:solidFill>
-              </a:defRPr>
+              <a:buFont typeface="Arial"/>
+              <a:buChar char="•"/>
             </a:pPr>
             <a:r>
-              <a:t>1. Menu &gt; Municipios</a:t>
-            </a:r>
-          </a:p>
-          <a:p>
-            <a:pPr>
+              <a:rPr lang="pt-BR" sz="1500" dirty="0">
+                <a:solidFill>
+                  <a:srgbClr val="374869"/>
+                </a:solidFill>
+                <a:latin typeface="Inter"/>
+              </a:rPr>
+              <a:t>Menu &gt; Municípios</a:t>
+            </a:r>
+          </a:p>
+          <a:p>
+            <a:pPr algn="l">
               <a:spcBef>
-                <a:spcPts val="600"/>
+                <a:spcPts val="400"/>
               </a:spcBef>
-              <a:defRPr sz="1300">
-                <a:solidFill>
-                  <a:srgbClr val="6B7280"/>
-                </a:solidFill>
-              </a:defRPr>
+              <a:buFont typeface="Arial"/>
+              <a:buChar char="•"/>
             </a:pPr>
-          </a:p>
-          <a:p>
-            <a:pPr>
+            <a:r>
+              <a:rPr lang="pt-BR" sz="1500" dirty="0">
+                <a:solidFill>
+                  <a:srgbClr val="374869"/>
+                </a:solidFill>
+                <a:latin typeface="Inter"/>
+              </a:rPr>
+              <a:t>Brasão real, nome, UF, região</a:t>
+            </a:r>
+          </a:p>
+          <a:p>
+            <a:pPr algn="l">
               <a:spcBef>
-                <a:spcPts val="600"/>
+                <a:spcPts val="400"/>
               </a:spcBef>
-              <a:defRPr sz="1300">
-                <a:solidFill>
-                  <a:srgbClr val="6B7280"/>
-                </a:solidFill>
-              </a:defRPr>
+              <a:buFont typeface="Arial"/>
+              <a:buChar char="•"/>
             </a:pPr>
             <a:r>
-              <a:t>2. Brasao real, nome, UF, regiao</a:t>
-            </a:r>
-          </a:p>
-          <a:p>
-            <a:pPr>
+              <a:rPr lang="pt-BR" sz="1500" dirty="0">
+                <a:solidFill>
+                  <a:srgbClr val="374869"/>
+                </a:solidFill>
+                <a:latin typeface="Inter"/>
+              </a:rPr>
+              <a:t>Busque por nome ou UF</a:t>
+            </a:r>
+          </a:p>
+          <a:p>
+            <a:pPr algn="l">
               <a:spcBef>
-                <a:spcPts val="600"/>
+                <a:spcPts val="400"/>
               </a:spcBef>
-              <a:defRPr sz="1300">
-                <a:solidFill>
-                  <a:srgbClr val="6B7280"/>
-                </a:solidFill>
-              </a:defRPr>
+              <a:buFont typeface="Arial"/>
+              <a:buChar char="•"/>
             </a:pPr>
-          </a:p>
-          <a:p>
-            <a:pPr>
-              <a:spcBef>
-                <a:spcPts val="600"/>
-              </a:spcBef>
-              <a:defRPr sz="1300">
-                <a:solidFill>
-                  <a:srgbClr val="6B7280"/>
-                </a:solidFill>
-              </a:defRPr>
-            </a:pPr>
-            <a:r>
-              <a:t>3. Busque por nome ou UF</a:t>
-            </a:r>
-          </a:p>
-          <a:p>
-            <a:pPr>
-              <a:spcBef>
-                <a:spcPts val="600"/>
-              </a:spcBef>
-              <a:defRPr sz="1300">
-                <a:solidFill>
-                  <a:srgbClr val="6B7280"/>
-                </a:solidFill>
-              </a:defRPr>
-            </a:pPr>
-          </a:p>
-          <a:p>
-            <a:pPr>
-              <a:spcBef>
-                <a:spcPts val="600"/>
-              </a:spcBef>
-              <a:defRPr sz="1300">
-                <a:solidFill>
-                  <a:srgbClr val="6B7280"/>
-                </a:solidFill>
-              </a:defRPr>
-            </a:pPr>
-            <a:r>
-              <a:t>4. Clique para ver detalhe com mapa</a:t>
+            <a:r>
+              <a:rPr lang="pt-BR" sz="1500" dirty="0">
+                <a:solidFill>
+                  <a:srgbClr val="374869"/>
+                </a:solidFill>
+                <a:latin typeface="Inter"/>
+              </a:rPr>
+              <a:t>Clique para ver detalhe com mapa</a:t>
             </a:r>
           </a:p>
         </p:txBody>
@@ -3815,15 +3966,27 @@
         </p:blipFill>
         <p:spPr>
           <a:xfrm>
-            <a:off x="4389120" y="914400"/>
-            <a:ext cx="4572000" cy="2531878"/>
+            <a:off x="4980214" y="457200"/>
+            <a:ext cx="6906986" cy="5920274"/>
           </a:xfrm>
           <a:prstGeom prst="rect">
             <a:avLst/>
           </a:prstGeom>
+          <a:effectLst>
+            <a:outerShdw blurRad="76200" dist="38100" dir="5400000" algn="tl">
+              <a:srgbClr val="000000">
+                <a:alpha val="25000"/>
+              </a:srgbClr>
+            </a:outerShdw>
+          </a:effectLst>
         </p:spPr>
       </p:pic>
     </p:spTree>
+    <p:extLst>
+      <p:ext uri="{BB962C8B-B14F-4D97-AF65-F5344CB8AC3E}">
+        <p14:creationId xmlns:p14="http://schemas.microsoft.com/office/powerpoint/2010/main" val="2366753008"/>
+      </p:ext>
+    </p:extLst>
   </p:cSld>
   <p:clrMapOvr>
     <a:masterClrMapping/>
@@ -3832,7 +3995,7 @@
 </file>
 
 <file path=ppt/slides/slide13.xml><?xml version="1.0" encoding="utf-8"?>
-<p:sld xmlns:a="http://schemas.openxmlformats.org/drawingml/2006/main" xmlns:p="http://schemas.openxmlformats.org/presentationml/2006/main" xmlns:r="http://schemas.openxmlformats.org/officeDocument/2006/relationships">
+<p:sld xmlns:a="http://schemas.openxmlformats.org/drawingml/2006/main" xmlns:r="http://schemas.openxmlformats.org/officeDocument/2006/relationships" xmlns:p="http://schemas.openxmlformats.org/presentationml/2006/main">
   <p:cSld>
     <p:spTree>
       <p:nvGrpSpPr>
@@ -3840,7 +4003,14 @@
         <p:cNvGrpSpPr/>
         <p:nvPr/>
       </p:nvGrpSpPr>
-      <p:grpSpPr/>
+      <p:grpSpPr>
+        <a:xfrm>
+          <a:off x="0" y="0"/>
+          <a:ext cx="0" cy="0"/>
+          <a:chOff x="0" y="0"/>
+          <a:chExt cx="0" cy="0"/>
+        </a:xfrm>
+      </p:grpSpPr>
       <p:sp>
         <p:nvSpPr>
           <p:cNvPr id="2" name="Rectangle 1"/>
@@ -3850,13 +4020,13 @@
         <p:spPr>
           <a:xfrm>
             <a:off x="0" y="0"/>
-            <a:ext cx="12191695" cy="73152"/>
+            <a:ext cx="12191695" cy="76200"/>
           </a:xfrm>
           <a:prstGeom prst="rect">
             <a:avLst/>
           </a:prstGeom>
           <a:solidFill>
-            <a:srgbClr val="1E3A5F"/>
+            <a:srgbClr val="0F7B6C"/>
           </a:solidFill>
           <a:ln>
             <a:noFill/>
@@ -3881,6 +4051,7 @@
           <a:lstStyle/>
           <a:p>
             <a:pPr algn="ctr"/>
+            <a:endParaRPr/>
           </a:p>
         </p:txBody>
       </p:sp>
@@ -3892,8 +4063,8 @@
         </p:nvSpPr>
         <p:spPr>
           <a:xfrm>
-            <a:off x="548640" y="274320"/>
-            <a:ext cx="8229600" cy="548640"/>
+            <a:off x="457200" y="228600"/>
+            <a:ext cx="4208203" cy="523220"/>
           </a:xfrm>
           <a:prstGeom prst="rect">
             <a:avLst/>
@@ -3906,15 +4077,15 @@
           </a:bodyPr>
           <a:lstStyle/>
           <a:p>
-            <a:pPr>
-              <a:defRPr sz="2200" b="1">
-                <a:solidFill>
-                  <a:srgbClr val="1E3A5F"/>
-                </a:solidFill>
-              </a:defRPr>
-            </a:pPr>
-            <a:r>
-              <a:t>Detalhe do Municipio</a:t>
+            <a:pPr algn="l"/>
+            <a:r>
+              <a:rPr lang="pt-BR" sz="2800" b="1" dirty="0">
+                <a:solidFill>
+                  <a:srgbClr val="1B2A4A"/>
+                </a:solidFill>
+                <a:latin typeface="Montserrat"/>
+              </a:rPr>
+              <a:t>Detalhe do Município</a:t>
             </a:r>
           </a:p>
         </p:txBody>
@@ -3927,8 +4098,8 @@
         </p:nvSpPr>
         <p:spPr>
           <a:xfrm>
-            <a:off x="548640" y="1097280"/>
-            <a:ext cx="3474720" cy="5029200"/>
+            <a:off x="457200" y="914400"/>
+            <a:ext cx="4572000" cy="1451679"/>
           </a:xfrm>
           <a:prstGeom prst="rect">
             <a:avLst/>
@@ -3941,126 +4112,93 @@
           </a:bodyPr>
           <a:lstStyle/>
           <a:p>
-            <a:pPr>
+            <a:pPr algn="l">
               <a:spcBef>
-                <a:spcPts val="600"/>
+                <a:spcPts val="400"/>
               </a:spcBef>
-              <a:defRPr sz="1300">
-                <a:solidFill>
-                  <a:srgbClr val="6B7280"/>
-                </a:solidFill>
-              </a:defRPr>
+              <a:buFont typeface="Arial"/>
+              <a:buChar char="•"/>
             </a:pPr>
             <a:r>
-              <a:t>Mapa interativo com localizacao real.</a:t>
-            </a:r>
-          </a:p>
-          <a:p>
-            <a:pPr>
+              <a:rPr lang="pt-BR" sz="1500" dirty="0">
+                <a:solidFill>
+                  <a:srgbClr val="374869"/>
+                </a:solidFill>
+                <a:latin typeface="Inter"/>
+              </a:rPr>
+              <a:t>Mapa interativo com localização real</a:t>
+            </a:r>
+          </a:p>
+          <a:p>
+            <a:pPr algn="l">
               <a:spcBef>
-                <a:spcPts val="600"/>
+                <a:spcPts val="400"/>
               </a:spcBef>
-              <a:defRPr sz="1300">
-                <a:solidFill>
-                  <a:srgbClr val="6B7280"/>
-                </a:solidFill>
-              </a:defRPr>
+              <a:buFont typeface="Arial"/>
+              <a:buChar char="•"/>
             </a:pPr>
-          </a:p>
-          <a:p>
-            <a:pPr>
+            <a:r>
+              <a:rPr lang="pt-BR" sz="1500" dirty="0">
+                <a:solidFill>
+                  <a:srgbClr val="374869"/>
+                </a:solidFill>
+                <a:latin typeface="Inter"/>
+              </a:rPr>
+              <a:t>Brasão oficial do município</a:t>
+            </a:r>
+          </a:p>
+          <a:p>
+            <a:pPr algn="l">
               <a:spcBef>
-                <a:spcPts val="600"/>
+                <a:spcPts val="400"/>
               </a:spcBef>
-              <a:defRPr sz="1300">
-                <a:solidFill>
-                  <a:srgbClr val="6B7280"/>
-                </a:solidFill>
-              </a:defRPr>
+              <a:buFont typeface="Arial"/>
+              <a:buChar char="•"/>
             </a:pPr>
             <a:r>
-              <a:t>Brasao oficial do municipio.</a:t>
-            </a:r>
-          </a:p>
-          <a:p>
-            <a:pPr>
+              <a:rPr lang="pt-BR" sz="1500" dirty="0">
+                <a:solidFill>
+                  <a:srgbClr val="374869"/>
+                </a:solidFill>
+                <a:latin typeface="Inter"/>
+              </a:rPr>
+              <a:t>Dados: população, IBGE, engajamento</a:t>
+            </a:r>
+          </a:p>
+          <a:p>
+            <a:pPr algn="l">
               <a:spcBef>
-                <a:spcPts val="600"/>
+                <a:spcPts val="400"/>
               </a:spcBef>
-              <a:defRPr sz="1300">
-                <a:solidFill>
-                  <a:srgbClr val="6B7280"/>
-                </a:solidFill>
-              </a:defRPr>
+              <a:buFont typeface="Arial"/>
+              <a:buChar char="•"/>
             </a:pPr>
-          </a:p>
-          <a:p>
-            <a:pPr>
+            <a:r>
+              <a:rPr lang="pt-BR" sz="1500" dirty="0">
+                <a:solidFill>
+                  <a:srgbClr val="374869"/>
+                </a:solidFill>
+                <a:latin typeface="Inter"/>
+              </a:rPr>
+              <a:t>Representantes com foto</a:t>
+            </a:r>
+          </a:p>
+          <a:p>
+            <a:pPr algn="l">
               <a:spcBef>
-                <a:spcPts val="600"/>
+                <a:spcPts val="400"/>
               </a:spcBef>
-              <a:defRPr sz="1300">
-                <a:solidFill>
-                  <a:srgbClr val="6B7280"/>
-                </a:solidFill>
-              </a:defRPr>
+              <a:buFont typeface="Arial"/>
+              <a:buChar char="•"/>
             </a:pPr>
             <a:r>
-              <a:t>Dados: populacao, IBGE, engajamento.</a:t>
-            </a:r>
-          </a:p>
-          <a:p>
-            <a:pPr>
-              <a:spcBef>
-                <a:spcPts val="600"/>
-              </a:spcBef>
-              <a:defRPr sz="1300">
-                <a:solidFill>
-                  <a:srgbClr val="6B7280"/>
-                </a:solidFill>
-              </a:defRPr>
-            </a:pPr>
-          </a:p>
-          <a:p>
-            <a:pPr>
-              <a:spcBef>
-                <a:spcPts val="600"/>
-              </a:spcBef>
-              <a:defRPr sz="1300">
-                <a:solidFill>
-                  <a:srgbClr val="6B7280"/>
-                </a:solidFill>
-              </a:defRPr>
-            </a:pPr>
-            <a:r>
-              <a:t>Representantes com foto.</a:t>
-            </a:r>
-          </a:p>
-          <a:p>
-            <a:pPr>
-              <a:spcBef>
-                <a:spcPts val="600"/>
-              </a:spcBef>
-              <a:defRPr sz="1300">
-                <a:solidFill>
-                  <a:srgbClr val="6B7280"/>
-                </a:solidFill>
-              </a:defRPr>
-            </a:pPr>
-          </a:p>
-          <a:p>
-            <a:pPr>
-              <a:spcBef>
-                <a:spcPts val="600"/>
-              </a:spcBef>
-              <a:defRPr sz="1300">
-                <a:solidFill>
-                  <a:srgbClr val="6B7280"/>
-                </a:solidFill>
-              </a:defRPr>
-            </a:pPr>
-            <a:r>
-              <a:t>Historico de adimplencia por ano.</a:t>
+              <a:rPr lang="pt-BR" sz="1500" dirty="0">
+                <a:solidFill>
+                  <a:srgbClr val="374869"/>
+                </a:solidFill>
+                <a:latin typeface="Inter"/>
+              </a:rPr>
+              <a:t>Histórico de adimplência por ano</a:t>
             </a:r>
           </a:p>
         </p:txBody>
@@ -4081,15 +4219,27 @@
         </p:blipFill>
         <p:spPr>
           <a:xfrm>
-            <a:off x="4389120" y="914400"/>
-            <a:ext cx="4572000" cy="2531878"/>
+            <a:off x="4862286" y="457199"/>
+            <a:ext cx="7024914" cy="6021355"/>
           </a:xfrm>
           <a:prstGeom prst="rect">
             <a:avLst/>
           </a:prstGeom>
+          <a:effectLst>
+            <a:outerShdw blurRad="76200" dist="38100" dir="5400000" algn="tl">
+              <a:srgbClr val="000000">
+                <a:alpha val="25000"/>
+              </a:srgbClr>
+            </a:outerShdw>
+          </a:effectLst>
         </p:spPr>
       </p:pic>
     </p:spTree>
+    <p:extLst>
+      <p:ext uri="{BB962C8B-B14F-4D97-AF65-F5344CB8AC3E}">
+        <p14:creationId xmlns:p14="http://schemas.microsoft.com/office/powerpoint/2010/main" val="1887635066"/>
+      </p:ext>
+    </p:extLst>
   </p:cSld>
   <p:clrMapOvr>
     <a:masterClrMapping/>
@@ -4098,13 +4248,21 @@
 </file>
 
 <file path=ppt/slides/slide14.xml><?xml version="1.0" encoding="utf-8"?>
-<p:sld xmlns:a="http://schemas.openxmlformats.org/drawingml/2006/main" xmlns:p="http://schemas.openxmlformats.org/presentationml/2006/main" xmlns:r="http://schemas.openxmlformats.org/officeDocument/2006/relationships">
+<p:sld xmlns:a="http://schemas.openxmlformats.org/drawingml/2006/main" xmlns:r="http://schemas.openxmlformats.org/officeDocument/2006/relationships" xmlns:p="http://schemas.openxmlformats.org/presentationml/2006/main">
   <p:cSld>
     <p:bg>
       <p:bgPr>
-        <a:solidFill>
-          <a:srgbClr val="1E3A5F"/>
-        </a:solidFill>
+        <a:gradFill>
+          <a:gsLst>
+            <a:gs pos="0">
+              <a:srgbClr val="0D1A2E"/>
+            </a:gs>
+            <a:gs pos="100000">
+              <a:srgbClr val="1B2A4A"/>
+            </a:gs>
+          </a:gsLst>
+          <a:lin ang="5400000" scaled="1"/>
+        </a:gradFill>
         <a:effectLst/>
       </p:bgPr>
     </p:bg>
@@ -4114,7 +4272,14 @@
         <p:cNvGrpSpPr/>
         <p:nvPr/>
       </p:nvGrpSpPr>
-      <p:grpSpPr/>
+      <p:grpSpPr>
+        <a:xfrm>
+          <a:off x="0" y="0"/>
+          <a:ext cx="0" cy="0"/>
+          <a:chOff x="0" y="0"/>
+          <a:chExt cx="0" cy="0"/>
+        </a:xfrm>
+      </p:grpSpPr>
       <p:sp>
         <p:nvSpPr>
           <p:cNvPr id="2" name="TextBox 1"/>
@@ -4123,8 +4288,8 @@
         </p:nvSpPr>
         <p:spPr>
           <a:xfrm>
-            <a:off x="914400" y="1828800"/>
-            <a:ext cx="10058400" cy="914400"/>
+            <a:off x="914400" y="2286000"/>
+            <a:ext cx="10363200" cy="1371600"/>
           </a:xfrm>
           <a:prstGeom prst="rect">
             <a:avLst/>
@@ -4137,14 +4302,14 @@
           </a:bodyPr>
           <a:lstStyle/>
           <a:p>
-            <a:pPr algn="ctr">
-              <a:defRPr sz="7200" b="1">
-                <a:solidFill>
-                  <a:srgbClr val="94B8FF"/>
-                </a:solidFill>
-              </a:defRPr>
-            </a:pPr>
-            <a:r>
+            <a:pPr algn="l"/>
+            <a:r>
+              <a:rPr lang="pt-BR" sz="8000" b="1" dirty="0">
+                <a:solidFill>
+                  <a:srgbClr val="0F7B6C"/>
+                </a:solidFill>
+                <a:latin typeface="Montserrat"/>
+              </a:rPr>
               <a:t>05</a:t>
             </a:r>
           </a:p>
@@ -4158,8 +4323,8 @@
         </p:nvSpPr>
         <p:spPr>
           <a:xfrm>
-            <a:off x="914400" y="2926080"/>
-            <a:ext cx="10058400" cy="914400"/>
+            <a:off x="914400" y="3810000"/>
+            <a:ext cx="10363200" cy="914400"/>
           </a:xfrm>
           <a:prstGeom prst="rect">
             <a:avLst/>
@@ -4172,20 +4337,53 @@
           </a:bodyPr>
           <a:lstStyle/>
           <a:p>
-            <a:pPr algn="ctr">
-              <a:defRPr sz="3200" b="1">
+            <a:pPr algn="l"/>
+            <a:r>
+              <a:rPr lang="pt-BR" sz="3200" b="1" dirty="0">
                 <a:solidFill>
                   <a:srgbClr val="FFFFFF"/>
                 </a:solidFill>
-              </a:defRPr>
-            </a:pPr>
-            <a:r>
-              <a:t>Adimplencia</a:t>
-            </a:r>
+                <a:latin typeface="Montserrat"/>
+              </a:rPr>
+              <a:t>Adimplência</a:t>
+            </a:r>
+          </a:p>
+        </p:txBody>
+      </p:sp>
+      <p:sp>
+        <p:nvSpPr>
+          <p:cNvPr id="10" name="AccentLine"/>
+          <p:cNvSpPr/>
+          <p:nvPr/>
+        </p:nvSpPr>
+        <p:spPr>
+          <a:xfrm>
+            <a:off x="914400" y="3708400"/>
+            <a:ext cx="1828800" cy="0"/>
+          </a:xfrm>
+          <a:prstGeom prst="line">
+            <a:avLst/>
+          </a:prstGeom>
+          <a:ln w="25400">
+            <a:solidFill>
+              <a:srgbClr val="0F7B6C"/>
+            </a:solidFill>
+          </a:ln>
+        </p:spPr>
+        <p:txBody>
+          <a:bodyPr/>
+          <a:lstStyle/>
+          <a:p>
+            <a:endParaRPr lang="pt-BR"/>
           </a:p>
         </p:txBody>
       </p:sp>
     </p:spTree>
+    <p:extLst>
+      <p:ext uri="{BB962C8B-B14F-4D97-AF65-F5344CB8AC3E}">
+        <p14:creationId xmlns:p14="http://schemas.microsoft.com/office/powerpoint/2010/main" val="1142769430"/>
+      </p:ext>
+    </p:extLst>
   </p:cSld>
   <p:clrMapOvr>
     <a:masterClrMapping/>
@@ -4194,7 +4392,7 @@
 </file>
 
 <file path=ppt/slides/slide15.xml><?xml version="1.0" encoding="utf-8"?>
-<p:sld xmlns:a="http://schemas.openxmlformats.org/drawingml/2006/main" xmlns:p="http://schemas.openxmlformats.org/presentationml/2006/main" xmlns:r="http://schemas.openxmlformats.org/officeDocument/2006/relationships">
+<p:sld xmlns:a="http://schemas.openxmlformats.org/drawingml/2006/main" xmlns:r="http://schemas.openxmlformats.org/officeDocument/2006/relationships" xmlns:p="http://schemas.openxmlformats.org/presentationml/2006/main">
   <p:cSld>
     <p:spTree>
       <p:nvGrpSpPr>
@@ -4202,7 +4400,14 @@
         <p:cNvGrpSpPr/>
         <p:nvPr/>
       </p:nvGrpSpPr>
-      <p:grpSpPr/>
+      <p:grpSpPr>
+        <a:xfrm>
+          <a:off x="0" y="0"/>
+          <a:ext cx="0" cy="0"/>
+          <a:chOff x="0" y="0"/>
+          <a:chExt cx="0" cy="0"/>
+        </a:xfrm>
+      </p:grpSpPr>
       <p:sp>
         <p:nvSpPr>
           <p:cNvPr id="2" name="Rectangle 1"/>
@@ -4212,13 +4417,13 @@
         <p:spPr>
           <a:xfrm>
             <a:off x="0" y="0"/>
-            <a:ext cx="12191695" cy="73152"/>
+            <a:ext cx="12191695" cy="76200"/>
           </a:xfrm>
           <a:prstGeom prst="rect">
             <a:avLst/>
           </a:prstGeom>
           <a:solidFill>
-            <a:srgbClr val="1E3A5F"/>
+            <a:srgbClr val="0F7B6C"/>
           </a:solidFill>
           <a:ln>
             <a:noFill/>
@@ -4243,6 +4448,7 @@
           <a:lstStyle/>
           <a:p>
             <a:pPr algn="ctr"/>
+            <a:endParaRPr/>
           </a:p>
         </p:txBody>
       </p:sp>
@@ -4254,8 +4460,8 @@
         </p:nvSpPr>
         <p:spPr>
           <a:xfrm>
-            <a:off x="548640" y="274320"/>
-            <a:ext cx="8229600" cy="548640"/>
+            <a:off x="457200" y="228600"/>
+            <a:ext cx="4867038" cy="523220"/>
           </a:xfrm>
           <a:prstGeom prst="rect">
             <a:avLst/>
@@ -4268,15 +4474,15 @@
           </a:bodyPr>
           <a:lstStyle/>
           <a:p>
-            <a:pPr>
-              <a:defRPr sz="2200" b="1">
-                <a:solidFill>
-                  <a:srgbClr val="1E3A5F"/>
-                </a:solidFill>
-              </a:defRPr>
-            </a:pPr>
-            <a:r>
-              <a:t>Controle de Adimplencia</a:t>
+            <a:pPr algn="l"/>
+            <a:r>
+              <a:rPr lang="pt-BR" sz="2800" b="1" dirty="0">
+                <a:solidFill>
+                  <a:srgbClr val="1B2A4A"/>
+                </a:solidFill>
+                <a:latin typeface="Montserrat"/>
+              </a:rPr>
+              <a:t>Controle de Adimplência</a:t>
             </a:r>
           </a:p>
         </p:txBody>
@@ -4289,8 +4495,8 @@
         </p:nvSpPr>
         <p:spPr>
           <a:xfrm>
-            <a:off x="548640" y="1097280"/>
-            <a:ext cx="3474720" cy="5029200"/>
+            <a:off x="457200" y="914400"/>
+            <a:ext cx="4572000" cy="1913344"/>
           </a:xfrm>
           <a:prstGeom prst="rect">
             <a:avLst/>
@@ -4303,120 +4509,154 @@
           </a:bodyPr>
           <a:lstStyle/>
           <a:p>
-            <a:pPr>
+            <a:pPr algn="l">
+              <a:spcBef>
+                <a:spcPts val="200"/>
+              </a:spcBef>
+              <a:buNone/>
+            </a:pPr>
+            <a:r>
+              <a:rPr lang="pt-BR" sz="1500" b="1" dirty="0">
+                <a:solidFill>
+                  <a:srgbClr val="0F7B6C"/>
+                </a:solidFill>
+                <a:latin typeface="Montserrat"/>
+              </a:rPr>
+              <a:t>Status possíveis</a:t>
+            </a:r>
+          </a:p>
+          <a:p>
+            <a:pPr algn="l">
+              <a:spcBef>
+                <a:spcPts val="200"/>
+              </a:spcBef>
+              <a:buFont typeface="Arial"/>
+              <a:buChar char="•"/>
+            </a:pPr>
+            <a:r>
+              <a:rPr lang="pt-BR" sz="1500" dirty="0">
+                <a:solidFill>
+                  <a:srgbClr val="16A34A"/>
+                </a:solidFill>
+                <a:latin typeface="Inter"/>
+              </a:rPr>
+              <a:t>Adimplente</a:t>
+            </a:r>
+            <a:r>
+              <a:rPr lang="pt-BR" sz="1500" dirty="0">
+                <a:solidFill>
+                  <a:srgbClr val="374869"/>
+                </a:solidFill>
+                <a:latin typeface="Inter"/>
+              </a:rPr>
+              <a:t> — em dia</a:t>
+            </a:r>
+          </a:p>
+          <a:p>
+            <a:pPr algn="l">
+              <a:spcBef>
+                <a:spcPts val="200"/>
+              </a:spcBef>
+              <a:buFont typeface="Arial"/>
+              <a:buChar char="•"/>
+            </a:pPr>
+            <a:r>
+              <a:rPr lang="pt-BR" sz="1500" dirty="0">
+                <a:solidFill>
+                  <a:srgbClr val="DC2626"/>
+                </a:solidFill>
+                <a:latin typeface="Inter"/>
+              </a:rPr>
+              <a:t>Inadimplente</a:t>
+            </a:r>
+            <a:r>
+              <a:rPr lang="pt-BR" sz="1500" dirty="0">
+                <a:solidFill>
+                  <a:srgbClr val="374869"/>
+                </a:solidFill>
+                <a:latin typeface="Inter"/>
+              </a:rPr>
+              <a:t> — sem pagamento</a:t>
+            </a:r>
+          </a:p>
+          <a:p>
+            <a:pPr algn="l">
+              <a:spcBef>
+                <a:spcPts val="200"/>
+              </a:spcBef>
+              <a:buFont typeface="Arial"/>
+              <a:buChar char="•"/>
+            </a:pPr>
+            <a:r>
+              <a:rPr lang="pt-BR" sz="1500" dirty="0">
+                <a:solidFill>
+                  <a:srgbClr val="D97706"/>
+                </a:solidFill>
+                <a:latin typeface="Inter"/>
+              </a:rPr>
+              <a:t>Parcial</a:t>
+            </a:r>
+            <a:r>
+              <a:rPr lang="pt-BR" sz="1500" dirty="0">
+                <a:solidFill>
+                  <a:srgbClr val="374869"/>
+                </a:solidFill>
+                <a:latin typeface="Inter"/>
+              </a:rPr>
+              <a:t> — pagamento parcial</a:t>
+            </a:r>
+          </a:p>
+          <a:p>
+            <a:pPr algn="l">
               <a:spcBef>
                 <a:spcPts val="600"/>
               </a:spcBef>
-              <a:defRPr sz="1300">
-                <a:solidFill>
-                  <a:srgbClr val="6B7280"/>
-                </a:solidFill>
-              </a:defRPr>
+              <a:buNone/>
             </a:pPr>
             <a:r>
-              <a:t>Status possiveis:</a:t>
-            </a:r>
-          </a:p>
-          <a:p>
-            <a:pPr>
+              <a:rPr lang="pt-BR" sz="1500" b="1" dirty="0">
+                <a:solidFill>
+                  <a:srgbClr val="0F7B6C"/>
+                </a:solidFill>
+                <a:latin typeface="Montserrat"/>
+              </a:rPr>
+              <a:t>Impacto no engajamento</a:t>
+            </a:r>
+          </a:p>
+          <a:p>
+            <a:pPr algn="l">
               <a:spcBef>
-                <a:spcPts val="600"/>
+                <a:spcPts val="200"/>
               </a:spcBef>
-              <a:defRPr sz="1300">
-                <a:solidFill>
-                  <a:srgbClr val="6B7280"/>
-                </a:solidFill>
-              </a:defRPr>
+              <a:buFont typeface="Arial"/>
+              <a:buChar char="•"/>
             </a:pPr>
             <a:r>
-              <a:t>   Adimplente (verde) - em dia</a:t>
-            </a:r>
-          </a:p>
-          <a:p>
-            <a:pPr>
+              <a:rPr lang="pt-BR" sz="1500" dirty="0">
+                <a:solidFill>
+                  <a:srgbClr val="374869"/>
+                </a:solidFill>
+                <a:latin typeface="Inter"/>
+              </a:rPr>
+              <a:t>Inadimplente: -30% na pontuação</a:t>
+            </a:r>
+          </a:p>
+          <a:p>
+            <a:pPr algn="l">
               <a:spcBef>
-                <a:spcPts val="600"/>
+                <a:spcPts val="200"/>
               </a:spcBef>
-              <a:defRPr sz="1300">
-                <a:solidFill>
-                  <a:srgbClr val="6B7280"/>
-                </a:solidFill>
-              </a:defRPr>
+              <a:buFont typeface="Arial"/>
+              <a:buChar char="•"/>
             </a:pPr>
             <a:r>
-              <a:t>   Inadimplente (vermelho) - sem pgto</a:t>
-            </a:r>
-          </a:p>
-          <a:p>
-            <a:pPr>
-              <a:spcBef>
-                <a:spcPts val="600"/>
-              </a:spcBef>
-              <a:defRPr sz="1300">
-                <a:solidFill>
-                  <a:srgbClr val="6B7280"/>
-                </a:solidFill>
-              </a:defRPr>
-            </a:pPr>
-            <a:r>
-              <a:t>   Parcial (amarelo) - pgto parcial</a:t>
-            </a:r>
-          </a:p>
-          <a:p>
-            <a:pPr>
-              <a:spcBef>
-                <a:spcPts val="600"/>
-              </a:spcBef>
-              <a:defRPr sz="1300">
-                <a:solidFill>
-                  <a:srgbClr val="6B7280"/>
-                </a:solidFill>
-              </a:defRPr>
-            </a:pPr>
-          </a:p>
-          <a:p>
-            <a:pPr>
-              <a:spcBef>
-                <a:spcPts val="600"/>
-              </a:spcBef>
-              <a:defRPr sz="1300">
-                <a:solidFill>
-                  <a:srgbClr val="6B7280"/>
-                </a:solidFill>
-              </a:defRPr>
-            </a:pPr>
-            <a:r>
-              <a:t>Impacto no engajamento:</a:t>
-            </a:r>
-          </a:p>
-          <a:p>
-            <a:pPr>
-              <a:spcBef>
-                <a:spcPts val="600"/>
-              </a:spcBef>
-              <a:defRPr sz="1300">
-                <a:solidFill>
-                  <a:srgbClr val="6B7280"/>
-                </a:solidFill>
-              </a:defRPr>
-            </a:pPr>
-            <a:r>
-              <a:t>   Inadimplente: -30% na pontuacao</a:t>
-            </a:r>
-          </a:p>
-          <a:p>
-            <a:pPr>
-              <a:spcBef>
-                <a:spcPts val="600"/>
-              </a:spcBef>
-              <a:defRPr sz="1300">
-                <a:solidFill>
-                  <a:srgbClr val="6B7280"/>
-                </a:solidFill>
-              </a:defRPr>
-            </a:pPr>
-            <a:r>
-              <a:t>   Parcial: -15% na pontuacao</a:t>
+              <a:rPr lang="pt-BR" sz="1500" dirty="0">
+                <a:solidFill>
+                  <a:srgbClr val="374869"/>
+                </a:solidFill>
+                <a:latin typeface="Inter"/>
+              </a:rPr>
+              <a:t>Parcial: -15% na pontuação</a:t>
             </a:r>
           </a:p>
         </p:txBody>
@@ -4437,15 +4677,27 @@
         </p:blipFill>
         <p:spPr>
           <a:xfrm>
-            <a:off x="4389120" y="914400"/>
-            <a:ext cx="4572000" cy="2531878"/>
+            <a:off x="5203371" y="457200"/>
+            <a:ext cx="6858000" cy="5878286"/>
           </a:xfrm>
           <a:prstGeom prst="rect">
             <a:avLst/>
           </a:prstGeom>
+          <a:effectLst>
+            <a:outerShdw blurRad="76200" dist="38100" dir="5400000" algn="tl">
+              <a:srgbClr val="000000">
+                <a:alpha val="25000"/>
+              </a:srgbClr>
+            </a:outerShdw>
+          </a:effectLst>
         </p:spPr>
       </p:pic>
     </p:spTree>
+    <p:extLst>
+      <p:ext uri="{BB962C8B-B14F-4D97-AF65-F5344CB8AC3E}">
+        <p14:creationId xmlns:p14="http://schemas.microsoft.com/office/powerpoint/2010/main" val="617026182"/>
+      </p:ext>
+    </p:extLst>
   </p:cSld>
   <p:clrMapOvr>
     <a:masterClrMapping/>
@@ -4454,13 +4706,21 @@
 </file>
 
 <file path=ppt/slides/slide16.xml><?xml version="1.0" encoding="utf-8"?>
-<p:sld xmlns:a="http://schemas.openxmlformats.org/drawingml/2006/main" xmlns:p="http://schemas.openxmlformats.org/presentationml/2006/main" xmlns:r="http://schemas.openxmlformats.org/officeDocument/2006/relationships">
+<p:sld xmlns:a="http://schemas.openxmlformats.org/drawingml/2006/main" xmlns:r="http://schemas.openxmlformats.org/officeDocument/2006/relationships" xmlns:p="http://schemas.openxmlformats.org/presentationml/2006/main">
   <p:cSld>
     <p:bg>
       <p:bgPr>
-        <a:solidFill>
-          <a:srgbClr val="1E3A5F"/>
-        </a:solidFill>
+        <a:gradFill>
+          <a:gsLst>
+            <a:gs pos="0">
+              <a:srgbClr val="0D1A2E"/>
+            </a:gs>
+            <a:gs pos="100000">
+              <a:srgbClr val="1B2A4A"/>
+            </a:gs>
+          </a:gsLst>
+          <a:lin ang="5400000" scaled="1"/>
+        </a:gradFill>
         <a:effectLst/>
       </p:bgPr>
     </p:bg>
@@ -4470,7 +4730,14 @@
         <p:cNvGrpSpPr/>
         <p:nvPr/>
       </p:nvGrpSpPr>
-      <p:grpSpPr/>
+      <p:grpSpPr>
+        <a:xfrm>
+          <a:off x="0" y="0"/>
+          <a:ext cx="0" cy="0"/>
+          <a:chOff x="0" y="0"/>
+          <a:chExt cx="0" cy="0"/>
+        </a:xfrm>
+      </p:grpSpPr>
       <p:sp>
         <p:nvSpPr>
           <p:cNvPr id="2" name="TextBox 1"/>
@@ -4479,8 +4746,8 @@
         </p:nvSpPr>
         <p:spPr>
           <a:xfrm>
-            <a:off x="914400" y="1828800"/>
-            <a:ext cx="10058400" cy="914400"/>
+            <a:off x="914400" y="2286000"/>
+            <a:ext cx="10363200" cy="1371600"/>
           </a:xfrm>
           <a:prstGeom prst="rect">
             <a:avLst/>
@@ -4493,14 +4760,14 @@
           </a:bodyPr>
           <a:lstStyle/>
           <a:p>
-            <a:pPr algn="ctr">
-              <a:defRPr sz="7200" b="1">
-                <a:solidFill>
-                  <a:srgbClr val="94B8FF"/>
-                </a:solidFill>
-              </a:defRPr>
-            </a:pPr>
-            <a:r>
+            <a:pPr algn="l"/>
+            <a:r>
+              <a:rPr lang="pt-BR" sz="8000" b="1" dirty="0">
+                <a:solidFill>
+                  <a:srgbClr val="0F7B6C"/>
+                </a:solidFill>
+                <a:latin typeface="Montserrat"/>
+              </a:rPr>
               <a:t>06</a:t>
             </a:r>
           </a:p>
@@ -4514,8 +4781,8 @@
         </p:nvSpPr>
         <p:spPr>
           <a:xfrm>
-            <a:off x="914400" y="2926080"/>
-            <a:ext cx="10058400" cy="914400"/>
+            <a:off x="914400" y="3810000"/>
+            <a:ext cx="10363200" cy="914400"/>
           </a:xfrm>
           <a:prstGeom prst="rect">
             <a:avLst/>
@@ -4528,20 +4795,53 @@
           </a:bodyPr>
           <a:lstStyle/>
           <a:p>
-            <a:pPr algn="ctr">
-              <a:defRPr sz="3200" b="1">
+            <a:pPr algn="l"/>
+            <a:r>
+              <a:rPr lang="pt-BR" sz="3200" b="1" dirty="0">
                 <a:solidFill>
                   <a:srgbClr val="FFFFFF"/>
                 </a:solidFill>
-              </a:defRPr>
-            </a:pPr>
-            <a:r>
+                <a:latin typeface="Montserrat"/>
+              </a:rPr>
               <a:t>Eventos</a:t>
             </a:r>
           </a:p>
         </p:txBody>
       </p:sp>
+      <p:sp>
+        <p:nvSpPr>
+          <p:cNvPr id="10" name="AccentLine"/>
+          <p:cNvSpPr/>
+          <p:nvPr/>
+        </p:nvSpPr>
+        <p:spPr>
+          <a:xfrm>
+            <a:off x="914400" y="3708400"/>
+            <a:ext cx="1828800" cy="0"/>
+          </a:xfrm>
+          <a:prstGeom prst="line">
+            <a:avLst/>
+          </a:prstGeom>
+          <a:ln w="25400">
+            <a:solidFill>
+              <a:srgbClr val="0F7B6C"/>
+            </a:solidFill>
+          </a:ln>
+        </p:spPr>
+        <p:txBody>
+          <a:bodyPr/>
+          <a:lstStyle/>
+          <a:p>
+            <a:endParaRPr lang="pt-BR"/>
+          </a:p>
+        </p:txBody>
+      </p:sp>
     </p:spTree>
+    <p:extLst>
+      <p:ext uri="{BB962C8B-B14F-4D97-AF65-F5344CB8AC3E}">
+        <p14:creationId xmlns:p14="http://schemas.microsoft.com/office/powerpoint/2010/main" val="3330205063"/>
+      </p:ext>
+    </p:extLst>
   </p:cSld>
   <p:clrMapOvr>
     <a:masterClrMapping/>
@@ -4550,7 +4850,7 @@
 </file>
 
 <file path=ppt/slides/slide17.xml><?xml version="1.0" encoding="utf-8"?>
-<p:sld xmlns:a="http://schemas.openxmlformats.org/drawingml/2006/main" xmlns:p="http://schemas.openxmlformats.org/presentationml/2006/main" xmlns:r="http://schemas.openxmlformats.org/officeDocument/2006/relationships">
+<p:sld xmlns:a="http://schemas.openxmlformats.org/drawingml/2006/main" xmlns:r="http://schemas.openxmlformats.org/officeDocument/2006/relationships" xmlns:p="http://schemas.openxmlformats.org/presentationml/2006/main">
   <p:cSld>
     <p:spTree>
       <p:nvGrpSpPr>
@@ -4558,7 +4858,14 @@
         <p:cNvGrpSpPr/>
         <p:nvPr/>
       </p:nvGrpSpPr>
-      <p:grpSpPr/>
+      <p:grpSpPr>
+        <a:xfrm>
+          <a:off x="0" y="0"/>
+          <a:ext cx="0" cy="0"/>
+          <a:chOff x="0" y="0"/>
+          <a:chExt cx="0" cy="0"/>
+        </a:xfrm>
+      </p:grpSpPr>
       <p:sp>
         <p:nvSpPr>
           <p:cNvPr id="2" name="Rectangle 1"/>
@@ -4568,13 +4875,13 @@
         <p:spPr>
           <a:xfrm>
             <a:off x="0" y="0"/>
-            <a:ext cx="12191695" cy="73152"/>
+            <a:ext cx="12191695" cy="76200"/>
           </a:xfrm>
           <a:prstGeom prst="rect">
             <a:avLst/>
           </a:prstGeom>
           <a:solidFill>
-            <a:srgbClr val="1E3A5F"/>
+            <a:srgbClr val="0F7B6C"/>
           </a:solidFill>
           <a:ln>
             <a:noFill/>
@@ -4599,6 +4906,7 @@
           <a:lstStyle/>
           <a:p>
             <a:pPr algn="ctr"/>
+            <a:endParaRPr/>
           </a:p>
         </p:txBody>
       </p:sp>
@@ -4610,8 +4918,8 @@
         </p:nvSpPr>
         <p:spPr>
           <a:xfrm>
-            <a:off x="548640" y="274320"/>
-            <a:ext cx="8229600" cy="548640"/>
+            <a:off x="457200" y="228600"/>
+            <a:ext cx="3264035" cy="523220"/>
           </a:xfrm>
           <a:prstGeom prst="rect">
             <a:avLst/>
@@ -4624,14 +4932,14 @@
           </a:bodyPr>
           <a:lstStyle/>
           <a:p>
-            <a:pPr>
-              <a:defRPr sz="2200" b="1">
-                <a:solidFill>
-                  <a:srgbClr val="1E3A5F"/>
-                </a:solidFill>
-              </a:defRPr>
-            </a:pPr>
-            <a:r>
+            <a:pPr algn="l"/>
+            <a:r>
+              <a:rPr lang="pt-BR" sz="2800" b="1" dirty="0">
+                <a:solidFill>
+                  <a:srgbClr val="1B2A4A"/>
+                </a:solidFill>
+                <a:latin typeface="Montserrat"/>
+              </a:rPr>
               <a:t>Lista de Eventos</a:t>
             </a:r>
           </a:p>
@@ -4645,8 +4953,8 @@
         </p:nvSpPr>
         <p:spPr>
           <a:xfrm>
-            <a:off x="548640" y="1097280"/>
-            <a:ext cx="3474720" cy="5029200"/>
+            <a:off x="457200" y="914400"/>
+            <a:ext cx="4572000" cy="1143903"/>
           </a:xfrm>
           <a:prstGeom prst="rect">
             <a:avLst/>
@@ -4659,87 +4967,74 @@
           </a:bodyPr>
           <a:lstStyle/>
           <a:p>
-            <a:pPr>
+            <a:pPr algn="l">
               <a:spcBef>
-                <a:spcPts val="600"/>
+                <a:spcPts val="200"/>
               </a:spcBef>
-              <a:defRPr sz="1300">
-                <a:solidFill>
-                  <a:srgbClr val="6B7280"/>
-                </a:solidFill>
-              </a:defRPr>
+              <a:buNone/>
             </a:pPr>
             <a:r>
-              <a:t>Tipos: Reuniao Geral, Forum,</a:t>
-            </a:r>
-          </a:p>
-          <a:p>
-            <a:pPr>
+              <a:rPr lang="pt-BR" sz="1500" b="1" dirty="0">
+                <a:solidFill>
+                  <a:srgbClr val="0F7B6C"/>
+                </a:solidFill>
+                <a:latin typeface="Montserrat"/>
+              </a:rPr>
+              <a:t>Tipos de evento</a:t>
+            </a:r>
+          </a:p>
+          <a:p>
+            <a:pPr algn="l">
               <a:spcBef>
-                <a:spcPts val="600"/>
+                <a:spcPts val="200"/>
               </a:spcBef>
-              <a:defRPr sz="1300">
-                <a:solidFill>
-                  <a:srgbClr val="6B7280"/>
-                </a:solidFill>
-              </a:defRPr>
+              <a:buFont typeface="Arial"/>
+              <a:buChar char="•"/>
             </a:pPr>
             <a:r>
-              <a:t>Congresso, Viagem, Webinar.</a:t>
-            </a:r>
-          </a:p>
-          <a:p>
-            <a:pPr>
+              <a:rPr lang="pt-BR" sz="1500" dirty="0">
+                <a:solidFill>
+                  <a:srgbClr val="374869"/>
+                </a:solidFill>
+                <a:latin typeface="Inter"/>
+              </a:rPr>
+              <a:t>Reunião Geral, Fórum, Congresso, Viagem, Webinar</a:t>
+            </a:r>
+          </a:p>
+          <a:p>
+            <a:pPr algn="l">
               <a:spcBef>
-                <a:spcPts val="600"/>
+                <a:spcPts val="400"/>
               </a:spcBef>
-              <a:defRPr sz="1300">
-                <a:solidFill>
-                  <a:srgbClr val="6B7280"/>
-                </a:solidFill>
-              </a:defRPr>
+              <a:buFont typeface="Arial"/>
+              <a:buChar char="•"/>
             </a:pPr>
-          </a:p>
-          <a:p>
-            <a:pPr>
+            <a:r>
+              <a:rPr lang="pt-BR" sz="1500" dirty="0">
+                <a:solidFill>
+                  <a:srgbClr val="374869"/>
+                </a:solidFill>
+                <a:latin typeface="Inter"/>
+              </a:rPr>
+              <a:t>Cada evento tem pontuação definida</a:t>
+            </a:r>
+          </a:p>
+          <a:p>
+            <a:pPr algn="l">
               <a:spcBef>
-                <a:spcPts val="600"/>
+                <a:spcPts val="400"/>
               </a:spcBef>
-              <a:defRPr sz="1300">
-                <a:solidFill>
-                  <a:srgbClr val="6B7280"/>
-                </a:solidFill>
-              </a:defRPr>
+              <a:buFont typeface="Arial"/>
+              <a:buChar char="•"/>
             </a:pPr>
             <a:r>
-              <a:t>Cada evento tem pontuacao definida.</a:t>
-            </a:r>
-          </a:p>
-          <a:p>
-            <a:pPr>
-              <a:spcBef>
-                <a:spcPts val="600"/>
-              </a:spcBef>
-              <a:defRPr sz="1300">
-                <a:solidFill>
-                  <a:srgbClr val="6B7280"/>
-                </a:solidFill>
-              </a:defRPr>
-            </a:pPr>
-          </a:p>
-          <a:p>
-            <a:pPr>
-              <a:spcBef>
-                <a:spcPts val="600"/>
-              </a:spcBef>
-              <a:defRPr sz="1300">
-                <a:solidFill>
-                  <a:srgbClr val="6B7280"/>
-                </a:solidFill>
-              </a:defRPr>
-            </a:pPr>
-            <a:r>
-              <a:t>Clique para ver participantes.</a:t>
+              <a:rPr lang="pt-BR" sz="1500" dirty="0">
+                <a:solidFill>
+                  <a:srgbClr val="374869"/>
+                </a:solidFill>
+                <a:latin typeface="Inter"/>
+              </a:rPr>
+              <a:t>Clique para ver participantes</a:t>
             </a:r>
           </a:p>
         </p:txBody>
@@ -4760,15 +5055,27 @@
         </p:blipFill>
         <p:spPr>
           <a:xfrm>
-            <a:off x="4389120" y="914400"/>
-            <a:ext cx="4572000" cy="2531878"/>
+            <a:off x="4905829" y="457200"/>
+            <a:ext cx="6981371" cy="5984032"/>
           </a:xfrm>
           <a:prstGeom prst="rect">
             <a:avLst/>
           </a:prstGeom>
+          <a:effectLst>
+            <a:outerShdw blurRad="76200" dist="38100" dir="5400000" algn="tl">
+              <a:srgbClr val="000000">
+                <a:alpha val="25000"/>
+              </a:srgbClr>
+            </a:outerShdw>
+          </a:effectLst>
         </p:spPr>
       </p:pic>
     </p:spTree>
+    <p:extLst>
+      <p:ext uri="{BB962C8B-B14F-4D97-AF65-F5344CB8AC3E}">
+        <p14:creationId xmlns:p14="http://schemas.microsoft.com/office/powerpoint/2010/main" val="2679464851"/>
+      </p:ext>
+    </p:extLst>
   </p:cSld>
   <p:clrMapOvr>
     <a:masterClrMapping/>
@@ -4777,7 +5084,7 @@
 </file>
 
 <file path=ppt/slides/slide18.xml><?xml version="1.0" encoding="utf-8"?>
-<p:sld xmlns:a="http://schemas.openxmlformats.org/drawingml/2006/main" xmlns:p="http://schemas.openxmlformats.org/presentationml/2006/main" xmlns:r="http://schemas.openxmlformats.org/officeDocument/2006/relationships">
+<p:sld xmlns:a="http://schemas.openxmlformats.org/drawingml/2006/main" xmlns:r="http://schemas.openxmlformats.org/officeDocument/2006/relationships" xmlns:p="http://schemas.openxmlformats.org/presentationml/2006/main">
   <p:cSld>
     <p:spTree>
       <p:nvGrpSpPr>
@@ -4785,7 +5092,14 @@
         <p:cNvGrpSpPr/>
         <p:nvPr/>
       </p:nvGrpSpPr>
-      <p:grpSpPr/>
+      <p:grpSpPr>
+        <a:xfrm>
+          <a:off x="0" y="0"/>
+          <a:ext cx="0" cy="0"/>
+          <a:chOff x="0" y="0"/>
+          <a:chExt cx="0" cy="0"/>
+        </a:xfrm>
+      </p:grpSpPr>
       <p:sp>
         <p:nvSpPr>
           <p:cNvPr id="2" name="Rectangle 1"/>
@@ -4795,13 +5109,13 @@
         <p:spPr>
           <a:xfrm>
             <a:off x="0" y="0"/>
-            <a:ext cx="12191695" cy="73152"/>
+            <a:ext cx="12191695" cy="76200"/>
           </a:xfrm>
           <a:prstGeom prst="rect">
             <a:avLst/>
           </a:prstGeom>
           <a:solidFill>
-            <a:srgbClr val="1E3A5F"/>
+            <a:srgbClr val="0F7B6C"/>
           </a:solidFill>
           <a:ln>
             <a:noFill/>
@@ -4826,6 +5140,7 @@
           <a:lstStyle/>
           <a:p>
             <a:pPr algn="ctr"/>
+            <a:endParaRPr/>
           </a:p>
         </p:txBody>
       </p:sp>
@@ -4837,8 +5152,8 @@
         </p:nvSpPr>
         <p:spPr>
           <a:xfrm>
-            <a:off x="548640" y="274320"/>
-            <a:ext cx="8229600" cy="548640"/>
+            <a:off x="457200" y="228600"/>
+            <a:ext cx="3672800" cy="523220"/>
           </a:xfrm>
           <a:prstGeom prst="rect">
             <a:avLst/>
@@ -4851,14 +5166,14 @@
           </a:bodyPr>
           <a:lstStyle/>
           <a:p>
-            <a:pPr>
-              <a:defRPr sz="2200" b="1">
-                <a:solidFill>
-                  <a:srgbClr val="1E3A5F"/>
-                </a:solidFill>
-              </a:defRPr>
-            </a:pPr>
-            <a:r>
+            <a:pPr algn="l"/>
+            <a:r>
+              <a:rPr lang="pt-BR" sz="2800" b="1" dirty="0">
+                <a:solidFill>
+                  <a:srgbClr val="1B2A4A"/>
+                </a:solidFill>
+                <a:latin typeface="Montserrat"/>
+              </a:rPr>
               <a:t>Detalhe do Evento</a:t>
             </a:r>
           </a:p>
@@ -4872,8 +5187,8 @@
         </p:nvSpPr>
         <p:spPr>
           <a:xfrm>
-            <a:off x="548640" y="1097280"/>
-            <a:ext cx="3474720" cy="5029200"/>
+            <a:off x="457200" y="914400"/>
+            <a:ext cx="4572000" cy="1179810"/>
           </a:xfrm>
           <a:prstGeom prst="rect">
             <a:avLst/>
@@ -4886,87 +5201,74 @@
           </a:bodyPr>
           <a:lstStyle/>
           <a:p>
-            <a:pPr>
+            <a:pPr algn="l">
+              <a:spcBef>
+                <a:spcPts val="400"/>
+              </a:spcBef>
+              <a:buFont typeface="Arial"/>
+              <a:buChar char="•"/>
+            </a:pPr>
+            <a:r>
+              <a:rPr lang="pt-BR" sz="1500" dirty="0">
+                <a:solidFill>
+                  <a:srgbClr val="374869"/>
+                </a:solidFill>
+                <a:latin typeface="Inter"/>
+              </a:rPr>
+              <a:t>Tipo, data, local e descrição</a:t>
+            </a:r>
+          </a:p>
+          <a:p>
+            <a:pPr algn="l">
+              <a:spcBef>
+                <a:spcPts val="400"/>
+              </a:spcBef>
+              <a:buFont typeface="Arial"/>
+              <a:buChar char="•"/>
+            </a:pPr>
+            <a:r>
+              <a:rPr lang="pt-BR" sz="1500" dirty="0">
+                <a:solidFill>
+                  <a:srgbClr val="374869"/>
+                </a:solidFill>
+                <a:latin typeface="Inter"/>
+              </a:rPr>
+              <a:t>Pontuação para o engajamento</a:t>
+            </a:r>
+          </a:p>
+          <a:p>
+            <a:pPr algn="l">
+              <a:spcBef>
+                <a:spcPts val="400"/>
+              </a:spcBef>
+              <a:buFont typeface="Arial"/>
+              <a:buChar char="•"/>
+            </a:pPr>
+            <a:r>
+              <a:rPr lang="pt-BR" sz="1500" dirty="0">
+                <a:solidFill>
+                  <a:srgbClr val="374869"/>
+                </a:solidFill>
+                <a:latin typeface="Inter"/>
+              </a:rPr>
+              <a:t>Lista completa de participantes</a:t>
+            </a:r>
+          </a:p>
+          <a:p>
+            <a:pPr algn="l">
               <a:spcBef>
                 <a:spcPts val="600"/>
               </a:spcBef>
-              <a:defRPr sz="1300">
-                <a:solidFill>
-                  <a:srgbClr val="6B7280"/>
-                </a:solidFill>
-              </a:defRPr>
+              <a:buNone/>
             </a:pPr>
             <a:r>
-              <a:t>Tipo, modalidade, datas, local.</a:t>
-            </a:r>
-          </a:p>
-          <a:p>
-            <a:pPr>
-              <a:spcBef>
-                <a:spcPts val="600"/>
-              </a:spcBef>
-              <a:defRPr sz="1300">
-                <a:solidFill>
-                  <a:srgbClr val="6B7280"/>
-                </a:solidFill>
-              </a:defRPr>
-            </a:pPr>
-          </a:p>
-          <a:p>
-            <a:pPr>
-              <a:spcBef>
-                <a:spcPts val="600"/>
-              </a:spcBef>
-              <a:defRPr sz="1300">
-                <a:solidFill>
-                  <a:srgbClr val="6B7280"/>
-                </a:solidFill>
-              </a:defRPr>
-            </a:pPr>
-            <a:r>
-              <a:t>Pontuacao por forma de participacao.</a:t>
-            </a:r>
-          </a:p>
-          <a:p>
-            <a:pPr>
-              <a:spcBef>
-                <a:spcPts val="600"/>
-              </a:spcBef>
-              <a:defRPr sz="1300">
-                <a:solidFill>
-                  <a:srgbClr val="6B7280"/>
-                </a:solidFill>
-              </a:defRPr>
-            </a:pPr>
-          </a:p>
-          <a:p>
-            <a:pPr>
-              <a:spcBef>
-                <a:spcPts val="600"/>
-              </a:spcBef>
-              <a:defRPr sz="1300">
-                <a:solidFill>
-                  <a:srgbClr val="6B7280"/>
-                </a:solidFill>
-              </a:defRPr>
-            </a:pPr>
-            <a:r>
-              <a:t>Lista de participantes com foto,</a:t>
-            </a:r>
-          </a:p>
-          <a:p>
-            <a:pPr>
-              <a:spcBef>
-                <a:spcPts val="600"/>
-              </a:spcBef>
-              <a:defRPr sz="1300">
-                <a:solidFill>
-                  <a:srgbClr val="6B7280"/>
-                </a:solidFill>
-              </a:defRPr>
-            </a:pPr>
-            <a:r>
-              <a:t>municipio, papel e pontos.</a:t>
+              <a:rPr lang="pt-BR" sz="1400" i="1" dirty="0">
+                <a:solidFill>
+                  <a:srgbClr val="0F7B6C"/>
+                </a:solidFill>
+                <a:latin typeface="Inter"/>
+              </a:rPr>
+              <a:t>Editor: pode editar, adicionar e remover participantes</a:t>
             </a:r>
           </a:p>
         </p:txBody>
@@ -4987,15 +5289,27 @@
         </p:blipFill>
         <p:spPr>
           <a:xfrm>
-            <a:off x="4389120" y="914400"/>
-            <a:ext cx="4572000" cy="2531878"/>
+            <a:off x="4746171" y="368559"/>
+            <a:ext cx="7141029" cy="6120882"/>
           </a:xfrm>
           <a:prstGeom prst="rect">
             <a:avLst/>
           </a:prstGeom>
+          <a:effectLst>
+            <a:outerShdw blurRad="76200" dist="38100" dir="5400000" algn="tl">
+              <a:srgbClr val="000000">
+                <a:alpha val="25000"/>
+              </a:srgbClr>
+            </a:outerShdw>
+          </a:effectLst>
         </p:spPr>
       </p:pic>
     </p:spTree>
+    <p:extLst>
+      <p:ext uri="{BB962C8B-B14F-4D97-AF65-F5344CB8AC3E}">
+        <p14:creationId xmlns:p14="http://schemas.microsoft.com/office/powerpoint/2010/main" val="2951056215"/>
+      </p:ext>
+    </p:extLst>
   </p:cSld>
   <p:clrMapOvr>
     <a:masterClrMapping/>
@@ -5004,13 +5318,21 @@
 </file>
 
 <file path=ppt/slides/slide19.xml><?xml version="1.0" encoding="utf-8"?>
-<p:sld xmlns:a="http://schemas.openxmlformats.org/drawingml/2006/main" xmlns:p="http://schemas.openxmlformats.org/presentationml/2006/main" xmlns:r="http://schemas.openxmlformats.org/officeDocument/2006/relationships">
+<p:sld xmlns:a="http://schemas.openxmlformats.org/drawingml/2006/main" xmlns:r="http://schemas.openxmlformats.org/officeDocument/2006/relationships" xmlns:p="http://schemas.openxmlformats.org/presentationml/2006/main">
   <p:cSld>
     <p:bg>
       <p:bgPr>
-        <a:solidFill>
-          <a:srgbClr val="1E3A5F"/>
-        </a:solidFill>
+        <a:gradFill>
+          <a:gsLst>
+            <a:gs pos="0">
+              <a:srgbClr val="0D1A2E"/>
+            </a:gs>
+            <a:gs pos="100000">
+              <a:srgbClr val="1B2A4A"/>
+            </a:gs>
+          </a:gsLst>
+          <a:lin ang="5400000" scaled="1"/>
+        </a:gradFill>
         <a:effectLst/>
       </p:bgPr>
     </p:bg>
@@ -5020,7 +5342,14 @@
         <p:cNvGrpSpPr/>
         <p:nvPr/>
       </p:nvGrpSpPr>
-      <p:grpSpPr/>
+      <p:grpSpPr>
+        <a:xfrm>
+          <a:off x="0" y="0"/>
+          <a:ext cx="0" cy="0"/>
+          <a:chOff x="0" y="0"/>
+          <a:chExt cx="0" cy="0"/>
+        </a:xfrm>
+      </p:grpSpPr>
       <p:sp>
         <p:nvSpPr>
           <p:cNvPr id="2" name="TextBox 1"/>
@@ -5029,8 +5358,8 @@
         </p:nvSpPr>
         <p:spPr>
           <a:xfrm>
-            <a:off x="914400" y="1828800"/>
-            <a:ext cx="10058400" cy="914400"/>
+            <a:off x="914400" y="2286000"/>
+            <a:ext cx="10363200" cy="1371600"/>
           </a:xfrm>
           <a:prstGeom prst="rect">
             <a:avLst/>
@@ -5043,14 +5372,14 @@
           </a:bodyPr>
           <a:lstStyle/>
           <a:p>
-            <a:pPr algn="ctr">
-              <a:defRPr sz="7200" b="1">
-                <a:solidFill>
-                  <a:srgbClr val="94B8FF"/>
-                </a:solidFill>
-              </a:defRPr>
-            </a:pPr>
-            <a:r>
+            <a:pPr algn="l"/>
+            <a:r>
+              <a:rPr lang="pt-BR" sz="8000" b="1" dirty="0">
+                <a:solidFill>
+                  <a:srgbClr val="0F7B6C"/>
+                </a:solidFill>
+                <a:latin typeface="Montserrat"/>
+              </a:rPr>
               <a:t>07</a:t>
             </a:r>
           </a:p>
@@ -5064,8 +5393,8 @@
         </p:nvSpPr>
         <p:spPr>
           <a:xfrm>
-            <a:off x="914400" y="2926080"/>
-            <a:ext cx="10058400" cy="914400"/>
+            <a:off x="914400" y="3810000"/>
+            <a:ext cx="10363200" cy="914400"/>
           </a:xfrm>
           <a:prstGeom prst="rect">
             <a:avLst/>
@@ -5078,20 +5407,53 @@
           </a:bodyPr>
           <a:lstStyle/>
           <a:p>
-            <a:pPr algn="ctr">
-              <a:defRPr sz="3200" b="1">
+            <a:pPr algn="l"/>
+            <a:r>
+              <a:rPr lang="pt-BR" sz="3200" b="1" dirty="0">
                 <a:solidFill>
                   <a:srgbClr val="FFFFFF"/>
                 </a:solidFill>
-              </a:defRPr>
-            </a:pPr>
-            <a:r>
+                <a:latin typeface="Montserrat"/>
+              </a:rPr>
               <a:t>Engajamento</a:t>
             </a:r>
           </a:p>
         </p:txBody>
       </p:sp>
+      <p:sp>
+        <p:nvSpPr>
+          <p:cNvPr id="10" name="AccentLine"/>
+          <p:cNvSpPr/>
+          <p:nvPr/>
+        </p:nvSpPr>
+        <p:spPr>
+          <a:xfrm>
+            <a:off x="914400" y="3708400"/>
+            <a:ext cx="1828800" cy="0"/>
+          </a:xfrm>
+          <a:prstGeom prst="line">
+            <a:avLst/>
+          </a:prstGeom>
+          <a:ln w="25400">
+            <a:solidFill>
+              <a:srgbClr val="0F7B6C"/>
+            </a:solidFill>
+          </a:ln>
+        </p:spPr>
+        <p:txBody>
+          <a:bodyPr/>
+          <a:lstStyle/>
+          <a:p>
+            <a:endParaRPr lang="pt-BR"/>
+          </a:p>
+        </p:txBody>
+      </p:sp>
     </p:spTree>
+    <p:extLst>
+      <p:ext uri="{BB962C8B-B14F-4D97-AF65-F5344CB8AC3E}">
+        <p14:creationId xmlns:p14="http://schemas.microsoft.com/office/powerpoint/2010/main" val="3455072764"/>
+      </p:ext>
+    </p:extLst>
   </p:cSld>
   <p:clrMapOvr>
     <a:masterClrMapping/>
@@ -5100,7 +5462,7 @@
 </file>
 
 <file path=ppt/slides/slide2.xml><?xml version="1.0" encoding="utf-8"?>
-<p:sld xmlns:a="http://schemas.openxmlformats.org/drawingml/2006/main" xmlns:p="http://schemas.openxmlformats.org/presentationml/2006/main" xmlns:r="http://schemas.openxmlformats.org/officeDocument/2006/relationships">
+<p:sld xmlns:a="http://schemas.openxmlformats.org/drawingml/2006/main" xmlns:r="http://schemas.openxmlformats.org/officeDocument/2006/relationships" xmlns:p="http://schemas.openxmlformats.org/presentationml/2006/main">
   <p:cSld>
     <p:spTree>
       <p:nvGrpSpPr>
@@ -5108,7 +5470,14 @@
         <p:cNvGrpSpPr/>
         <p:nvPr/>
       </p:nvGrpSpPr>
-      <p:grpSpPr/>
+      <p:grpSpPr>
+        <a:xfrm>
+          <a:off x="0" y="0"/>
+          <a:ext cx="0" cy="0"/>
+          <a:chOff x="0" y="0"/>
+          <a:chExt cx="0" cy="0"/>
+        </a:xfrm>
+      </p:grpSpPr>
       <p:sp>
         <p:nvSpPr>
           <p:cNvPr id="2" name="Rectangle 1"/>
@@ -5118,13 +5487,13 @@
         <p:spPr>
           <a:xfrm>
             <a:off x="0" y="0"/>
-            <a:ext cx="12191695" cy="73152"/>
+            <a:ext cx="12191695" cy="76200"/>
           </a:xfrm>
           <a:prstGeom prst="rect">
             <a:avLst/>
           </a:prstGeom>
           <a:solidFill>
-            <a:srgbClr val="1E3A5F"/>
+            <a:srgbClr val="0F7B6C"/>
           </a:solidFill>
           <a:ln>
             <a:noFill/>
@@ -5149,6 +5518,7 @@
           <a:lstStyle/>
           <a:p>
             <a:pPr algn="ctr"/>
+            <a:endParaRPr/>
           </a:p>
         </p:txBody>
       </p:sp>
@@ -5160,8 +5530,8 @@
         </p:nvSpPr>
         <p:spPr>
           <a:xfrm>
-            <a:off x="548640" y="274320"/>
-            <a:ext cx="8229600" cy="548640"/>
+            <a:off x="457200" y="914400"/>
+            <a:ext cx="4676280" cy="523220"/>
           </a:xfrm>
           <a:prstGeom prst="rect">
             <a:avLst/>
@@ -5174,15 +5544,15 @@
           </a:bodyPr>
           <a:lstStyle/>
           <a:p>
-            <a:pPr>
-              <a:defRPr sz="2200" b="1">
-                <a:solidFill>
-                  <a:srgbClr val="1E3A5F"/>
-                </a:solidFill>
-              </a:defRPr>
-            </a:pPr>
-            <a:r>
-              <a:t>O que e o Sistema FNP?</a:t>
+            <a:pPr algn="l"/>
+            <a:r>
+              <a:rPr lang="pt-BR" sz="2800" b="1" dirty="0">
+                <a:solidFill>
+                  <a:srgbClr val="1B2A4A"/>
+                </a:solidFill>
+                <a:latin typeface="Montserrat"/>
+              </a:rPr>
+              <a:t>O que é o Sistema FNP?</a:t>
             </a:r>
           </a:p>
         </p:txBody>
@@ -5195,8 +5565,8 @@
         </p:nvSpPr>
         <p:spPr>
           <a:xfrm>
-            <a:off x="731520" y="1280160"/>
-            <a:ext cx="7680960" cy="4572000"/>
+            <a:off x="457200" y="1905000"/>
+            <a:ext cx="11277600" cy="2149306"/>
           </a:xfrm>
           <a:prstGeom prst="rect">
             <a:avLst/>
@@ -5209,152 +5579,137 @@
           </a:bodyPr>
           <a:lstStyle/>
           <a:p>
-            <a:pPr>
+            <a:pPr algn="l">
               <a:spcBef>
-                <a:spcPts val="1000"/>
+                <a:spcPts val="400"/>
               </a:spcBef>
-              <a:defRPr sz="1600">
-                <a:solidFill>
-                  <a:srgbClr val="6B7280"/>
-                </a:solidFill>
-              </a:defRPr>
+              <a:buNone/>
             </a:pPr>
             <a:r>
-              <a:t>Plataforma web de gestao institucional da Frente Nacional de Prefeitos.</a:t>
-            </a:r>
-          </a:p>
-          <a:p>
-            <a:pPr>
+              <a:rPr lang="pt-BR" sz="1600" dirty="0">
+                <a:solidFill>
+                  <a:srgbClr val="374869"/>
+                </a:solidFill>
+                <a:latin typeface="Inter"/>
+              </a:rPr>
+              <a:t>O Sistema FNP é uma plataforma digital desenvolvida para gerenciar as atividades institucionais da Frente Nacional de Prefeitos.</a:t>
+            </a:r>
+          </a:p>
+          <a:p>
+            <a:pPr algn="l">
               <a:spcBef>
-                <a:spcPts val="1000"/>
+                <a:spcPts val="600"/>
               </a:spcBef>
-              <a:defRPr sz="1600">
-                <a:solidFill>
-                  <a:srgbClr val="6B7280"/>
-                </a:solidFill>
-              </a:defRPr>
+              <a:buNone/>
             </a:pPr>
-          </a:p>
-          <a:p>
-            <a:pPr>
+            <a:r>
+              <a:rPr lang="pt-BR" sz="1600" b="1" dirty="0">
+                <a:solidFill>
+                  <a:srgbClr val="0F7B6C"/>
+                </a:solidFill>
+                <a:latin typeface="Montserrat"/>
+              </a:rPr>
+              <a:t>Principais funcionalidades:</a:t>
+            </a:r>
+          </a:p>
+          <a:p>
+            <a:pPr marL="457200" indent="-457200" algn="l">
               <a:spcBef>
-                <a:spcPts val="1000"/>
+                <a:spcPts val="400"/>
               </a:spcBef>
-              <a:defRPr sz="1600">
-                <a:solidFill>
-                  <a:srgbClr val="6B7280"/>
-                </a:solidFill>
-              </a:defRPr>
+              <a:buFont typeface="Arial"/>
+              <a:buChar char="•"/>
             </a:pPr>
             <a:r>
-              <a:t>Centraliza em um unico lugar:</a:t>
-            </a:r>
-          </a:p>
-          <a:p>
-            <a:pPr>
+              <a:rPr lang="pt-BR" sz="1600" dirty="0">
+                <a:solidFill>
+                  <a:srgbClr val="374869"/>
+                </a:solidFill>
+                <a:latin typeface="Inter"/>
+              </a:rPr>
+              <a:t>Cadastro completo de pessoas (prefeitos, representantes)</a:t>
+            </a:r>
+          </a:p>
+          <a:p>
+            <a:pPr marL="457200" indent="-457200" algn="l">
               <a:spcBef>
-                <a:spcPts val="1000"/>
+                <a:spcPts val="400"/>
               </a:spcBef>
-              <a:defRPr sz="1600">
-                <a:solidFill>
-                  <a:srgbClr val="6B7280"/>
-                </a:solidFill>
-              </a:defRPr>
+              <a:buFont typeface="Arial"/>
+              <a:buChar char="•"/>
             </a:pPr>
             <a:r>
-              <a:t>   - Cadastro de pessoas (prefeitos, secretarios, equipe)</a:t>
-            </a:r>
-          </a:p>
-          <a:p>
-            <a:pPr>
+              <a:rPr lang="pt-BR" sz="1600" dirty="0">
+                <a:solidFill>
+                  <a:srgbClr val="374869"/>
+                </a:solidFill>
+                <a:latin typeface="Inter"/>
+              </a:rPr>
+              <a:t>Gestão de municípios com dados geográficos e demográficos</a:t>
+            </a:r>
+          </a:p>
+          <a:p>
+            <a:pPr marL="457200" indent="-457200" algn="l">
               <a:spcBef>
-                <a:spcPts val="1000"/>
+                <a:spcPts val="400"/>
               </a:spcBef>
-              <a:defRPr sz="1600">
-                <a:solidFill>
-                  <a:srgbClr val="6B7280"/>
-                </a:solidFill>
-              </a:defRPr>
+              <a:buFont typeface="Arial"/>
+              <a:buChar char="•"/>
             </a:pPr>
             <a:r>
-              <a:t>   - Cadastro de municipios com brasoes reais e mapa</a:t>
-            </a:r>
-          </a:p>
-          <a:p>
-            <a:pPr>
+              <a:rPr lang="pt-BR" sz="1600" dirty="0">
+                <a:solidFill>
+                  <a:srgbClr val="374869"/>
+                </a:solidFill>
+                <a:latin typeface="Inter"/>
+              </a:rPr>
+              <a:t>Controle de adimplência das contribuições</a:t>
+            </a:r>
+          </a:p>
+          <a:p>
+            <a:pPr marL="457200" indent="-457200" algn="l">
               <a:spcBef>
-                <a:spcPts val="1000"/>
+                <a:spcPts val="400"/>
               </a:spcBef>
-              <a:defRPr sz="1600">
-                <a:solidFill>
-                  <a:srgbClr val="6B7280"/>
-                </a:solidFill>
-              </a:defRPr>
+              <a:buFont typeface="Arial"/>
+              <a:buChar char="•"/>
             </a:pPr>
             <a:r>
-              <a:t>   - Controle de adimplencia (pagamentos anuais)</a:t>
-            </a:r>
-          </a:p>
-          <a:p>
-            <a:pPr>
+              <a:rPr lang="pt-BR" sz="1600" dirty="0">
+                <a:solidFill>
+                  <a:srgbClr val="374869"/>
+                </a:solidFill>
+                <a:latin typeface="Inter"/>
+              </a:rPr>
+              <a:t>Registro e organização de eventos institucionais</a:t>
+            </a:r>
+          </a:p>
+          <a:p>
+            <a:pPr marL="457200" indent="-457200" algn="l">
               <a:spcBef>
-                <a:spcPts val="1000"/>
+                <a:spcPts val="400"/>
               </a:spcBef>
-              <a:defRPr sz="1600">
-                <a:solidFill>
-                  <a:srgbClr val="6B7280"/>
-                </a:solidFill>
-              </a:defRPr>
+              <a:buFont typeface="Arial"/>
+              <a:buChar char="•"/>
             </a:pPr>
             <a:r>
-              <a:t>   - Registro de eventos (foruns, reunioes, congressos)</a:t>
-            </a:r>
-          </a:p>
-          <a:p>
-            <a:pPr>
-              <a:spcBef>
-                <a:spcPts val="1000"/>
-              </a:spcBef>
-              <a:defRPr sz="1600">
-                <a:solidFill>
-                  <a:srgbClr val="6B7280"/>
-                </a:solidFill>
-              </a:defRPr>
-            </a:pPr>
-            <a:r>
-              <a:t>   - Ranking de engajamento dos municipios</a:t>
-            </a:r>
-          </a:p>
-          <a:p>
-            <a:pPr>
-              <a:spcBef>
-                <a:spcPts val="1000"/>
-              </a:spcBef>
-              <a:defRPr sz="1600">
-                <a:solidFill>
-                  <a:srgbClr val="6B7280"/>
-                </a:solidFill>
-              </a:defRPr>
-            </a:pPr>
-          </a:p>
-          <a:p>
-            <a:pPr>
-              <a:spcBef>
-                <a:spcPts val="1000"/>
-              </a:spcBef>
-              <a:defRPr sz="1600">
-                <a:solidFill>
-                  <a:srgbClr val="6B7280"/>
-                </a:solidFill>
-              </a:defRPr>
-            </a:pPr>
-            <a:r>
-              <a:t>Substitui as planilhas por um sistema seguro e rastreavel.</a:t>
+              <a:rPr lang="pt-BR" sz="1600" dirty="0">
+                <a:solidFill>
+                  <a:srgbClr val="374869"/>
+                </a:solidFill>
+                <a:latin typeface="Inter"/>
+              </a:rPr>
+              <a:t>Ranking de engajamento dos municípios</a:t>
             </a:r>
           </a:p>
         </p:txBody>
       </p:sp>
     </p:spTree>
+    <p:extLst>
+      <p:ext uri="{BB962C8B-B14F-4D97-AF65-F5344CB8AC3E}">
+        <p14:creationId xmlns:p14="http://schemas.microsoft.com/office/powerpoint/2010/main" val="452081860"/>
+      </p:ext>
+    </p:extLst>
   </p:cSld>
   <p:clrMapOvr>
     <a:masterClrMapping/>
@@ -5363,7 +5718,7 @@
 </file>
 
 <file path=ppt/slides/slide20.xml><?xml version="1.0" encoding="utf-8"?>
-<p:sld xmlns:a="http://schemas.openxmlformats.org/drawingml/2006/main" xmlns:p="http://schemas.openxmlformats.org/presentationml/2006/main" xmlns:r="http://schemas.openxmlformats.org/officeDocument/2006/relationships">
+<p:sld xmlns:a="http://schemas.openxmlformats.org/drawingml/2006/main" xmlns:r="http://schemas.openxmlformats.org/officeDocument/2006/relationships" xmlns:p="http://schemas.openxmlformats.org/presentationml/2006/main">
   <p:cSld>
     <p:spTree>
       <p:nvGrpSpPr>
@@ -5371,7 +5726,14 @@
         <p:cNvGrpSpPr/>
         <p:nvPr/>
       </p:nvGrpSpPr>
-      <p:grpSpPr/>
+      <p:grpSpPr>
+        <a:xfrm>
+          <a:off x="0" y="0"/>
+          <a:ext cx="0" cy="0"/>
+          <a:chOff x="0" y="0"/>
+          <a:chExt cx="0" cy="0"/>
+        </a:xfrm>
+      </p:grpSpPr>
       <p:sp>
         <p:nvSpPr>
           <p:cNvPr id="2" name="Rectangle 1"/>
@@ -5381,13 +5743,13 @@
         <p:spPr>
           <a:xfrm>
             <a:off x="0" y="0"/>
-            <a:ext cx="12191695" cy="73152"/>
+            <a:ext cx="12191695" cy="76200"/>
           </a:xfrm>
           <a:prstGeom prst="rect">
             <a:avLst/>
           </a:prstGeom>
           <a:solidFill>
-            <a:srgbClr val="1E3A5F"/>
+            <a:srgbClr val="0F7B6C"/>
           </a:solidFill>
           <a:ln>
             <a:noFill/>
@@ -5412,6 +5774,7 @@
           <a:lstStyle/>
           <a:p>
             <a:pPr algn="ctr"/>
+            <a:endParaRPr/>
           </a:p>
         </p:txBody>
       </p:sp>
@@ -5423,8 +5786,8 @@
         </p:nvSpPr>
         <p:spPr>
           <a:xfrm>
-            <a:off x="548640" y="274320"/>
-            <a:ext cx="8229600" cy="548640"/>
+            <a:off x="457200" y="228600"/>
+            <a:ext cx="4976042" cy="523220"/>
           </a:xfrm>
           <a:prstGeom prst="rect">
             <a:avLst/>
@@ -5437,14 +5800,14 @@
           </a:bodyPr>
           <a:lstStyle/>
           <a:p>
-            <a:pPr>
-              <a:defRPr sz="2200" b="1">
-                <a:solidFill>
-                  <a:srgbClr val="1E3A5F"/>
-                </a:solidFill>
-              </a:defRPr>
-            </a:pPr>
-            <a:r>
+            <a:pPr algn="l"/>
+            <a:r>
+              <a:rPr lang="pt-BR" sz="2800" b="1" dirty="0">
+                <a:solidFill>
+                  <a:srgbClr val="1B2A4A"/>
+                </a:solidFill>
+                <a:latin typeface="Montserrat"/>
+              </a:rPr>
               <a:t>Ranking de Engajamento</a:t>
             </a:r>
           </a:p>
@@ -5458,8 +5821,8 @@
         </p:nvSpPr>
         <p:spPr>
           <a:xfrm>
-            <a:off x="548640" y="1097280"/>
-            <a:ext cx="3474720" cy="5029200"/>
+            <a:off x="457200" y="914400"/>
+            <a:ext cx="4572000" cy="1656864"/>
           </a:xfrm>
           <a:prstGeom prst="rect">
             <a:avLst/>
@@ -5472,120 +5835,109 @@
           </a:bodyPr>
           <a:lstStyle/>
           <a:p>
-            <a:pPr>
+            <a:pPr algn="l">
+              <a:spcBef>
+                <a:spcPts val="200"/>
+              </a:spcBef>
+              <a:buNone/>
+            </a:pPr>
+            <a:r>
+              <a:rPr lang="pt-BR" sz="1500" b="1" dirty="0">
+                <a:solidFill>
+                  <a:srgbClr val="0F7B6C"/>
+                </a:solidFill>
+                <a:latin typeface="Montserrat"/>
+              </a:rPr>
+              <a:t>Como funciona</a:t>
+            </a:r>
+          </a:p>
+          <a:p>
+            <a:pPr algn="l">
+              <a:spcBef>
+                <a:spcPts val="200"/>
+              </a:spcBef>
+              <a:buFont typeface="Arial"/>
+              <a:buChar char="•"/>
+            </a:pPr>
+            <a:r>
+              <a:rPr lang="pt-BR" sz="1500" dirty="0">
+                <a:solidFill>
+                  <a:srgbClr val="374869"/>
+                </a:solidFill>
+                <a:latin typeface="Inter"/>
+              </a:rPr>
+              <a:t>Pontos = participação em eventos</a:t>
+            </a:r>
+          </a:p>
+          <a:p>
+            <a:pPr algn="l">
+              <a:spcBef>
+                <a:spcPts val="200"/>
+              </a:spcBef>
+              <a:buFont typeface="Arial"/>
+              <a:buChar char="•"/>
+            </a:pPr>
+            <a:r>
+              <a:rPr lang="pt-BR" sz="1500" dirty="0">
+                <a:solidFill>
+                  <a:srgbClr val="374869"/>
+                </a:solidFill>
+                <a:latin typeface="Inter"/>
+              </a:rPr>
+              <a:t>Adimplência impacta pontuação</a:t>
+            </a:r>
+          </a:p>
+          <a:p>
+            <a:pPr algn="l">
               <a:spcBef>
                 <a:spcPts val="600"/>
               </a:spcBef>
-              <a:defRPr sz="1300">
-                <a:solidFill>
-                  <a:srgbClr val="6B7280"/>
-                </a:solidFill>
-              </a:defRPr>
+              <a:buNone/>
             </a:pPr>
             <a:r>
-              <a:t>Pontuacao relativa aos eventos</a:t>
-            </a:r>
-          </a:p>
-          <a:p>
-            <a:pPr>
+              <a:rPr lang="pt-BR" sz="1500" b="1" dirty="0">
+                <a:solidFill>
+                  <a:srgbClr val="0F7B6C"/>
+                </a:solidFill>
+                <a:latin typeface="Montserrat"/>
+              </a:rPr>
+              <a:t>Níveis de engajamento</a:t>
+            </a:r>
+          </a:p>
+          <a:p>
+            <a:pPr algn="l">
               <a:spcBef>
-                <a:spcPts val="600"/>
+                <a:spcPts val="200"/>
               </a:spcBef>
-              <a:defRPr sz="1300">
-                <a:solidFill>
-                  <a:srgbClr val="6B7280"/>
-                </a:solidFill>
-              </a:defRPr>
+              <a:buFont typeface="Arial"/>
+              <a:buChar char="•"/>
             </a:pPr>
             <a:r>
-              <a:t>cadastrados no bienio.</a:t>
-            </a:r>
-          </a:p>
-          <a:p>
-            <a:pPr>
+              <a:rPr lang="pt-BR" sz="1500" dirty="0">
+                <a:solidFill>
+                  <a:srgbClr val="374869"/>
+                </a:solidFill>
+                <a:latin typeface="Inter"/>
+              </a:rPr>
+              <a:t>Muito Baixo, Baixo, Médio, Alto, Muito Alto</a:t>
+            </a:r>
+          </a:p>
+          <a:p>
+            <a:pPr algn="l">
               <a:spcBef>
-                <a:spcPts val="600"/>
+                <a:spcPts val="200"/>
               </a:spcBef>
-              <a:defRPr sz="1300">
-                <a:solidFill>
-                  <a:srgbClr val="6B7280"/>
-                </a:solidFill>
-              </a:defRPr>
+              <a:buFont typeface="Arial"/>
+              <a:buChar char="•"/>
             </a:pPr>
-          </a:p>
-          <a:p>
-            <a:pPr>
-              <a:spcBef>
-                <a:spcPts val="600"/>
-              </a:spcBef>
-              <a:defRPr sz="1300">
-                <a:solidFill>
-                  <a:srgbClr val="6B7280"/>
-                </a:solidFill>
-              </a:defRPr>
-            </a:pPr>
-            <a:r>
-              <a:t>Niveis:</a:t>
-            </a:r>
-          </a:p>
-          <a:p>
-            <a:pPr>
-              <a:spcBef>
-                <a:spcPts val="600"/>
-              </a:spcBef>
-              <a:defRPr sz="1300">
-                <a:solidFill>
-                  <a:srgbClr val="6B7280"/>
-                </a:solidFill>
-              </a:defRPr>
-            </a:pPr>
-            <a:r>
-              <a:t>   Alto (70-100) - muito ativo</a:t>
-            </a:r>
-          </a:p>
-          <a:p>
-            <a:pPr>
-              <a:spcBef>
-                <a:spcPts val="600"/>
-              </a:spcBef>
-              <a:defRPr sz="1300">
-                <a:solidFill>
-                  <a:srgbClr val="6B7280"/>
-                </a:solidFill>
-              </a:defRPr>
-            </a:pPr>
-            <a:r>
-              <a:t>   Medio (40-69) - moderado</a:t>
-            </a:r>
-          </a:p>
-          <a:p>
-            <a:pPr>
-              <a:spcBef>
-                <a:spcPts val="600"/>
-              </a:spcBef>
-              <a:defRPr sz="1300">
-                <a:solidFill>
-                  <a:srgbClr val="6B7280"/>
-                </a:solidFill>
-              </a:defRPr>
-            </a:pPr>
-            <a:r>
-              <a:t>   Baixo (10-39) - pouca participacao</a:t>
-            </a:r>
-          </a:p>
-          <a:p>
-            <a:pPr>
-              <a:spcBef>
-                <a:spcPts val="600"/>
-              </a:spcBef>
-              <a:defRPr sz="1300">
-                <a:solidFill>
-                  <a:srgbClr val="6B7280"/>
-                </a:solidFill>
-              </a:defRPr>
-            </a:pPr>
-            <a:r>
-              <a:t>   Inativo (0-9)</a:t>
+            <a:r>
+              <a:rPr lang="pt-BR" sz="1500" dirty="0">
+                <a:solidFill>
+                  <a:srgbClr val="374869"/>
+                </a:solidFill>
+                <a:latin typeface="Inter"/>
+              </a:rPr>
+              <a:t>Visível no ranking geral</a:t>
             </a:r>
           </a:p>
         </p:txBody>
@@ -5606,15 +5958,27 @@
         </p:blipFill>
         <p:spPr>
           <a:xfrm>
-            <a:off x="4389120" y="914400"/>
-            <a:ext cx="4572000" cy="2531878"/>
+            <a:off x="5088467" y="751820"/>
+            <a:ext cx="6646333" cy="5696857"/>
           </a:xfrm>
           <a:prstGeom prst="rect">
             <a:avLst/>
           </a:prstGeom>
+          <a:effectLst>
+            <a:outerShdw blurRad="76200" dist="38100" dir="5400000" algn="tl">
+              <a:srgbClr val="000000">
+                <a:alpha val="25000"/>
+              </a:srgbClr>
+            </a:outerShdw>
+          </a:effectLst>
         </p:spPr>
       </p:pic>
     </p:spTree>
+    <p:extLst>
+      <p:ext uri="{BB962C8B-B14F-4D97-AF65-F5344CB8AC3E}">
+        <p14:creationId xmlns:p14="http://schemas.microsoft.com/office/powerpoint/2010/main" val="1825263635"/>
+      </p:ext>
+    </p:extLst>
   </p:cSld>
   <p:clrMapOvr>
     <a:masterClrMapping/>
@@ -5623,13 +5987,21 @@
 </file>
 
 <file path=ppt/slides/slide21.xml><?xml version="1.0" encoding="utf-8"?>
-<p:sld xmlns:a="http://schemas.openxmlformats.org/drawingml/2006/main" xmlns:p="http://schemas.openxmlformats.org/presentationml/2006/main" xmlns:r="http://schemas.openxmlformats.org/officeDocument/2006/relationships">
+<p:sld xmlns:a="http://schemas.openxmlformats.org/drawingml/2006/main" xmlns:r="http://schemas.openxmlformats.org/officeDocument/2006/relationships" xmlns:p="http://schemas.openxmlformats.org/presentationml/2006/main">
   <p:cSld>
     <p:bg>
       <p:bgPr>
-        <a:solidFill>
-          <a:srgbClr val="1E3A5F"/>
-        </a:solidFill>
+        <a:gradFill>
+          <a:gsLst>
+            <a:gs pos="0">
+              <a:srgbClr val="0D1A2E"/>
+            </a:gs>
+            <a:gs pos="100000">
+              <a:srgbClr val="1B2A4A"/>
+            </a:gs>
+          </a:gsLst>
+          <a:lin ang="5400000" scaled="1"/>
+        </a:gradFill>
         <a:effectLst/>
       </p:bgPr>
     </p:bg>
@@ -5639,7 +6011,14 @@
         <p:cNvGrpSpPr/>
         <p:nvPr/>
       </p:nvGrpSpPr>
-      <p:grpSpPr/>
+      <p:grpSpPr>
+        <a:xfrm>
+          <a:off x="0" y="0"/>
+          <a:ext cx="0" cy="0"/>
+          <a:chOff x="0" y="0"/>
+          <a:chExt cx="0" cy="0"/>
+        </a:xfrm>
+      </p:grpSpPr>
       <p:sp>
         <p:nvSpPr>
           <p:cNvPr id="2" name="TextBox 1"/>
@@ -5648,8 +6027,8 @@
         </p:nvSpPr>
         <p:spPr>
           <a:xfrm>
-            <a:off x="914400" y="1828800"/>
-            <a:ext cx="10058400" cy="914400"/>
+            <a:off x="914400" y="2286000"/>
+            <a:ext cx="10363200" cy="1371600"/>
           </a:xfrm>
           <a:prstGeom prst="rect">
             <a:avLst/>
@@ -5662,14 +6041,14 @@
           </a:bodyPr>
           <a:lstStyle/>
           <a:p>
-            <a:pPr algn="ctr">
-              <a:defRPr sz="7200" b="1">
-                <a:solidFill>
-                  <a:srgbClr val="94B8FF"/>
-                </a:solidFill>
-              </a:defRPr>
-            </a:pPr>
-            <a:r>
+            <a:pPr algn="l"/>
+            <a:r>
+              <a:rPr lang="pt-BR" sz="8000" b="1" dirty="0">
+                <a:solidFill>
+                  <a:srgbClr val="0F7B6C"/>
+                </a:solidFill>
+                <a:latin typeface="Montserrat"/>
+              </a:rPr>
               <a:t>08</a:t>
             </a:r>
           </a:p>
@@ -5683,8 +6062,8 @@
         </p:nvSpPr>
         <p:spPr>
           <a:xfrm>
-            <a:off x="914400" y="2926080"/>
-            <a:ext cx="10058400" cy="914400"/>
+            <a:off x="914400" y="3810000"/>
+            <a:ext cx="10363200" cy="914400"/>
           </a:xfrm>
           <a:prstGeom prst="rect">
             <a:avLst/>
@@ -5697,20 +6076,53 @@
           </a:bodyPr>
           <a:lstStyle/>
           <a:p>
-            <a:pPr algn="ctr">
-              <a:defRPr sz="3200" b="1">
+            <a:pPr algn="l"/>
+            <a:r>
+              <a:rPr lang="pt-BR" sz="3200" b="1" dirty="0">
                 <a:solidFill>
                   <a:srgbClr val="FFFFFF"/>
                 </a:solidFill>
-              </a:defRPr>
-            </a:pPr>
-            <a:r>
-              <a:t>Funcoes do Editor</a:t>
-            </a:r>
+                <a:latin typeface="Montserrat"/>
+              </a:rPr>
+              <a:t>Funções do Editor</a:t>
+            </a:r>
+          </a:p>
+        </p:txBody>
+      </p:sp>
+      <p:sp>
+        <p:nvSpPr>
+          <p:cNvPr id="10" name="AccentLine"/>
+          <p:cNvSpPr/>
+          <p:nvPr/>
+        </p:nvSpPr>
+        <p:spPr>
+          <a:xfrm>
+            <a:off x="914400" y="3708400"/>
+            <a:ext cx="1828800" cy="0"/>
+          </a:xfrm>
+          <a:prstGeom prst="line">
+            <a:avLst/>
+          </a:prstGeom>
+          <a:ln w="25400">
+            <a:solidFill>
+              <a:srgbClr val="0F7B6C"/>
+            </a:solidFill>
+          </a:ln>
+        </p:spPr>
+        <p:txBody>
+          <a:bodyPr/>
+          <a:lstStyle/>
+          <a:p>
+            <a:endParaRPr lang="pt-BR"/>
           </a:p>
         </p:txBody>
       </p:sp>
     </p:spTree>
+    <p:extLst>
+      <p:ext uri="{BB962C8B-B14F-4D97-AF65-F5344CB8AC3E}">
+        <p14:creationId xmlns:p14="http://schemas.microsoft.com/office/powerpoint/2010/main" val="1782366589"/>
+      </p:ext>
+    </p:extLst>
   </p:cSld>
   <p:clrMapOvr>
     <a:masterClrMapping/>
@@ -5719,7 +6131,7 @@
 </file>
 
 <file path=ppt/slides/slide22.xml><?xml version="1.0" encoding="utf-8"?>
-<p:sld xmlns:a="http://schemas.openxmlformats.org/drawingml/2006/main" xmlns:p="http://schemas.openxmlformats.org/presentationml/2006/main" xmlns:r="http://schemas.openxmlformats.org/officeDocument/2006/relationships">
+<p:sld xmlns:a="http://schemas.openxmlformats.org/drawingml/2006/main" xmlns:r="http://schemas.openxmlformats.org/officeDocument/2006/relationships" xmlns:p="http://schemas.openxmlformats.org/presentationml/2006/main">
   <p:cSld>
     <p:spTree>
       <p:nvGrpSpPr>
@@ -5727,7 +6139,14 @@
         <p:cNvGrpSpPr/>
         <p:nvPr/>
       </p:nvGrpSpPr>
-      <p:grpSpPr/>
+      <p:grpSpPr>
+        <a:xfrm>
+          <a:off x="0" y="0"/>
+          <a:ext cx="0" cy="0"/>
+          <a:chOff x="0" y="0"/>
+          <a:chExt cx="0" cy="0"/>
+        </a:xfrm>
+      </p:grpSpPr>
       <p:sp>
         <p:nvSpPr>
           <p:cNvPr id="2" name="Rectangle 1"/>
@@ -5737,13 +6156,13 @@
         <p:spPr>
           <a:xfrm>
             <a:off x="0" y="0"/>
-            <a:ext cx="12191695" cy="73152"/>
+            <a:ext cx="12191695" cy="76200"/>
           </a:xfrm>
           <a:prstGeom prst="rect">
             <a:avLst/>
           </a:prstGeom>
           <a:solidFill>
-            <a:srgbClr val="1E3A5F"/>
+            <a:srgbClr val="0F7B6C"/>
           </a:solidFill>
           <a:ln>
             <a:noFill/>
@@ -5768,6 +6187,7 @@
           <a:lstStyle/>
           <a:p>
             <a:pPr algn="ctr"/>
+            <a:endParaRPr/>
           </a:p>
         </p:txBody>
       </p:sp>
@@ -5779,8 +6199,8 @@
         </p:nvSpPr>
         <p:spPr>
           <a:xfrm>
-            <a:off x="548640" y="274320"/>
-            <a:ext cx="8229600" cy="548640"/>
+            <a:off x="457200" y="228600"/>
+            <a:ext cx="3573414" cy="523220"/>
           </a:xfrm>
           <a:prstGeom prst="rect">
             <a:avLst/>
@@ -5793,14 +6213,14 @@
           </a:bodyPr>
           <a:lstStyle/>
           <a:p>
-            <a:pPr>
-              <a:defRPr sz="2200" b="1">
-                <a:solidFill>
-                  <a:srgbClr val="1E3A5F"/>
-                </a:solidFill>
-              </a:defRPr>
-            </a:pPr>
-            <a:r>
+            <a:pPr algn="l"/>
+            <a:r>
+              <a:rPr lang="pt-BR" sz="2800" b="1" dirty="0">
+                <a:solidFill>
+                  <a:srgbClr val="1B2A4A"/>
+                </a:solidFill>
+                <a:latin typeface="Montserrat"/>
+              </a:rPr>
               <a:t>Cadastrar e Editar</a:t>
             </a:r>
           </a:p>
@@ -5814,8 +6234,8 @@
         </p:nvSpPr>
         <p:spPr>
           <a:xfrm>
-            <a:off x="548640" y="1097280"/>
-            <a:ext cx="3474720" cy="5029200"/>
+            <a:off x="457200" y="914400"/>
+            <a:ext cx="4572000" cy="1656864"/>
           </a:xfrm>
           <a:prstGeom prst="rect">
             <a:avLst/>
@@ -5828,99 +6248,108 @@
           </a:bodyPr>
           <a:lstStyle/>
           <a:p>
-            <a:pPr>
+            <a:pPr algn="l">
               <a:spcBef>
-                <a:spcPts val="600"/>
+                <a:spcPts val="200"/>
               </a:spcBef>
-              <a:defRPr sz="1300">
-                <a:solidFill>
-                  <a:srgbClr val="6B7280"/>
-                </a:solidFill>
-              </a:defRPr>
+              <a:buNone/>
             </a:pPr>
             <a:r>
-              <a:t>Listagens: botao "+Novo" no topo.</a:t>
-            </a:r>
-          </a:p>
-          <a:p>
-            <a:pPr>
+              <a:rPr lang="pt-BR" sz="1500" b="1" dirty="0">
+                <a:solidFill>
+                  <a:srgbClr val="0F7B6C"/>
+                </a:solidFill>
+                <a:latin typeface="Montserrat"/>
+              </a:rPr>
+              <a:t>Listagens</a:t>
+            </a:r>
+          </a:p>
+          <a:p>
+            <a:pPr algn="l">
               <a:spcBef>
-                <a:spcPts val="600"/>
+                <a:spcPts val="200"/>
               </a:spcBef>
-              <a:defRPr sz="1300">
-                <a:solidFill>
-                  <a:srgbClr val="6B7280"/>
-                </a:solidFill>
-              </a:defRPr>
+              <a:buFont typeface="Arial"/>
+              <a:buChar char="•"/>
             </a:pPr>
-          </a:p>
-          <a:p>
-            <a:pPr>
+            <a:r>
+              <a:rPr lang="pt-BR" sz="1500" dirty="0">
+                <a:solidFill>
+                  <a:srgbClr val="374869"/>
+                </a:solidFill>
+                <a:latin typeface="Inter"/>
+              </a:rPr>
+              <a:t>Botão "+ Novo" para criar</a:t>
+            </a:r>
+          </a:p>
+          <a:p>
+            <a:pPr algn="l">
               <a:spcBef>
-                <a:spcPts val="600"/>
+                <a:spcPts val="400"/>
               </a:spcBef>
-              <a:defRPr sz="1300">
-                <a:solidFill>
-                  <a:srgbClr val="6B7280"/>
-                </a:solidFill>
-              </a:defRPr>
+              <a:buNone/>
             </a:pPr>
             <a:r>
-              <a:t>Detalhes: botao "Editar" ao lado.</a:t>
-            </a:r>
-          </a:p>
-          <a:p>
-            <a:pPr>
+              <a:rPr lang="pt-BR" sz="1500" b="1" dirty="0">
+                <a:solidFill>
+                  <a:srgbClr val="0F7B6C"/>
+                </a:solidFill>
+                <a:latin typeface="Montserrat"/>
+              </a:rPr>
+              <a:t>Detalhes</a:t>
+            </a:r>
+          </a:p>
+          <a:p>
+            <a:pPr algn="l">
               <a:spcBef>
-                <a:spcPts val="600"/>
+                <a:spcPts val="200"/>
               </a:spcBef>
-              <a:defRPr sz="1300">
-                <a:solidFill>
-                  <a:srgbClr val="6B7280"/>
-                </a:solidFill>
-              </a:defRPr>
+              <a:buFont typeface="Arial"/>
+              <a:buChar char="•"/>
             </a:pPr>
-          </a:p>
-          <a:p>
-            <a:pPr>
+            <a:r>
+              <a:rPr lang="pt-BR" sz="1500" dirty="0">
+                <a:solidFill>
+                  <a:srgbClr val="374869"/>
+                </a:solidFill>
+                <a:latin typeface="Inter"/>
+              </a:rPr>
+              <a:t>Editar inline ou formulário</a:t>
+            </a:r>
+          </a:p>
+          <a:p>
+            <a:pPr algn="l">
               <a:spcBef>
-                <a:spcPts val="600"/>
+                <a:spcPts val="400"/>
               </a:spcBef>
-              <a:defRPr sz="1300">
-                <a:solidFill>
-                  <a:srgbClr val="6B7280"/>
-                </a:solidFill>
-              </a:defRPr>
+              <a:buNone/>
             </a:pPr>
             <a:r>
-              <a:t>Formulario com todos os campos.</a:t>
-            </a:r>
-          </a:p>
-          <a:p>
-            <a:pPr>
+              <a:rPr lang="pt-BR" sz="1500" b="1" dirty="0">
+                <a:solidFill>
+                  <a:srgbClr val="0F7B6C"/>
+                </a:solidFill>
+                <a:latin typeface="Montserrat"/>
+              </a:rPr>
+              <a:t>Auditoria</a:t>
+            </a:r>
+          </a:p>
+          <a:p>
+            <a:pPr algn="l">
               <a:spcBef>
-                <a:spcPts val="600"/>
+                <a:spcPts val="200"/>
               </a:spcBef>
-              <a:defRPr sz="1300">
-                <a:solidFill>
-                  <a:srgbClr val="6B7280"/>
-                </a:solidFill>
-              </a:defRPr>
+              <a:buFont typeface="Arial"/>
+              <a:buChar char="•"/>
             </a:pPr>
-          </a:p>
-          <a:p>
-            <a:pPr>
-              <a:spcBef>
-                <a:spcPts val="600"/>
-              </a:spcBef>
-              <a:defRPr sz="1300">
-                <a:solidFill>
-                  <a:srgbClr val="6B7280"/>
-                </a:solidFill>
-              </a:defRPr>
-            </a:pPr>
-            <a:r>
-              <a:t>Toda alteracao gera log de auditoria.</a:t>
+            <a:r>
+              <a:rPr lang="pt-BR" sz="1500" dirty="0">
+                <a:solidFill>
+                  <a:srgbClr val="374869"/>
+                </a:solidFill>
+                <a:latin typeface="Inter"/>
+              </a:rPr>
+              <a:t>Todas as alterações são registradas</a:t>
             </a:r>
           </a:p>
         </p:txBody>
@@ -5941,15 +6370,27 @@
         </p:blipFill>
         <p:spPr>
           <a:xfrm>
-            <a:off x="4389120" y="914400"/>
-            <a:ext cx="4572000" cy="2531878"/>
+            <a:off x="4030614" y="112898"/>
+            <a:ext cx="7595329" cy="6510282"/>
           </a:xfrm>
           <a:prstGeom prst="rect">
             <a:avLst/>
           </a:prstGeom>
+          <a:effectLst>
+            <a:outerShdw blurRad="76200" dist="38100" dir="5400000" algn="tl">
+              <a:srgbClr val="000000">
+                <a:alpha val="25000"/>
+              </a:srgbClr>
+            </a:outerShdw>
+          </a:effectLst>
         </p:spPr>
       </p:pic>
     </p:spTree>
+    <p:extLst>
+      <p:ext uri="{BB962C8B-B14F-4D97-AF65-F5344CB8AC3E}">
+        <p14:creationId xmlns:p14="http://schemas.microsoft.com/office/powerpoint/2010/main" val="3109296015"/>
+      </p:ext>
+    </p:extLst>
   </p:cSld>
   <p:clrMapOvr>
     <a:masterClrMapping/>
@@ -5958,7 +6399,7 @@
 </file>
 
 <file path=ppt/slides/slide23.xml><?xml version="1.0" encoding="utf-8"?>
-<p:sld xmlns:a="http://schemas.openxmlformats.org/drawingml/2006/main" xmlns:p="http://schemas.openxmlformats.org/presentationml/2006/main" xmlns:r="http://schemas.openxmlformats.org/officeDocument/2006/relationships">
+<p:sld xmlns:a="http://schemas.openxmlformats.org/drawingml/2006/main" xmlns:r="http://schemas.openxmlformats.org/officeDocument/2006/relationships" xmlns:p="http://schemas.openxmlformats.org/presentationml/2006/main">
   <p:cSld>
     <p:spTree>
       <p:nvGrpSpPr>
@@ -5966,7 +6407,14 @@
         <p:cNvGrpSpPr/>
         <p:nvPr/>
       </p:nvGrpSpPr>
-      <p:grpSpPr/>
+      <p:grpSpPr>
+        <a:xfrm>
+          <a:off x="0" y="0"/>
+          <a:ext cx="0" cy="0"/>
+          <a:chOff x="0" y="0"/>
+          <a:chExt cx="0" cy="0"/>
+        </a:xfrm>
+      </p:grpSpPr>
       <p:sp>
         <p:nvSpPr>
           <p:cNvPr id="2" name="Rectangle 1"/>
@@ -5976,13 +6424,13 @@
         <p:spPr>
           <a:xfrm>
             <a:off x="0" y="0"/>
-            <a:ext cx="12191695" cy="73152"/>
+            <a:ext cx="12191695" cy="76200"/>
           </a:xfrm>
           <a:prstGeom prst="rect">
             <a:avLst/>
           </a:prstGeom>
           <a:solidFill>
-            <a:srgbClr val="1E3A5F"/>
+            <a:srgbClr val="0F7B6C"/>
           </a:solidFill>
           <a:ln>
             <a:noFill/>
@@ -6007,6 +6455,7 @@
           <a:lstStyle/>
           <a:p>
             <a:pPr algn="ctr"/>
+            <a:endParaRPr/>
           </a:p>
         </p:txBody>
       </p:sp>
@@ -6018,8 +6467,8 @@
         </p:nvSpPr>
         <p:spPr>
           <a:xfrm>
-            <a:off x="548640" y="274320"/>
-            <a:ext cx="8229600" cy="548640"/>
+            <a:off x="457200" y="914400"/>
+            <a:ext cx="2276585" cy="523220"/>
           </a:xfrm>
           <a:prstGeom prst="rect">
             <a:avLst/>
@@ -6032,15 +6481,15 @@
           </a:bodyPr>
           <a:lstStyle/>
           <a:p>
-            <a:pPr>
-              <a:defRPr sz="2200" b="1">
-                <a:solidFill>
-                  <a:srgbClr val="1E3A5F"/>
-                </a:solidFill>
-              </a:defRPr>
-            </a:pPr>
-            <a:r>
-              <a:t>Dicas Uteis</a:t>
+            <a:pPr algn="l"/>
+            <a:r>
+              <a:rPr lang="pt-BR" sz="2800" b="1" dirty="0">
+                <a:solidFill>
+                  <a:srgbClr val="1B2A4A"/>
+                </a:solidFill>
+                <a:latin typeface="Montserrat"/>
+              </a:rPr>
+              <a:t>Dicas Úteis</a:t>
             </a:r>
           </a:p>
         </p:txBody>
@@ -6053,8 +6502,8 @@
         </p:nvSpPr>
         <p:spPr>
           <a:xfrm>
-            <a:off x="731520" y="1280160"/>
-            <a:ext cx="7680960" cy="4572000"/>
+            <a:off x="457200" y="1905000"/>
+            <a:ext cx="11277600" cy="1579920"/>
           </a:xfrm>
           <a:prstGeom prst="rect">
             <a:avLst/>
@@ -6067,131 +6516,103 @@
           </a:bodyPr>
           <a:lstStyle/>
           <a:p>
-            <a:pPr>
+            <a:pPr marL="457200" indent="-457200" algn="l">
               <a:spcBef>
-                <a:spcPts val="1000"/>
+                <a:spcPts val="500"/>
               </a:spcBef>
-              <a:defRPr sz="1600">
-                <a:solidFill>
-                  <a:srgbClr val="6B7280"/>
-                </a:solidFill>
-              </a:defRPr>
+              <a:buFont typeface="Arial"/>
+              <a:buChar char="•"/>
             </a:pPr>
             <a:r>
-              <a:t>Busca em tempo real em todas as listagens.</a:t>
-            </a:r>
-          </a:p>
-          <a:p>
-            <a:pPr>
+              <a:rPr lang="pt-BR" sz="1600" dirty="0">
+                <a:solidFill>
+                  <a:srgbClr val="374869"/>
+                </a:solidFill>
+                <a:latin typeface="Inter"/>
+              </a:rPr>
+              <a:t>Mantenha os dados sempre atualizados</a:t>
+            </a:r>
+          </a:p>
+          <a:p>
+            <a:pPr marL="457200" indent="-457200" algn="l">
               <a:spcBef>
-                <a:spcPts val="1000"/>
+                <a:spcPts val="500"/>
               </a:spcBef>
-              <a:defRPr sz="1600">
-                <a:solidFill>
-                  <a:srgbClr val="6B7280"/>
-                </a:solidFill>
-              </a:defRPr>
+              <a:buFont typeface="Arial"/>
+              <a:buChar char="•"/>
             </a:pPr>
-          </a:p>
-          <a:p>
-            <a:pPr>
+            <a:r>
+              <a:rPr lang="pt-BR" sz="1600" dirty="0">
+                <a:solidFill>
+                  <a:srgbClr val="374869"/>
+                </a:solidFill>
+                <a:latin typeface="Inter"/>
+              </a:rPr>
+              <a:t>Use a busca para localizar registros rapidamente</a:t>
+            </a:r>
+          </a:p>
+          <a:p>
+            <a:pPr marL="457200" indent="-457200" algn="l">
               <a:spcBef>
-                <a:spcPts val="1000"/>
+                <a:spcPts val="500"/>
               </a:spcBef>
-              <a:defRPr sz="1600">
-                <a:solidFill>
-                  <a:srgbClr val="6B7280"/>
-                </a:solidFill>
-              </a:defRPr>
+              <a:buFont typeface="Arial"/>
+              <a:buChar char="•"/>
             </a:pPr>
             <a:r>
-              <a:t>Tudo e clicavel — clique para ver detalhes.</a:t>
-            </a:r>
-          </a:p>
-          <a:p>
-            <a:pPr>
+              <a:rPr lang="pt-BR" sz="1600" dirty="0">
+                <a:solidFill>
+                  <a:srgbClr val="374869"/>
+                </a:solidFill>
+                <a:latin typeface="Inter"/>
+              </a:rPr>
+              <a:t>Registre todos os eventos para alimentar o ranking de engajamento</a:t>
+            </a:r>
+          </a:p>
+          <a:p>
+            <a:pPr marL="457200" indent="-457200" algn="l">
               <a:spcBef>
-                <a:spcPts val="1000"/>
+                <a:spcPts val="500"/>
               </a:spcBef>
-              <a:defRPr sz="1600">
-                <a:solidFill>
-                  <a:srgbClr val="6B7280"/>
-                </a:solidFill>
-              </a:defRPr>
+              <a:buFont typeface="Arial"/>
+              <a:buChar char="•"/>
             </a:pPr>
-          </a:p>
-          <a:p>
-            <a:pPr>
+            <a:r>
+              <a:rPr lang="pt-BR" sz="1600" dirty="0">
+                <a:solidFill>
+                  <a:srgbClr val="374869"/>
+                </a:solidFill>
+                <a:latin typeface="Inter"/>
+              </a:rPr>
+              <a:t>Acompanhe a adimplência regularmente</a:t>
+            </a:r>
+          </a:p>
+          <a:p>
+            <a:pPr marL="457200" indent="-457200" algn="l">
               <a:spcBef>
-                <a:spcPts val="1000"/>
+                <a:spcPts val="500"/>
               </a:spcBef>
-              <a:defRPr sz="1600">
-                <a:solidFill>
-                  <a:srgbClr val="6B7280"/>
-                </a:solidFill>
-              </a:defRPr>
+              <a:buFont typeface="Arial"/>
+              <a:buChar char="•"/>
             </a:pPr>
             <a:r>
-              <a:t>Menu recolhivel — mais espaco de tela.</a:t>
-            </a:r>
-          </a:p>
-          <a:p>
-            <a:pPr>
-              <a:spcBef>
-                <a:spcPts val="1000"/>
-              </a:spcBef>
-              <a:defRPr sz="1600">
-                <a:solidFill>
-                  <a:srgbClr val="6B7280"/>
-                </a:solidFill>
-              </a:defRPr>
-            </a:pPr>
-          </a:p>
-          <a:p>
-            <a:pPr>
-              <a:spcBef>
-                <a:spcPts val="1000"/>
-              </a:spcBef>
-              <a:defRPr sz="1600">
-                <a:solidFill>
-                  <a:srgbClr val="6B7280"/>
-                </a:solidFill>
-              </a:defRPr>
-            </a:pPr>
-            <a:r>
-              <a:t>Breadcrumbs no topo para voltar a lista.</a:t>
-            </a:r>
-          </a:p>
-          <a:p>
-            <a:pPr>
-              <a:spcBef>
-                <a:spcPts val="1000"/>
-              </a:spcBef>
-              <a:defRPr sz="1600">
-                <a:solidFill>
-                  <a:srgbClr val="6B7280"/>
-                </a:solidFill>
-              </a:defRPr>
-            </a:pPr>
-          </a:p>
-          <a:p>
-            <a:pPr>
-              <a:spcBef>
-                <a:spcPts val="1000"/>
-              </a:spcBef>
-              <a:defRPr sz="1600">
-                <a:solidFill>
-                  <a:srgbClr val="6B7280"/>
-                </a:solidFill>
-              </a:defRPr>
-            </a:pPr>
-            <a:r>
-              <a:t>Auditoria: toda alteracao registrada com usuario e data.</a:t>
+              <a:rPr lang="pt-BR" sz="1600" dirty="0">
+                <a:solidFill>
+                  <a:srgbClr val="374869"/>
+                </a:solidFill>
+                <a:latin typeface="Inter"/>
+              </a:rPr>
+              <a:t>Em caso de problemas, entre em contato com o suporte de TI</a:t>
             </a:r>
           </a:p>
         </p:txBody>
       </p:sp>
     </p:spTree>
+    <p:extLst>
+      <p:ext uri="{BB962C8B-B14F-4D97-AF65-F5344CB8AC3E}">
+        <p14:creationId xmlns:p14="http://schemas.microsoft.com/office/powerpoint/2010/main" val="1569732780"/>
+      </p:ext>
+    </p:extLst>
   </p:cSld>
   <p:clrMapOvr>
     <a:masterClrMapping/>
@@ -6200,13 +6621,21 @@
 </file>
 
 <file path=ppt/slides/slide24.xml><?xml version="1.0" encoding="utf-8"?>
-<p:sld xmlns:a="http://schemas.openxmlformats.org/drawingml/2006/main" xmlns:p="http://schemas.openxmlformats.org/presentationml/2006/main" xmlns:r="http://schemas.openxmlformats.org/officeDocument/2006/relationships">
+<p:sld xmlns:a="http://schemas.openxmlformats.org/drawingml/2006/main" xmlns:r="http://schemas.openxmlformats.org/officeDocument/2006/relationships" xmlns:p="http://schemas.openxmlformats.org/presentationml/2006/main">
   <p:cSld>
     <p:bg>
       <p:bgPr>
-        <a:solidFill>
-          <a:srgbClr val="1E3A5F"/>
-        </a:solidFill>
+        <a:gradFill>
+          <a:gsLst>
+            <a:gs pos="0">
+              <a:srgbClr val="0D1A2E"/>
+            </a:gs>
+            <a:gs pos="100000">
+              <a:srgbClr val="1B2A4A"/>
+            </a:gs>
+          </a:gsLst>
+          <a:lin ang="5400000" scaled="1"/>
+        </a:gradFill>
         <a:effectLst/>
       </p:bgPr>
     </p:bg>
@@ -6216,7 +6645,14 @@
         <p:cNvGrpSpPr/>
         <p:nvPr/>
       </p:nvGrpSpPr>
-      <p:grpSpPr/>
+      <p:grpSpPr>
+        <a:xfrm>
+          <a:off x="0" y="0"/>
+          <a:ext cx="0" cy="0"/>
+          <a:chOff x="0" y="0"/>
+          <a:chExt cx="0" cy="0"/>
+        </a:xfrm>
+      </p:grpSpPr>
       <p:sp>
         <p:nvSpPr>
           <p:cNvPr id="2" name="TextBox 1"/>
@@ -6225,8 +6661,8 @@
         </p:nvSpPr>
         <p:spPr>
           <a:xfrm>
-            <a:off x="914400" y="1097280"/>
-            <a:ext cx="10058400" cy="548640"/>
+            <a:off x="914400" y="2540000"/>
+            <a:ext cx="10363200" cy="548640"/>
           </a:xfrm>
           <a:prstGeom prst="rect">
             <a:avLst/>
@@ -6240,13 +6676,17 @@
           <a:lstStyle/>
           <a:p>
             <a:pPr algn="ctr">
-              <a:defRPr sz="1400" b="1">
-                <a:solidFill>
-                  <a:srgbClr val="94B8FF"/>
-                </a:solidFill>
-              </a:defRPr>
+              <a:spcBef>
+                <a:spcPts val="0"/>
+              </a:spcBef>
             </a:pPr>
             <a:r>
+              <a:rPr lang="pt-BR" sz="1400" spc="400" dirty="0">
+                <a:solidFill>
+                  <a:srgbClr val="0F7B6C"/>
+                </a:solidFill>
+                <a:latin typeface="Montserrat"/>
+              </a:rPr>
               <a:t>FRENTE NACIONAL DE PREFEITOS</a:t>
             </a:r>
           </a:p>
@@ -6260,8 +6700,8 @@
         </p:nvSpPr>
         <p:spPr>
           <a:xfrm>
-            <a:off x="914400" y="2286000"/>
-            <a:ext cx="10058400" cy="1371600"/>
+            <a:off x="914400" y="3302000"/>
+            <a:ext cx="10363200" cy="2743200"/>
           </a:xfrm>
           <a:prstGeom prst="rect">
             <a:avLst/>
@@ -6274,35 +6714,106 @@
           </a:bodyPr>
           <a:lstStyle/>
           <a:p>
-            <a:pPr algn="ctr">
-              <a:defRPr sz="3600" b="1">
+            <a:pPr algn="ctr"/>
+            <a:r>
+              <a:rPr lang="pt-BR" sz="4400" b="1" dirty="0">
                 <a:solidFill>
                   <a:srgbClr val="FFFFFF"/>
                 </a:solidFill>
-              </a:defRPr>
-            </a:pPr>
-            <a:r>
-              <a:t>Duvidas?</a:t>
+                <a:latin typeface="Montserrat"/>
+              </a:rPr>
+              <a:t>Dúvidas?</a:t>
             </a:r>
           </a:p>
           <a:p>
             <a:pPr algn="ctr">
               <a:spcBef>
-                <a:spcPts val="1200"/>
+                <a:spcPts val="800"/>
               </a:spcBef>
-              <a:defRPr sz="1600">
-                <a:solidFill>
-                  <a:srgbClr val="94B8FF"/>
-                </a:solidFill>
-              </a:defRPr>
             </a:pPr>
             <a:r>
+              <a:rPr lang="pt-BR" sz="1800" dirty="0">
+                <a:solidFill>
+                  <a:srgbClr val="A8C4D4"/>
+                </a:solidFill>
+                <a:latin typeface="Inter"/>
+              </a:rPr>
               <a:t>Entre em contato com a equipe de TI</a:t>
             </a:r>
           </a:p>
         </p:txBody>
       </p:sp>
+      <p:sp>
+        <p:nvSpPr>
+          <p:cNvPr id="10" name="Line"/>
+          <p:cNvSpPr/>
+          <p:nvPr/>
+        </p:nvSpPr>
+        <p:spPr>
+          <a:xfrm>
+            <a:off x="4572000" y="3175000"/>
+            <a:ext cx="3048000" cy="0"/>
+          </a:xfrm>
+          <a:prstGeom prst="line">
+            <a:avLst/>
+          </a:prstGeom>
+          <a:ln w="19050">
+            <a:solidFill>
+              <a:srgbClr val="0F7B6C"/>
+            </a:solidFill>
+          </a:ln>
+        </p:spPr>
+        <p:txBody>
+          <a:bodyPr/>
+          <a:lstStyle/>
+          <a:p>
+            <a:endParaRPr lang="pt-BR"/>
+          </a:p>
+        </p:txBody>
+      </p:sp>
+      <p:sp>
+        <p:nvSpPr>
+          <p:cNvPr id="11" name="BottomBar"/>
+          <p:cNvSpPr/>
+          <p:nvPr/>
+        </p:nvSpPr>
+        <p:spPr>
+          <a:xfrm>
+            <a:off x="0" y="6553200"/>
+            <a:ext cx="12192000" cy="304800"/>
+          </a:xfrm>
+          <a:prstGeom prst="rect">
+            <a:avLst/>
+          </a:prstGeom>
+          <a:gradFill>
+            <a:gsLst>
+              <a:gs pos="0">
+                <a:srgbClr val="0F7B6C"/>
+              </a:gs>
+              <a:gs pos="100000">
+                <a:srgbClr val="0A5E53"/>
+              </a:gs>
+            </a:gsLst>
+            <a:lin ang="0" scaled="1"/>
+          </a:gradFill>
+          <a:ln>
+            <a:noFill/>
+          </a:ln>
+        </p:spPr>
+        <p:txBody>
+          <a:bodyPr/>
+          <a:lstStyle/>
+          <a:p>
+            <a:endParaRPr lang="pt-BR"/>
+          </a:p>
+        </p:txBody>
+      </p:sp>
     </p:spTree>
+    <p:extLst>
+      <p:ext uri="{BB962C8B-B14F-4D97-AF65-F5344CB8AC3E}">
+        <p14:creationId xmlns:p14="http://schemas.microsoft.com/office/powerpoint/2010/main" val="893957199"/>
+      </p:ext>
+    </p:extLst>
   </p:cSld>
   <p:clrMapOvr>
     <a:masterClrMapping/>
@@ -6311,7 +6822,7 @@
 </file>
 
 <file path=ppt/slides/slide3.xml><?xml version="1.0" encoding="utf-8"?>
-<p:sld xmlns:a="http://schemas.openxmlformats.org/drawingml/2006/main" xmlns:p="http://schemas.openxmlformats.org/presentationml/2006/main" xmlns:r="http://schemas.openxmlformats.org/officeDocument/2006/relationships">
+<p:sld xmlns:a="http://schemas.openxmlformats.org/drawingml/2006/main" xmlns:r="http://schemas.openxmlformats.org/officeDocument/2006/relationships" xmlns:p="http://schemas.openxmlformats.org/presentationml/2006/main">
   <p:cSld>
     <p:spTree>
       <p:nvGrpSpPr>
@@ -6319,7 +6830,14 @@
         <p:cNvGrpSpPr/>
         <p:nvPr/>
       </p:nvGrpSpPr>
-      <p:grpSpPr/>
+      <p:grpSpPr>
+        <a:xfrm>
+          <a:off x="0" y="0"/>
+          <a:ext cx="0" cy="0"/>
+          <a:chOff x="0" y="0"/>
+          <a:chExt cx="0" cy="0"/>
+        </a:xfrm>
+      </p:grpSpPr>
       <p:sp>
         <p:nvSpPr>
           <p:cNvPr id="2" name="Rectangle 1"/>
@@ -6329,13 +6847,13 @@
         <p:spPr>
           <a:xfrm>
             <a:off x="0" y="0"/>
-            <a:ext cx="12191695" cy="73152"/>
+            <a:ext cx="12191695" cy="76200"/>
           </a:xfrm>
           <a:prstGeom prst="rect">
             <a:avLst/>
           </a:prstGeom>
           <a:solidFill>
-            <a:srgbClr val="1E3A5F"/>
+            <a:srgbClr val="0F7B6C"/>
           </a:solidFill>
           <a:ln>
             <a:noFill/>
@@ -6360,6 +6878,7 @@
           <a:lstStyle/>
           <a:p>
             <a:pPr algn="ctr"/>
+            <a:endParaRPr/>
           </a:p>
         </p:txBody>
       </p:sp>
@@ -6371,8 +6890,8 @@
         </p:nvSpPr>
         <p:spPr>
           <a:xfrm>
-            <a:off x="548640" y="274320"/>
-            <a:ext cx="8229600" cy="548640"/>
+            <a:off x="457200" y="914400"/>
+            <a:ext cx="3195105" cy="523220"/>
           </a:xfrm>
           <a:prstGeom prst="rect">
             <a:avLst/>
@@ -6385,15 +6904,15 @@
           </a:bodyPr>
           <a:lstStyle/>
           <a:p>
-            <a:pPr>
-              <a:defRPr sz="2200" b="1">
-                <a:solidFill>
-                  <a:srgbClr val="1E3A5F"/>
-                </a:solidFill>
-              </a:defRPr>
-            </a:pPr>
-            <a:r>
-              <a:t>Perfis de Acesso</a:t>
+            <a:pPr algn="l"/>
+            <a:r>
+              <a:rPr lang="pt-BR" sz="2800" b="1" dirty="0">
+                <a:solidFill>
+                  <a:srgbClr val="1B2A4A"/>
+                </a:solidFill>
+                <a:latin typeface="Montserrat"/>
+              </a:rPr>
+              <a:t>Tipos de Acesso</a:t>
             </a:r>
           </a:p>
         </p:txBody>
@@ -6406,8 +6925,8 @@
         </p:nvSpPr>
         <p:spPr>
           <a:xfrm>
-            <a:off x="731520" y="1280160"/>
-            <a:ext cx="7680960" cy="4572000"/>
+            <a:off x="457200" y="1905000"/>
+            <a:ext cx="11277600" cy="2408352"/>
           </a:xfrm>
           <a:prstGeom prst="rect">
             <a:avLst/>
@@ -6420,137 +6939,154 @@
           </a:bodyPr>
           <a:lstStyle/>
           <a:p>
-            <a:pPr>
+            <a:pPr algn="l">
               <a:spcBef>
-                <a:spcPts val="1000"/>
+                <a:spcPts val="200"/>
               </a:spcBef>
-              <a:defRPr sz="1600">
-                <a:solidFill>
-                  <a:srgbClr val="6B7280"/>
-                </a:solidFill>
-              </a:defRPr>
+              <a:buNone/>
             </a:pPr>
             <a:r>
-              <a:t>VISUALIZADOR</a:t>
-            </a:r>
-          </a:p>
-          <a:p>
-            <a:pPr>
+              <a:rPr lang="pt-BR" sz="1600" b="1" dirty="0">
+                <a:solidFill>
+                  <a:srgbClr val="0F7B6C"/>
+                </a:solidFill>
+                <a:latin typeface="Montserrat"/>
+              </a:rPr>
+              <a:t>Administrador</a:t>
+            </a:r>
+          </a:p>
+          <a:p>
+            <a:pPr marL="457200" indent="-457200" algn="l">
               <a:spcBef>
-                <a:spcPts val="1000"/>
+                <a:spcPts val="300"/>
               </a:spcBef>
-              <a:defRPr sz="1600">
-                <a:solidFill>
-                  <a:srgbClr val="6B7280"/>
-                </a:solidFill>
-              </a:defRPr>
+              <a:buFont typeface="Arial"/>
+              <a:buChar char="•"/>
             </a:pPr>
             <a:r>
-              <a:t>   Consulta todas as informacoes. Nao altera dados.</a:t>
-            </a:r>
-          </a:p>
-          <a:p>
-            <a:pPr>
+              <a:rPr lang="pt-BR" sz="1600" dirty="0">
+                <a:solidFill>
+                  <a:srgbClr val="374869"/>
+                </a:solidFill>
+                <a:latin typeface="Inter"/>
+              </a:rPr>
+              <a:t>Acesso total: cadastrar, editar, excluir, gerenciar usuários</a:t>
+            </a:r>
+          </a:p>
+          <a:p>
+            <a:pPr marL="457200" indent="-457200" algn="l">
               <a:spcBef>
-                <a:spcPts val="1000"/>
+                <a:spcPts val="300"/>
               </a:spcBef>
-              <a:defRPr sz="1600">
-                <a:solidFill>
-                  <a:srgbClr val="6B7280"/>
-                </a:solidFill>
-              </a:defRPr>
+              <a:buFont typeface="Arial"/>
+              <a:buChar char="•"/>
             </a:pPr>
-          </a:p>
-          <a:p>
-            <a:pPr>
+            <a:r>
+              <a:rPr lang="pt-BR" sz="1600" dirty="0">
+                <a:solidFill>
+                  <a:srgbClr val="374869"/>
+                </a:solidFill>
+                <a:latin typeface="Inter"/>
+              </a:rPr>
+              <a:t>Configurações do sistema e permissões</a:t>
+            </a:r>
+          </a:p>
+          <a:p>
+            <a:pPr algn="l">
               <a:spcBef>
-                <a:spcPts val="1000"/>
+                <a:spcPts val="600"/>
               </a:spcBef>
-              <a:defRPr sz="1600">
-                <a:solidFill>
-                  <a:srgbClr val="6B7280"/>
-                </a:solidFill>
-              </a:defRPr>
+              <a:buNone/>
             </a:pPr>
             <a:r>
-              <a:t>EDITOR</a:t>
-            </a:r>
-          </a:p>
-          <a:p>
-            <a:pPr>
+              <a:rPr lang="pt-BR" sz="1600" b="1" dirty="0">
+                <a:solidFill>
+                  <a:srgbClr val="0F7B6C"/>
+                </a:solidFill>
+                <a:latin typeface="Montserrat"/>
+              </a:rPr>
+              <a:t>Editor</a:t>
+            </a:r>
+          </a:p>
+          <a:p>
+            <a:pPr marL="457200" indent="-457200" algn="l">
               <a:spcBef>
-                <a:spcPts val="1000"/>
+                <a:spcPts val="300"/>
               </a:spcBef>
-              <a:defRPr sz="1600">
-                <a:solidFill>
-                  <a:srgbClr val="6B7280"/>
-                </a:solidFill>
-              </a:defRPr>
+              <a:buFont typeface="Arial"/>
+              <a:buChar char="•"/>
             </a:pPr>
             <a:r>
-              <a:t>   Mesma visualizacao + cadastrar e editar registros.</a:t>
-            </a:r>
-          </a:p>
-          <a:p>
-            <a:pPr>
+              <a:rPr lang="pt-BR" sz="1600" dirty="0">
+                <a:solidFill>
+                  <a:srgbClr val="374869"/>
+                </a:solidFill>
+                <a:latin typeface="Inter"/>
+              </a:rPr>
+              <a:t>Pode cadastrar e editar pessoas, municípios e eventos</a:t>
+            </a:r>
+          </a:p>
+          <a:p>
+            <a:pPr marL="457200" indent="-457200" algn="l">
               <a:spcBef>
-                <a:spcPts val="1000"/>
+                <a:spcPts val="300"/>
               </a:spcBef>
-              <a:defRPr sz="1600">
-                <a:solidFill>
-                  <a:srgbClr val="6B7280"/>
-                </a:solidFill>
-              </a:defRPr>
+              <a:buFont typeface="Arial"/>
+              <a:buChar char="•"/>
             </a:pPr>
             <a:r>
-              <a:t>   Alteracoes ficam registradas no log de auditoria.</a:t>
-            </a:r>
-          </a:p>
-          <a:p>
-            <a:pPr>
+              <a:rPr lang="pt-BR" sz="1600" dirty="0">
+                <a:solidFill>
+                  <a:srgbClr val="374869"/>
+                </a:solidFill>
+                <a:latin typeface="Inter"/>
+              </a:rPr>
+              <a:t>Não gerencia usuários</a:t>
+            </a:r>
+          </a:p>
+          <a:p>
+            <a:pPr algn="l">
               <a:spcBef>
-                <a:spcPts val="1000"/>
+                <a:spcPts val="600"/>
               </a:spcBef>
-              <a:defRPr sz="1600">
-                <a:solidFill>
-                  <a:srgbClr val="6B7280"/>
-                </a:solidFill>
-              </a:defRPr>
+              <a:buNone/>
             </a:pPr>
-          </a:p>
-          <a:p>
-            <a:pPr>
+            <a:r>
+              <a:rPr lang="pt-BR" sz="1600" b="1" dirty="0">
+                <a:solidFill>
+                  <a:srgbClr val="0F7B6C"/>
+                </a:solidFill>
+                <a:latin typeface="Montserrat"/>
+              </a:rPr>
+              <a:t>Leitor</a:t>
+            </a:r>
+          </a:p>
+          <a:p>
+            <a:pPr marL="457200" indent="-457200" algn="l">
               <a:spcBef>
-                <a:spcPts val="1000"/>
+                <a:spcPts val="300"/>
               </a:spcBef>
-              <a:defRPr sz="1600">
-                <a:solidFill>
-                  <a:srgbClr val="6B7280"/>
-                </a:solidFill>
-              </a:defRPr>
+              <a:buFont typeface="Arial"/>
+              <a:buChar char="•"/>
             </a:pPr>
             <a:r>
-              <a:t>ADMINISTRADOR (TI)</a:t>
-            </a:r>
-          </a:p>
-          <a:p>
-            <a:pPr>
-              <a:spcBef>
-                <a:spcPts val="1000"/>
-              </a:spcBef>
-              <a:defRPr sz="1600">
-                <a:solidFill>
-                  <a:srgbClr val="6B7280"/>
-                </a:solidFill>
-              </a:defRPr>
-            </a:pPr>
-            <a:r>
-              <a:t>   Painel Admin: gerencia usuarios, permissoes e logs.</a:t>
+              <a:rPr lang="pt-BR" sz="1600" dirty="0">
+                <a:solidFill>
+                  <a:srgbClr val="374869"/>
+                </a:solidFill>
+                <a:latin typeface="Inter"/>
+              </a:rPr>
+              <a:t>Somente visualização de dados e relatórios</a:t>
             </a:r>
           </a:p>
         </p:txBody>
       </p:sp>
     </p:spTree>
+    <p:extLst>
+      <p:ext uri="{BB962C8B-B14F-4D97-AF65-F5344CB8AC3E}">
+        <p14:creationId xmlns:p14="http://schemas.microsoft.com/office/powerpoint/2010/main" val="1011772486"/>
+      </p:ext>
+    </p:extLst>
   </p:cSld>
   <p:clrMapOvr>
     <a:masterClrMapping/>
@@ -6559,13 +7095,21 @@
 </file>
 
 <file path=ppt/slides/slide4.xml><?xml version="1.0" encoding="utf-8"?>
-<p:sld xmlns:a="http://schemas.openxmlformats.org/drawingml/2006/main" xmlns:p="http://schemas.openxmlformats.org/presentationml/2006/main" xmlns:r="http://schemas.openxmlformats.org/officeDocument/2006/relationships">
+<p:sld xmlns:a="http://schemas.openxmlformats.org/drawingml/2006/main" xmlns:r="http://schemas.openxmlformats.org/officeDocument/2006/relationships" xmlns:p="http://schemas.openxmlformats.org/presentationml/2006/main">
   <p:cSld>
     <p:bg>
       <p:bgPr>
-        <a:solidFill>
-          <a:srgbClr val="1E3A5F"/>
-        </a:solidFill>
+        <a:gradFill>
+          <a:gsLst>
+            <a:gs pos="0">
+              <a:srgbClr val="0D1A2E"/>
+            </a:gs>
+            <a:gs pos="100000">
+              <a:srgbClr val="1B2A4A"/>
+            </a:gs>
+          </a:gsLst>
+          <a:lin ang="5400000" scaled="1"/>
+        </a:gradFill>
         <a:effectLst/>
       </p:bgPr>
     </p:bg>
@@ -6575,7 +7119,14 @@
         <p:cNvGrpSpPr/>
         <p:nvPr/>
       </p:nvGrpSpPr>
-      <p:grpSpPr/>
+      <p:grpSpPr>
+        <a:xfrm>
+          <a:off x="0" y="0"/>
+          <a:ext cx="0" cy="0"/>
+          <a:chOff x="0" y="0"/>
+          <a:chExt cx="0" cy="0"/>
+        </a:xfrm>
+      </p:grpSpPr>
       <p:sp>
         <p:nvSpPr>
           <p:cNvPr id="2" name="TextBox 1"/>
@@ -6584,8 +7135,8 @@
         </p:nvSpPr>
         <p:spPr>
           <a:xfrm>
-            <a:off x="914400" y="1828800"/>
-            <a:ext cx="10058400" cy="914400"/>
+            <a:off x="914400" y="2286000"/>
+            <a:ext cx="10363200" cy="1371600"/>
           </a:xfrm>
           <a:prstGeom prst="rect">
             <a:avLst/>
@@ -6598,14 +7149,14 @@
           </a:bodyPr>
           <a:lstStyle/>
           <a:p>
-            <a:pPr algn="ctr">
-              <a:defRPr sz="7200" b="1">
-                <a:solidFill>
-                  <a:srgbClr val="94B8FF"/>
-                </a:solidFill>
-              </a:defRPr>
-            </a:pPr>
-            <a:r>
+            <a:pPr algn="l"/>
+            <a:r>
+              <a:rPr lang="pt-BR" sz="8000" b="1" dirty="0">
+                <a:solidFill>
+                  <a:srgbClr val="0F7B6C"/>
+                </a:solidFill>
+                <a:latin typeface="Montserrat"/>
+              </a:rPr>
               <a:t>01</a:t>
             </a:r>
           </a:p>
@@ -6619,8 +7170,8 @@
         </p:nvSpPr>
         <p:spPr>
           <a:xfrm>
-            <a:off x="914400" y="2926080"/>
-            <a:ext cx="10058400" cy="914400"/>
+            <a:off x="914400" y="3810000"/>
+            <a:ext cx="10363200" cy="914400"/>
           </a:xfrm>
           <a:prstGeom prst="rect">
             <a:avLst/>
@@ -6633,20 +7184,53 @@
           </a:bodyPr>
           <a:lstStyle/>
           <a:p>
-            <a:pPr algn="ctr">
-              <a:defRPr sz="3200" b="1">
+            <a:pPr algn="l"/>
+            <a:r>
+              <a:rPr lang="pt-BR" sz="3200" b="1" dirty="0">
                 <a:solidFill>
                   <a:srgbClr val="FFFFFF"/>
                 </a:solidFill>
-              </a:defRPr>
-            </a:pPr>
-            <a:r>
+                <a:latin typeface="Montserrat"/>
+              </a:rPr>
               <a:t>Acessando o Sistema</a:t>
             </a:r>
           </a:p>
         </p:txBody>
       </p:sp>
+      <p:sp>
+        <p:nvSpPr>
+          <p:cNvPr id="10" name="AccentLine"/>
+          <p:cNvSpPr/>
+          <p:nvPr/>
+        </p:nvSpPr>
+        <p:spPr>
+          <a:xfrm>
+            <a:off x="914400" y="3708400"/>
+            <a:ext cx="1828800" cy="0"/>
+          </a:xfrm>
+          <a:prstGeom prst="line">
+            <a:avLst/>
+          </a:prstGeom>
+          <a:ln w="25400">
+            <a:solidFill>
+              <a:srgbClr val="0F7B6C"/>
+            </a:solidFill>
+          </a:ln>
+        </p:spPr>
+        <p:txBody>
+          <a:bodyPr/>
+          <a:lstStyle/>
+          <a:p>
+            <a:endParaRPr lang="pt-BR"/>
+          </a:p>
+        </p:txBody>
+      </p:sp>
     </p:spTree>
+    <p:extLst>
+      <p:ext uri="{BB962C8B-B14F-4D97-AF65-F5344CB8AC3E}">
+        <p14:creationId xmlns:p14="http://schemas.microsoft.com/office/powerpoint/2010/main" val="763509656"/>
+      </p:ext>
+    </p:extLst>
   </p:cSld>
   <p:clrMapOvr>
     <a:masterClrMapping/>
@@ -6655,7 +7239,7 @@
 </file>
 
 <file path=ppt/slides/slide5.xml><?xml version="1.0" encoding="utf-8"?>
-<p:sld xmlns:a="http://schemas.openxmlformats.org/drawingml/2006/main" xmlns:p="http://schemas.openxmlformats.org/presentationml/2006/main" xmlns:r="http://schemas.openxmlformats.org/officeDocument/2006/relationships">
+<p:sld xmlns:a="http://schemas.openxmlformats.org/drawingml/2006/main" xmlns:r="http://schemas.openxmlformats.org/officeDocument/2006/relationships" xmlns:p="http://schemas.openxmlformats.org/presentationml/2006/main">
   <p:cSld>
     <p:spTree>
       <p:nvGrpSpPr>
@@ -6663,7 +7247,14 @@
         <p:cNvGrpSpPr/>
         <p:nvPr/>
       </p:nvGrpSpPr>
-      <p:grpSpPr/>
+      <p:grpSpPr>
+        <a:xfrm>
+          <a:off x="0" y="0"/>
+          <a:ext cx="0" cy="0"/>
+          <a:chOff x="0" y="0"/>
+          <a:chExt cx="0" cy="0"/>
+        </a:xfrm>
+      </p:grpSpPr>
       <p:sp>
         <p:nvSpPr>
           <p:cNvPr id="2" name="Rectangle 1"/>
@@ -6673,13 +7264,13 @@
         <p:spPr>
           <a:xfrm>
             <a:off x="0" y="0"/>
-            <a:ext cx="12191695" cy="73152"/>
+            <a:ext cx="12191695" cy="76200"/>
           </a:xfrm>
           <a:prstGeom prst="rect">
             <a:avLst/>
           </a:prstGeom>
           <a:solidFill>
-            <a:srgbClr val="1E3A5F"/>
+            <a:srgbClr val="0F7B6C"/>
           </a:solidFill>
           <a:ln>
             <a:noFill/>
@@ -6704,6 +7295,7 @@
           <a:lstStyle/>
           <a:p>
             <a:pPr algn="ctr"/>
+            <a:endParaRPr/>
           </a:p>
         </p:txBody>
       </p:sp>
@@ -6715,8 +7307,8 @@
         </p:nvSpPr>
         <p:spPr>
           <a:xfrm>
-            <a:off x="548640" y="274320"/>
-            <a:ext cx="8229600" cy="548640"/>
+            <a:off x="457200" y="228600"/>
+            <a:ext cx="2696572" cy="523220"/>
           </a:xfrm>
           <a:prstGeom prst="rect">
             <a:avLst/>
@@ -6729,14 +7321,14 @@
           </a:bodyPr>
           <a:lstStyle/>
           <a:p>
-            <a:pPr>
-              <a:defRPr sz="2200" b="1">
-                <a:solidFill>
-                  <a:srgbClr val="1E3A5F"/>
-                </a:solidFill>
-              </a:defRPr>
-            </a:pPr>
-            <a:r>
+            <a:pPr algn="l"/>
+            <a:r>
+              <a:rPr lang="pt-BR" sz="2800" b="1" dirty="0">
+                <a:solidFill>
+                  <a:srgbClr val="1B2A4A"/>
+                </a:solidFill>
+                <a:latin typeface="Montserrat"/>
+              </a:rPr>
               <a:t>Tela de Login</a:t>
             </a:r>
           </a:p>
@@ -6750,8 +7342,8 @@
         </p:nvSpPr>
         <p:spPr>
           <a:xfrm>
-            <a:off x="548640" y="1097280"/>
-            <a:ext cx="3474720" cy="5029200"/>
+            <a:off x="457200" y="914400"/>
+            <a:ext cx="4572000" cy="1179810"/>
           </a:xfrm>
           <a:prstGeom prst="rect">
             <a:avLst/>
@@ -6764,114 +7356,74 @@
           </a:bodyPr>
           <a:lstStyle/>
           <a:p>
-            <a:pPr>
+            <a:pPr algn="l">
+              <a:spcBef>
+                <a:spcPts val="400"/>
+              </a:spcBef>
+              <a:buFont typeface="Arial"/>
+              <a:buChar char="•"/>
+            </a:pPr>
+            <a:r>
+              <a:rPr lang="pt-BR" sz="1500" dirty="0">
+                <a:solidFill>
+                  <a:srgbClr val="374869"/>
+                </a:solidFill>
+                <a:latin typeface="Inter"/>
+              </a:rPr>
+              <a:t>Acesse o endereço do sistema</a:t>
+            </a:r>
+          </a:p>
+          <a:p>
+            <a:pPr algn="l">
+              <a:spcBef>
+                <a:spcPts val="400"/>
+              </a:spcBef>
+              <a:buFont typeface="Arial"/>
+              <a:buChar char="•"/>
+            </a:pPr>
+            <a:r>
+              <a:rPr lang="pt-BR" sz="1500" dirty="0">
+                <a:solidFill>
+                  <a:srgbClr val="374869"/>
+                </a:solidFill>
+                <a:latin typeface="Inter"/>
+              </a:rPr>
+              <a:t>Informe usuário e senha</a:t>
+            </a:r>
+          </a:p>
+          <a:p>
+            <a:pPr algn="l">
+              <a:spcBef>
+                <a:spcPts val="400"/>
+              </a:spcBef>
+              <a:buFont typeface="Arial"/>
+              <a:buChar char="•"/>
+            </a:pPr>
+            <a:r>
+              <a:rPr lang="pt-BR" sz="1500" dirty="0">
+                <a:solidFill>
+                  <a:srgbClr val="374869"/>
+                </a:solidFill>
+                <a:latin typeface="Inter"/>
+              </a:rPr>
+              <a:t>Clique em Entrar</a:t>
+            </a:r>
+          </a:p>
+          <a:p>
+            <a:pPr algn="l">
               <a:spcBef>
                 <a:spcPts val="600"/>
               </a:spcBef>
-              <a:defRPr sz="1300">
+              <a:buNone/>
+            </a:pPr>
+            <a:r>
+              <a:rPr lang="pt-BR" sz="1400" i="1" dirty="0">
                 <a:solidFill>
                   <a:srgbClr val="6B7280"/>
                 </a:solidFill>
-              </a:defRPr>
-            </a:pPr>
-            <a:r>
-              <a:t>1. Acesse o endereco do sistema</a:t>
-            </a:r>
-          </a:p>
-          <a:p>
-            <a:pPr>
-              <a:spcBef>
-                <a:spcPts val="600"/>
-              </a:spcBef>
-              <a:defRPr sz="1300">
-                <a:solidFill>
-                  <a:srgbClr val="6B7280"/>
-                </a:solidFill>
-              </a:defRPr>
-            </a:pPr>
-          </a:p>
-          <a:p>
-            <a:pPr>
-              <a:spcBef>
-                <a:spcPts val="600"/>
-              </a:spcBef>
-              <a:defRPr sz="1300">
-                <a:solidFill>
-                  <a:srgbClr val="6B7280"/>
-                </a:solidFill>
-              </a:defRPr>
-            </a:pPr>
-            <a:r>
-              <a:t>2. Informe usuario e senha</a:t>
-            </a:r>
-          </a:p>
-          <a:p>
-            <a:pPr>
-              <a:spcBef>
-                <a:spcPts val="600"/>
-              </a:spcBef>
-              <a:defRPr sz="1300">
-                <a:solidFill>
-                  <a:srgbClr val="6B7280"/>
-                </a:solidFill>
-              </a:defRPr>
-            </a:pPr>
-          </a:p>
-          <a:p>
-            <a:pPr>
-              <a:spcBef>
-                <a:spcPts val="600"/>
-              </a:spcBef>
-              <a:defRPr sz="1300">
-                <a:solidFill>
-                  <a:srgbClr val="6B7280"/>
-                </a:solidFill>
-              </a:defRPr>
-            </a:pPr>
-            <a:r>
-              <a:t>3. Clique em Entrar</a:t>
-            </a:r>
-          </a:p>
-          <a:p>
-            <a:pPr>
-              <a:spcBef>
-                <a:spcPts val="600"/>
-              </a:spcBef>
-              <a:defRPr sz="1300">
-                <a:solidFill>
-                  <a:srgbClr val="6B7280"/>
-                </a:solidFill>
-              </a:defRPr>
-            </a:pPr>
-          </a:p>
-          <a:p>
-            <a:pPr>
-              <a:spcBef>
-                <a:spcPts val="600"/>
-              </a:spcBef>
-              <a:defRPr sz="1300">
-                <a:solidFill>
-                  <a:srgbClr val="6B7280"/>
-                </a:solidFill>
-              </a:defRPr>
-            </a:pPr>
-            <a:r>
-              <a:t>Se nao tem acesso, solicite ao</a:t>
-            </a:r>
-          </a:p>
-          <a:p>
-            <a:pPr>
-              <a:spcBef>
-                <a:spcPts val="600"/>
-              </a:spcBef>
-              <a:defRPr sz="1300">
-                <a:solidFill>
-                  <a:srgbClr val="6B7280"/>
-                </a:solidFill>
-              </a:defRPr>
-            </a:pPr>
-            <a:r>
-              <a:t>administrador de TI.</a:t>
+                <a:latin typeface="Inter"/>
+              </a:rPr>
+              <a:t>Se não tem acesso, solicite ao administrador de TI.</a:t>
             </a:r>
           </a:p>
         </p:txBody>
@@ -6892,15 +7444,27 @@
         </p:blipFill>
         <p:spPr>
           <a:xfrm>
-            <a:off x="4389120" y="914400"/>
-            <a:ext cx="4572000" cy="2531878"/>
+            <a:off x="4753429" y="436984"/>
+            <a:ext cx="6981371" cy="5984032"/>
           </a:xfrm>
           <a:prstGeom prst="rect">
             <a:avLst/>
           </a:prstGeom>
+          <a:effectLst>
+            <a:outerShdw blurRad="76200" dist="38100" dir="5400000" algn="tl">
+              <a:srgbClr val="000000">
+                <a:alpha val="25000"/>
+              </a:srgbClr>
+            </a:outerShdw>
+          </a:effectLst>
         </p:spPr>
       </p:pic>
     </p:spTree>
+    <p:extLst>
+      <p:ext uri="{BB962C8B-B14F-4D97-AF65-F5344CB8AC3E}">
+        <p14:creationId xmlns:p14="http://schemas.microsoft.com/office/powerpoint/2010/main" val="4048844100"/>
+      </p:ext>
+    </p:extLst>
   </p:cSld>
   <p:clrMapOvr>
     <a:masterClrMapping/>
@@ -6909,13 +7473,21 @@
 </file>
 
 <file path=ppt/slides/slide6.xml><?xml version="1.0" encoding="utf-8"?>
-<p:sld xmlns:a="http://schemas.openxmlformats.org/drawingml/2006/main" xmlns:p="http://schemas.openxmlformats.org/presentationml/2006/main" xmlns:r="http://schemas.openxmlformats.org/officeDocument/2006/relationships">
+<p:sld xmlns:a="http://schemas.openxmlformats.org/drawingml/2006/main" xmlns:r="http://schemas.openxmlformats.org/officeDocument/2006/relationships" xmlns:p="http://schemas.openxmlformats.org/presentationml/2006/main">
   <p:cSld>
     <p:bg>
       <p:bgPr>
-        <a:solidFill>
-          <a:srgbClr val="1E3A5F"/>
-        </a:solidFill>
+        <a:gradFill>
+          <a:gsLst>
+            <a:gs pos="0">
+              <a:srgbClr val="0D1A2E"/>
+            </a:gs>
+            <a:gs pos="100000">
+              <a:srgbClr val="1B2A4A"/>
+            </a:gs>
+          </a:gsLst>
+          <a:lin ang="5400000" scaled="1"/>
+        </a:gradFill>
         <a:effectLst/>
       </p:bgPr>
     </p:bg>
@@ -6925,7 +7497,14 @@
         <p:cNvGrpSpPr/>
         <p:nvPr/>
       </p:nvGrpSpPr>
-      <p:grpSpPr/>
+      <p:grpSpPr>
+        <a:xfrm>
+          <a:off x="0" y="0"/>
+          <a:ext cx="0" cy="0"/>
+          <a:chOff x="0" y="0"/>
+          <a:chExt cx="0" cy="0"/>
+        </a:xfrm>
+      </p:grpSpPr>
       <p:sp>
         <p:nvSpPr>
           <p:cNvPr id="2" name="TextBox 1"/>
@@ -6934,8 +7513,8 @@
         </p:nvSpPr>
         <p:spPr>
           <a:xfrm>
-            <a:off x="914400" y="1828800"/>
-            <a:ext cx="10058400" cy="914400"/>
+            <a:off x="914400" y="2286000"/>
+            <a:ext cx="10363200" cy="1371600"/>
           </a:xfrm>
           <a:prstGeom prst="rect">
             <a:avLst/>
@@ -6948,14 +7527,14 @@
           </a:bodyPr>
           <a:lstStyle/>
           <a:p>
-            <a:pPr algn="ctr">
-              <a:defRPr sz="7200" b="1">
-                <a:solidFill>
-                  <a:srgbClr val="94B8FF"/>
-                </a:solidFill>
-              </a:defRPr>
-            </a:pPr>
-            <a:r>
+            <a:pPr algn="l"/>
+            <a:r>
+              <a:rPr lang="pt-BR" sz="8000" b="1" dirty="0">
+                <a:solidFill>
+                  <a:srgbClr val="0F7B6C"/>
+                </a:solidFill>
+                <a:latin typeface="Montserrat"/>
+              </a:rPr>
               <a:t>02</a:t>
             </a:r>
           </a:p>
@@ -6969,8 +7548,8 @@
         </p:nvSpPr>
         <p:spPr>
           <a:xfrm>
-            <a:off x="914400" y="2926080"/>
-            <a:ext cx="10058400" cy="914400"/>
+            <a:off x="914400" y="3810000"/>
+            <a:ext cx="10363200" cy="914400"/>
           </a:xfrm>
           <a:prstGeom prst="rect">
             <a:avLst/>
@@ -6983,20 +7562,53 @@
           </a:bodyPr>
           <a:lstStyle/>
           <a:p>
-            <a:pPr algn="ctr">
-              <a:defRPr sz="3200" b="1">
+            <a:pPr algn="l"/>
+            <a:r>
+              <a:rPr lang="pt-BR" sz="3200" b="1" dirty="0">
                 <a:solidFill>
                   <a:srgbClr val="FFFFFF"/>
                 </a:solidFill>
-              </a:defRPr>
-            </a:pPr>
-            <a:r>
-              <a:t>Pagina Inicial (Dashboard)</a:t>
-            </a:r>
+                <a:latin typeface="Montserrat"/>
+              </a:rPr>
+              <a:t>Página Inicial (Dashboard)</a:t>
+            </a:r>
+          </a:p>
+        </p:txBody>
+      </p:sp>
+      <p:sp>
+        <p:nvSpPr>
+          <p:cNvPr id="10" name="AccentLine"/>
+          <p:cNvSpPr/>
+          <p:nvPr/>
+        </p:nvSpPr>
+        <p:spPr>
+          <a:xfrm>
+            <a:off x="914400" y="3708400"/>
+            <a:ext cx="1828800" cy="0"/>
+          </a:xfrm>
+          <a:prstGeom prst="line">
+            <a:avLst/>
+          </a:prstGeom>
+          <a:ln w="25400">
+            <a:solidFill>
+              <a:srgbClr val="0F7B6C"/>
+            </a:solidFill>
+          </a:ln>
+        </p:spPr>
+        <p:txBody>
+          <a:bodyPr/>
+          <a:lstStyle/>
+          <a:p>
+            <a:endParaRPr lang="pt-BR"/>
           </a:p>
         </p:txBody>
       </p:sp>
     </p:spTree>
+    <p:extLst>
+      <p:ext uri="{BB962C8B-B14F-4D97-AF65-F5344CB8AC3E}">
+        <p14:creationId xmlns:p14="http://schemas.microsoft.com/office/powerpoint/2010/main" val="4047411244"/>
+      </p:ext>
+    </p:extLst>
   </p:cSld>
   <p:clrMapOvr>
     <a:masterClrMapping/>
@@ -7005,7 +7617,7 @@
 </file>
 
 <file path=ppt/slides/slide7.xml><?xml version="1.0" encoding="utf-8"?>
-<p:sld xmlns:a="http://schemas.openxmlformats.org/drawingml/2006/main" xmlns:p="http://schemas.openxmlformats.org/presentationml/2006/main" xmlns:r="http://schemas.openxmlformats.org/officeDocument/2006/relationships">
+<p:sld xmlns:a="http://schemas.openxmlformats.org/drawingml/2006/main" xmlns:r="http://schemas.openxmlformats.org/officeDocument/2006/relationships" xmlns:p="http://schemas.openxmlformats.org/presentationml/2006/main">
   <p:cSld>
     <p:spTree>
       <p:nvGrpSpPr>
@@ -7013,7 +7625,14 @@
         <p:cNvGrpSpPr/>
         <p:nvPr/>
       </p:nvGrpSpPr>
-      <p:grpSpPr/>
+      <p:grpSpPr>
+        <a:xfrm>
+          <a:off x="0" y="0"/>
+          <a:ext cx="0" cy="0"/>
+          <a:chOff x="0" y="0"/>
+          <a:chExt cx="0" cy="0"/>
+        </a:xfrm>
+      </p:grpSpPr>
       <p:sp>
         <p:nvSpPr>
           <p:cNvPr id="2" name="Rectangle 1"/>
@@ -7023,13 +7642,13 @@
         <p:spPr>
           <a:xfrm>
             <a:off x="0" y="0"/>
-            <a:ext cx="12191695" cy="73152"/>
+            <a:ext cx="12191695" cy="76200"/>
           </a:xfrm>
           <a:prstGeom prst="rect">
             <a:avLst/>
           </a:prstGeom>
           <a:solidFill>
-            <a:srgbClr val="1E3A5F"/>
+            <a:srgbClr val="0F7B6C"/>
           </a:solidFill>
           <a:ln>
             <a:noFill/>
@@ -7054,6 +7673,7 @@
           <a:lstStyle/>
           <a:p>
             <a:pPr algn="ctr"/>
+            <a:endParaRPr/>
           </a:p>
         </p:txBody>
       </p:sp>
@@ -7065,8 +7685,8 @@
         </p:nvSpPr>
         <p:spPr>
           <a:xfrm>
-            <a:off x="548640" y="274320"/>
-            <a:ext cx="8229600" cy="548640"/>
+            <a:off x="457200" y="228600"/>
+            <a:ext cx="2250937" cy="523220"/>
           </a:xfrm>
           <a:prstGeom prst="rect">
             <a:avLst/>
@@ -7079,14 +7699,14 @@
           </a:bodyPr>
           <a:lstStyle/>
           <a:p>
-            <a:pPr>
-              <a:defRPr sz="2200" b="1">
-                <a:solidFill>
-                  <a:srgbClr val="1E3A5F"/>
-                </a:solidFill>
-              </a:defRPr>
-            </a:pPr>
-            <a:r>
+            <a:pPr algn="l"/>
+            <a:r>
+              <a:rPr lang="pt-BR" sz="2800" b="1" dirty="0">
+                <a:solidFill>
+                  <a:srgbClr val="1B2A4A"/>
+                </a:solidFill>
+                <a:latin typeface="Montserrat"/>
+              </a:rPr>
               <a:t>Dashboard</a:t>
             </a:r>
           </a:p>
@@ -7100,8 +7720,8 @@
         </p:nvSpPr>
         <p:spPr>
           <a:xfrm>
-            <a:off x="548640" y="1097280"/>
-            <a:ext cx="3474720" cy="5029200"/>
+            <a:off x="457200" y="914400"/>
+            <a:ext cx="4572000" cy="1656864"/>
           </a:xfrm>
           <a:prstGeom prst="rect">
             <a:avLst/>
@@ -7114,132 +7734,108 @@
           </a:bodyPr>
           <a:lstStyle/>
           <a:p>
-            <a:pPr>
+            <a:pPr algn="l">
               <a:spcBef>
-                <a:spcPts val="600"/>
+                <a:spcPts val="200"/>
               </a:spcBef>
-              <a:defRPr sz="1300">
-                <a:solidFill>
-                  <a:srgbClr val="6B7280"/>
-                </a:solidFill>
-              </a:defRPr>
+              <a:buNone/>
             </a:pPr>
             <a:r>
-              <a:t>Indicadores no topo:</a:t>
-            </a:r>
-          </a:p>
-          <a:p>
-            <a:pPr>
+              <a:rPr lang="pt-BR" sz="1500" b="1" dirty="0">
+                <a:solidFill>
+                  <a:srgbClr val="0F7B6C"/>
+                </a:solidFill>
+                <a:latin typeface="Montserrat"/>
+              </a:rPr>
+              <a:t>Indicadores no topo</a:t>
+            </a:r>
+          </a:p>
+          <a:p>
+            <a:pPr algn="l">
               <a:spcBef>
-                <a:spcPts val="600"/>
+                <a:spcPts val="200"/>
               </a:spcBef>
-              <a:defRPr sz="1300">
-                <a:solidFill>
-                  <a:srgbClr val="6B7280"/>
-                </a:solidFill>
-              </a:defRPr>
+              <a:buFont typeface="Arial"/>
+              <a:buChar char="•"/>
             </a:pPr>
             <a:r>
-              <a:t>   Total de pessoas, municipios,</a:t>
-            </a:r>
-          </a:p>
-          <a:p>
-            <a:pPr>
+              <a:rPr lang="pt-BR" sz="1500" dirty="0">
+                <a:solidFill>
+                  <a:srgbClr val="374869"/>
+                </a:solidFill>
+                <a:latin typeface="Inter"/>
+              </a:rPr>
+              <a:t>Total de pessoas, municípios, eventos e adimplência</a:t>
+            </a:r>
+          </a:p>
+          <a:p>
+            <a:pPr algn="l">
               <a:spcBef>
-                <a:spcPts val="600"/>
+                <a:spcPts val="400"/>
               </a:spcBef>
-              <a:defRPr sz="1300">
-                <a:solidFill>
-                  <a:srgbClr val="6B7280"/>
-                </a:solidFill>
-              </a:defRPr>
+              <a:buNone/>
             </a:pPr>
             <a:r>
-              <a:t>   eventos e adimplencia</a:t>
-            </a:r>
-          </a:p>
-          <a:p>
-            <a:pPr>
+              <a:rPr lang="pt-BR" sz="1500" b="1" dirty="0">
+                <a:solidFill>
+                  <a:srgbClr val="0F7B6C"/>
+                </a:solidFill>
+                <a:latin typeface="Montserrat"/>
+              </a:rPr>
+              <a:t>Eventos Recentes</a:t>
+            </a:r>
+          </a:p>
+          <a:p>
+            <a:pPr algn="l">
               <a:spcBef>
-                <a:spcPts val="600"/>
+                <a:spcPts val="200"/>
               </a:spcBef>
-              <a:defRPr sz="1300">
-                <a:solidFill>
-                  <a:srgbClr val="6B7280"/>
-                </a:solidFill>
-              </a:defRPr>
+              <a:buFont typeface="Arial"/>
+              <a:buChar char="•"/>
             </a:pPr>
-          </a:p>
-          <a:p>
-            <a:pPr>
+            <a:r>
+              <a:rPr lang="pt-BR" sz="1500" dirty="0">
+                <a:solidFill>
+                  <a:srgbClr val="374869"/>
+                </a:solidFill>
+                <a:latin typeface="Inter"/>
+              </a:rPr>
+              <a:t>Últimos 5 eventos cadastrados</a:t>
+            </a:r>
+          </a:p>
+          <a:p>
+            <a:pPr algn="l">
               <a:spcBef>
-                <a:spcPts val="600"/>
+                <a:spcPts val="400"/>
               </a:spcBef>
-              <a:defRPr sz="1300">
-                <a:solidFill>
-                  <a:srgbClr val="6B7280"/>
-                </a:solidFill>
-              </a:defRPr>
+              <a:buNone/>
             </a:pPr>
             <a:r>
-              <a:t>Eventos Recentes:</a:t>
-            </a:r>
-          </a:p>
-          <a:p>
-            <a:pPr>
+              <a:rPr lang="pt-BR" sz="1500" b="1" dirty="0">
+                <a:solidFill>
+                  <a:srgbClr val="0F7B6C"/>
+                </a:solidFill>
+                <a:latin typeface="Montserrat"/>
+              </a:rPr>
+              <a:t>Top Engajamento</a:t>
+            </a:r>
+          </a:p>
+          <a:p>
+            <a:pPr algn="l">
               <a:spcBef>
-                <a:spcPts val="600"/>
+                <a:spcPts val="200"/>
               </a:spcBef>
-              <a:defRPr sz="1300">
-                <a:solidFill>
-                  <a:srgbClr val="6B7280"/>
-                </a:solidFill>
-              </a:defRPr>
+              <a:buFont typeface="Arial"/>
+              <a:buChar char="•"/>
             </a:pPr>
             <a:r>
-              <a:t>   Ultimos 5 eventos cadastrados</a:t>
-            </a:r>
-          </a:p>
-          <a:p>
-            <a:pPr>
-              <a:spcBef>
-                <a:spcPts val="600"/>
-              </a:spcBef>
-              <a:defRPr sz="1300">
-                <a:solidFill>
-                  <a:srgbClr val="6B7280"/>
-                </a:solidFill>
-              </a:defRPr>
-            </a:pPr>
-          </a:p>
-          <a:p>
-            <a:pPr>
-              <a:spcBef>
-                <a:spcPts val="600"/>
-              </a:spcBef>
-              <a:defRPr sz="1300">
-                <a:solidFill>
-                  <a:srgbClr val="6B7280"/>
-                </a:solidFill>
-              </a:defRPr>
-            </a:pPr>
-            <a:r>
-              <a:t>Top Engajamento:</a:t>
-            </a:r>
-          </a:p>
-          <a:p>
-            <a:pPr>
-              <a:spcBef>
-                <a:spcPts val="600"/>
-              </a:spcBef>
-              <a:defRPr sz="1300">
-                <a:solidFill>
-                  <a:srgbClr val="6B7280"/>
-                </a:solidFill>
-              </a:defRPr>
-            </a:pPr>
-            <a:r>
-              <a:t>   Ranking dos 5 municipios mais ativos</a:t>
+              <a:rPr lang="pt-BR" sz="1500" dirty="0">
+                <a:solidFill>
+                  <a:srgbClr val="374869"/>
+                </a:solidFill>
+                <a:latin typeface="Inter"/>
+              </a:rPr>
+              <a:t>Ranking dos 5 municípios mais ativos</a:t>
             </a:r>
           </a:p>
         </p:txBody>
@@ -7260,15 +7856,27 @@
         </p:blipFill>
         <p:spPr>
           <a:xfrm>
-            <a:off x="4389120" y="914400"/>
-            <a:ext cx="4572000" cy="2531878"/>
+            <a:off x="5152571" y="457199"/>
+            <a:ext cx="6734629" cy="5772539"/>
           </a:xfrm>
           <a:prstGeom prst="rect">
             <a:avLst/>
           </a:prstGeom>
+          <a:effectLst>
+            <a:outerShdw blurRad="76200" dist="38100" dir="5400000" algn="tl">
+              <a:srgbClr val="000000">
+                <a:alpha val="25000"/>
+              </a:srgbClr>
+            </a:outerShdw>
+          </a:effectLst>
         </p:spPr>
       </p:pic>
     </p:spTree>
+    <p:extLst>
+      <p:ext uri="{BB962C8B-B14F-4D97-AF65-F5344CB8AC3E}">
+        <p14:creationId xmlns:p14="http://schemas.microsoft.com/office/powerpoint/2010/main" val="73122141"/>
+      </p:ext>
+    </p:extLst>
   </p:cSld>
   <p:clrMapOvr>
     <a:masterClrMapping/>
@@ -7277,13 +7885,21 @@
 </file>
 
 <file path=ppt/slides/slide8.xml><?xml version="1.0" encoding="utf-8"?>
-<p:sld xmlns:a="http://schemas.openxmlformats.org/drawingml/2006/main" xmlns:p="http://schemas.openxmlformats.org/presentationml/2006/main" xmlns:r="http://schemas.openxmlformats.org/officeDocument/2006/relationships">
+<p:sld xmlns:a="http://schemas.openxmlformats.org/drawingml/2006/main" xmlns:r="http://schemas.openxmlformats.org/officeDocument/2006/relationships" xmlns:p="http://schemas.openxmlformats.org/presentationml/2006/main">
   <p:cSld>
     <p:bg>
       <p:bgPr>
-        <a:solidFill>
-          <a:srgbClr val="1E3A5F"/>
-        </a:solidFill>
+        <a:gradFill>
+          <a:gsLst>
+            <a:gs pos="0">
+              <a:srgbClr val="0D1A2E"/>
+            </a:gs>
+            <a:gs pos="100000">
+              <a:srgbClr val="1B2A4A"/>
+            </a:gs>
+          </a:gsLst>
+          <a:lin ang="5400000" scaled="1"/>
+        </a:gradFill>
         <a:effectLst/>
       </p:bgPr>
     </p:bg>
@@ -7293,7 +7909,14 @@
         <p:cNvGrpSpPr/>
         <p:nvPr/>
       </p:nvGrpSpPr>
-      <p:grpSpPr/>
+      <p:grpSpPr>
+        <a:xfrm>
+          <a:off x="0" y="0"/>
+          <a:ext cx="0" cy="0"/>
+          <a:chOff x="0" y="0"/>
+          <a:chExt cx="0" cy="0"/>
+        </a:xfrm>
+      </p:grpSpPr>
       <p:sp>
         <p:nvSpPr>
           <p:cNvPr id="2" name="TextBox 1"/>
@@ -7302,8 +7925,8 @@
         </p:nvSpPr>
         <p:spPr>
           <a:xfrm>
-            <a:off x="914400" y="1828800"/>
-            <a:ext cx="10058400" cy="914400"/>
+            <a:off x="914400" y="2286000"/>
+            <a:ext cx="10363200" cy="1371600"/>
           </a:xfrm>
           <a:prstGeom prst="rect">
             <a:avLst/>
@@ -7316,14 +7939,14 @@
           </a:bodyPr>
           <a:lstStyle/>
           <a:p>
-            <a:pPr algn="ctr">
-              <a:defRPr sz="7200" b="1">
-                <a:solidFill>
-                  <a:srgbClr val="94B8FF"/>
-                </a:solidFill>
-              </a:defRPr>
-            </a:pPr>
-            <a:r>
+            <a:pPr algn="l"/>
+            <a:r>
+              <a:rPr lang="pt-BR" sz="8000" b="1" dirty="0">
+                <a:solidFill>
+                  <a:srgbClr val="0F7B6C"/>
+                </a:solidFill>
+                <a:latin typeface="Montserrat"/>
+              </a:rPr>
               <a:t>03</a:t>
             </a:r>
           </a:p>
@@ -7337,8 +7960,8 @@
         </p:nvSpPr>
         <p:spPr>
           <a:xfrm>
-            <a:off x="914400" y="2926080"/>
-            <a:ext cx="10058400" cy="914400"/>
+            <a:off x="914400" y="3810000"/>
+            <a:ext cx="10363200" cy="914400"/>
           </a:xfrm>
           <a:prstGeom prst="rect">
             <a:avLst/>
@@ -7351,20 +7974,53 @@
           </a:bodyPr>
           <a:lstStyle/>
           <a:p>
-            <a:pPr algn="ctr">
-              <a:defRPr sz="3200" b="1">
+            <a:pPr algn="l"/>
+            <a:r>
+              <a:rPr lang="pt-BR" sz="3200" b="1" dirty="0">
                 <a:solidFill>
                   <a:srgbClr val="FFFFFF"/>
                 </a:solidFill>
-              </a:defRPr>
-            </a:pPr>
-            <a:r>
+                <a:latin typeface="Montserrat"/>
+              </a:rPr>
               <a:t>Cadastro de Pessoas</a:t>
             </a:r>
           </a:p>
         </p:txBody>
       </p:sp>
+      <p:sp>
+        <p:nvSpPr>
+          <p:cNvPr id="10" name="AccentLine"/>
+          <p:cNvSpPr/>
+          <p:nvPr/>
+        </p:nvSpPr>
+        <p:spPr>
+          <a:xfrm>
+            <a:off x="914400" y="3708400"/>
+            <a:ext cx="1828800" cy="0"/>
+          </a:xfrm>
+          <a:prstGeom prst="line">
+            <a:avLst/>
+          </a:prstGeom>
+          <a:ln w="25400">
+            <a:solidFill>
+              <a:srgbClr val="0F7B6C"/>
+            </a:solidFill>
+          </a:ln>
+        </p:spPr>
+        <p:txBody>
+          <a:bodyPr/>
+          <a:lstStyle/>
+          <a:p>
+            <a:endParaRPr lang="pt-BR"/>
+          </a:p>
+        </p:txBody>
+      </p:sp>
     </p:spTree>
+    <p:extLst>
+      <p:ext uri="{BB962C8B-B14F-4D97-AF65-F5344CB8AC3E}">
+        <p14:creationId xmlns:p14="http://schemas.microsoft.com/office/powerpoint/2010/main" val="3090290214"/>
+      </p:ext>
+    </p:extLst>
   </p:cSld>
   <p:clrMapOvr>
     <a:masterClrMapping/>
@@ -7373,7 +8029,7 @@
 </file>
 
 <file path=ppt/slides/slide9.xml><?xml version="1.0" encoding="utf-8"?>
-<p:sld xmlns:a="http://schemas.openxmlformats.org/drawingml/2006/main" xmlns:p="http://schemas.openxmlformats.org/presentationml/2006/main" xmlns:r="http://schemas.openxmlformats.org/officeDocument/2006/relationships">
+<p:sld xmlns:a="http://schemas.openxmlformats.org/drawingml/2006/main" xmlns:r="http://schemas.openxmlformats.org/officeDocument/2006/relationships" xmlns:p="http://schemas.openxmlformats.org/presentationml/2006/main">
   <p:cSld>
     <p:spTree>
       <p:nvGrpSpPr>
@@ -7381,7 +8037,14 @@
         <p:cNvGrpSpPr/>
         <p:nvPr/>
       </p:nvGrpSpPr>
-      <p:grpSpPr/>
+      <p:grpSpPr>
+        <a:xfrm>
+          <a:off x="0" y="0"/>
+          <a:ext cx="0" cy="0"/>
+          <a:chOff x="0" y="0"/>
+          <a:chExt cx="0" cy="0"/>
+        </a:xfrm>
+      </p:grpSpPr>
       <p:sp>
         <p:nvSpPr>
           <p:cNvPr id="2" name="Rectangle 1"/>
@@ -7391,13 +8054,13 @@
         <p:spPr>
           <a:xfrm>
             <a:off x="0" y="0"/>
-            <a:ext cx="12191695" cy="73152"/>
+            <a:ext cx="12191695" cy="76200"/>
           </a:xfrm>
           <a:prstGeom prst="rect">
             <a:avLst/>
           </a:prstGeom>
           <a:solidFill>
-            <a:srgbClr val="1E3A5F"/>
+            <a:srgbClr val="0F7B6C"/>
           </a:solidFill>
           <a:ln>
             <a:noFill/>
@@ -7422,6 +8085,7 @@
           <a:lstStyle/>
           <a:p>
             <a:pPr algn="ctr"/>
+            <a:endParaRPr/>
           </a:p>
         </p:txBody>
       </p:sp>
@@ -7433,8 +8097,8 @@
         </p:nvSpPr>
         <p:spPr>
           <a:xfrm>
-            <a:off x="548640" y="274320"/>
-            <a:ext cx="8229600" cy="548640"/>
+            <a:off x="457200" y="228600"/>
+            <a:ext cx="3270447" cy="523220"/>
           </a:xfrm>
           <a:prstGeom prst="rect">
             <a:avLst/>
@@ -7447,14 +8111,14 @@
           </a:bodyPr>
           <a:lstStyle/>
           <a:p>
-            <a:pPr>
-              <a:defRPr sz="2200" b="1">
-                <a:solidFill>
-                  <a:srgbClr val="1E3A5F"/>
-                </a:solidFill>
-              </a:defRPr>
-            </a:pPr>
-            <a:r>
+            <a:pPr algn="l"/>
+            <a:r>
+              <a:rPr lang="pt-BR" sz="2800" b="1" dirty="0">
+                <a:solidFill>
+                  <a:srgbClr val="1B2A4A"/>
+                </a:solidFill>
+                <a:latin typeface="Montserrat"/>
+              </a:rPr>
               <a:t>Lista de Pessoas</a:t>
             </a:r>
           </a:p>
@@ -7468,8 +8132,8 @@
         </p:nvSpPr>
         <p:spPr>
           <a:xfrm>
-            <a:off x="548640" y="1097280"/>
-            <a:ext cx="3474720" cy="5029200"/>
+            <a:off x="457200" y="914400"/>
+            <a:ext cx="4572000" cy="1461939"/>
           </a:xfrm>
           <a:prstGeom prst="rect">
             <a:avLst/>
@@ -7482,141 +8146,92 @@
           </a:bodyPr>
           <a:lstStyle/>
           <a:p>
-            <a:pPr>
+            <a:pPr algn="l">
+              <a:spcBef>
+                <a:spcPts val="400"/>
+              </a:spcBef>
+              <a:buFont typeface="Arial"/>
+              <a:buChar char="•"/>
+            </a:pPr>
+            <a:r>
+              <a:rPr lang="pt-BR" sz="1500" dirty="0">
+                <a:solidFill>
+                  <a:srgbClr val="374869"/>
+                </a:solidFill>
+                <a:latin typeface="Inter"/>
+              </a:rPr>
+              <a:t>Menu lateral &gt; Pessoas</a:t>
+            </a:r>
+          </a:p>
+          <a:p>
+            <a:pPr algn="l">
+              <a:spcBef>
+                <a:spcPts val="400"/>
+              </a:spcBef>
+              <a:buFont typeface="Arial"/>
+              <a:buChar char="•"/>
+            </a:pPr>
+            <a:r>
+              <a:rPr lang="pt-BR" sz="1500" dirty="0">
+                <a:solidFill>
+                  <a:srgbClr val="374869"/>
+                </a:solidFill>
+                <a:latin typeface="Inter"/>
+              </a:rPr>
+              <a:t>Lista com foto, nome, tipo, partido e status</a:t>
+            </a:r>
+          </a:p>
+          <a:p>
+            <a:pPr algn="l">
+              <a:spcBef>
+                <a:spcPts val="400"/>
+              </a:spcBef>
+              <a:buFont typeface="Arial"/>
+              <a:buChar char="•"/>
+            </a:pPr>
+            <a:r>
+              <a:rPr lang="pt-BR" sz="1500" dirty="0">
+                <a:solidFill>
+                  <a:srgbClr val="374869"/>
+                </a:solidFill>
+                <a:latin typeface="Inter"/>
+              </a:rPr>
+              <a:t>Busca em tempo real</a:t>
+            </a:r>
+          </a:p>
+          <a:p>
+            <a:pPr algn="l">
+              <a:spcBef>
+                <a:spcPts val="400"/>
+              </a:spcBef>
+              <a:buFont typeface="Arial"/>
+              <a:buChar char="•"/>
+            </a:pPr>
+            <a:r>
+              <a:rPr lang="pt-BR" sz="1500" dirty="0">
+                <a:solidFill>
+                  <a:srgbClr val="374869"/>
+                </a:solidFill>
+                <a:latin typeface="Inter"/>
+              </a:rPr>
+              <a:t>Clique para ver detalhes</a:t>
+            </a:r>
+          </a:p>
+          <a:p>
+            <a:pPr algn="l">
               <a:spcBef>
                 <a:spcPts val="600"/>
               </a:spcBef>
-              <a:defRPr sz="1300">
-                <a:solidFill>
-                  <a:srgbClr val="6B7280"/>
-                </a:solidFill>
-              </a:defRPr>
+              <a:buNone/>
             </a:pPr>
             <a:r>
-              <a:t>1. Menu lateral &gt; Pessoas</a:t>
-            </a:r>
-          </a:p>
-          <a:p>
-            <a:pPr>
-              <a:spcBef>
-                <a:spcPts val="600"/>
-              </a:spcBef>
-              <a:defRPr sz="1300">
-                <a:solidFill>
-                  <a:srgbClr val="6B7280"/>
-                </a:solidFill>
-              </a:defRPr>
-            </a:pPr>
-          </a:p>
-          <a:p>
-            <a:pPr>
-              <a:spcBef>
-                <a:spcPts val="600"/>
-              </a:spcBef>
-              <a:defRPr sz="1300">
-                <a:solidFill>
-                  <a:srgbClr val="6B7280"/>
-                </a:solidFill>
-              </a:defRPr>
-            </a:pPr>
-            <a:r>
-              <a:t>2. Lista com foto, nome, tipo,</a:t>
-            </a:r>
-          </a:p>
-          <a:p>
-            <a:pPr>
-              <a:spcBef>
-                <a:spcPts val="600"/>
-              </a:spcBef>
-              <a:defRPr sz="1300">
-                <a:solidFill>
-                  <a:srgbClr val="6B7280"/>
-                </a:solidFill>
-              </a:defRPr>
-            </a:pPr>
-            <a:r>
-              <a:t>   partido e status</a:t>
-            </a:r>
-          </a:p>
-          <a:p>
-            <a:pPr>
-              <a:spcBef>
-                <a:spcPts val="600"/>
-              </a:spcBef>
-              <a:defRPr sz="1300">
-                <a:solidFill>
-                  <a:srgbClr val="6B7280"/>
-                </a:solidFill>
-              </a:defRPr>
-            </a:pPr>
-          </a:p>
-          <a:p>
-            <a:pPr>
-              <a:spcBef>
-                <a:spcPts val="600"/>
-              </a:spcBef>
-              <a:defRPr sz="1300">
-                <a:solidFill>
-                  <a:srgbClr val="6B7280"/>
-                </a:solidFill>
-              </a:defRPr>
-            </a:pPr>
-            <a:r>
-              <a:t>3. Busca em tempo real</a:t>
-            </a:r>
-          </a:p>
-          <a:p>
-            <a:pPr>
-              <a:spcBef>
-                <a:spcPts val="600"/>
-              </a:spcBef>
-              <a:defRPr sz="1300">
-                <a:solidFill>
-                  <a:srgbClr val="6B7280"/>
-                </a:solidFill>
-              </a:defRPr>
-            </a:pPr>
-          </a:p>
-          <a:p>
-            <a:pPr>
-              <a:spcBef>
-                <a:spcPts val="600"/>
-              </a:spcBef>
-              <a:defRPr sz="1300">
-                <a:solidFill>
-                  <a:srgbClr val="6B7280"/>
-                </a:solidFill>
-              </a:defRPr>
-            </a:pPr>
-            <a:r>
-              <a:t>4. Clique para ver detalhes</a:t>
-            </a:r>
-          </a:p>
-          <a:p>
-            <a:pPr>
-              <a:spcBef>
-                <a:spcPts val="600"/>
-              </a:spcBef>
-              <a:defRPr sz="1300">
-                <a:solidFill>
-                  <a:srgbClr val="6B7280"/>
-                </a:solidFill>
-              </a:defRPr>
-            </a:pPr>
-          </a:p>
-          <a:p>
-            <a:pPr>
-              <a:spcBef>
-                <a:spcPts val="600"/>
-              </a:spcBef>
-              <a:defRPr sz="1300">
-                <a:solidFill>
-                  <a:srgbClr val="6B7280"/>
-                </a:solidFill>
-              </a:defRPr>
-            </a:pPr>
-            <a:r>
-              <a:t>Editor: botao "+ Nova Pessoa"</a:t>
+              <a:rPr lang="pt-BR" sz="1400" i="1" dirty="0">
+                <a:solidFill>
+                  <a:srgbClr val="0F7B6C"/>
+                </a:solidFill>
+                <a:latin typeface="Inter"/>
+              </a:rPr>
+              <a:t>Editor: botão "+ Nova Pessoa"</a:t>
             </a:r>
           </a:p>
         </p:txBody>
@@ -7637,15 +8252,27 @@
         </p:blipFill>
         <p:spPr>
           <a:xfrm>
-            <a:off x="4389120" y="914400"/>
-            <a:ext cx="4572000" cy="2531878"/>
+            <a:off x="4760686" y="380999"/>
+            <a:ext cx="7126514" cy="6108441"/>
           </a:xfrm>
           <a:prstGeom prst="rect">
             <a:avLst/>
           </a:prstGeom>
+          <a:effectLst>
+            <a:outerShdw blurRad="76200" dist="38100" dir="5400000" algn="tl">
+              <a:srgbClr val="000000">
+                <a:alpha val="25000"/>
+              </a:srgbClr>
+            </a:outerShdw>
+          </a:effectLst>
         </p:spPr>
       </p:pic>
     </p:spTree>
+    <p:extLst>
+      <p:ext uri="{BB962C8B-B14F-4D97-AF65-F5344CB8AC3E}">
+        <p14:creationId xmlns:p14="http://schemas.microsoft.com/office/powerpoint/2010/main" val="371598888"/>
+      </p:ext>
+    </p:extLst>
   </p:cSld>
   <p:clrMapOvr>
     <a:masterClrMapping/>
@@ -7654,38 +8281,38 @@
 </file>
 
 <file path=ppt/theme/theme1.xml><?xml version="1.0" encoding="utf-8"?>
-<a:theme xmlns:a="http://schemas.openxmlformats.org/drawingml/2006/main" name="Office Theme">
+<a:theme xmlns:a="http://schemas.openxmlformats.org/drawingml/2006/main" name="Office Theme [1775591173542]">
   <a:themeElements>
     <a:clrScheme name="Office">
       <a:dk1>
-        <a:sysClr val="windowText" lastClr="000000"/>
+        <a:srgbClr val="1B2A4A"/>
       </a:dk1>
       <a:lt1>
-        <a:sysClr val="window" lastClr="FFFFFF"/>
+        <a:srgbClr val="FFFFFF"/>
       </a:lt1>
       <a:dk2>
-        <a:srgbClr val="1F497D"/>
+        <a:srgbClr val="374869"/>
       </a:dk2>
       <a:lt2>
-        <a:srgbClr val="EEECE1"/>
+        <a:srgbClr val="F0F4F8"/>
       </a:lt2>
       <a:accent1>
-        <a:srgbClr val="4F81BD"/>
+        <a:srgbClr val="0F7B6C"/>
       </a:accent1>
       <a:accent2>
-        <a:srgbClr val="C0504D"/>
+        <a:srgbClr val="1B2A4A"/>
       </a:accent2>
       <a:accent3>
-        <a:srgbClr val="9BBB59"/>
+        <a:srgbClr val="E8913A"/>
       </a:accent3>
       <a:accent4>
-        <a:srgbClr val="8064A2"/>
+        <a:srgbClr val="3B82C4"/>
       </a:accent4>
       <a:accent5>
-        <a:srgbClr val="4BACC6"/>
+        <a:srgbClr val="6C63AC"/>
       </a:accent5>
       <a:accent6>
-        <a:srgbClr val="F79646"/>
+        <a:srgbClr val="2D9CDB"/>
       </a:accent6>
       <a:hlink>
         <a:srgbClr val="0000FF"/>
@@ -7696,7 +8323,7 @@
     </a:clrScheme>
     <a:fontScheme name="Office">
       <a:majorFont>
-        <a:latin typeface="Calibri"/>
+        <a:latin typeface="Montserrat"/>
         <a:ea typeface=""/>
         <a:cs typeface=""/>
         <a:font script="Jpan" typeface="ＭＳ Ｐゴシック"/>
@@ -7731,7 +8358,7 @@
         <a:font script="Geor" typeface="Sylfaen"/>
       </a:majorFont>
       <a:minorFont>
-        <a:latin typeface="Calibri"/>
+        <a:latin typeface="Inter"/>
         <a:ea typeface=""/>
         <a:cs typeface=""/>
         <a:font script="Jpan" typeface="ＭＳ Ｐゴシック"/>
@@ -7971,4 +8598,26 @@
   </a:objectDefaults>
   <a:extraClrSchemeLst/>
 </a:theme>
+</file>
+
+<file path=ppt/webextensions/taskpanes.xml><?xml version="1.0" encoding="utf-8"?>
+<wetp:taskpanes xmlns:wetp="http://schemas.microsoft.com/office/webextensions/taskpanes/2010/11">
+  <wetp:taskpane dockstate="right" visibility="0" width="350" row="0">
+    <wetp:webextensionref xmlns:r="http://schemas.openxmlformats.org/officeDocument/2006/relationships" r:id="rId1"/>
+  </wetp:taskpane>
+</wetp:taskpanes>
+</file>
+
+<file path=ppt/webextensions/webextension1.xml><?xml version="1.0" encoding="utf-8"?>
+<we:webextension xmlns:we="http://schemas.microsoft.com/office/webextensions/webextension/2010/11" id="{456A7BC5-BF46-4C48-81CA-F19F41FABCC9}">
+  <we:reference id="wa200010001" version="1.0.0.1" store="pt-BR" storeType="OMEX"/>
+  <we:alternateReferences>
+    <we:reference id="WA200010001" version="1.0.0.1" store="WA200010001" storeType="OMEX"/>
+  </we:alternateReferences>
+  <we:properties>
+    <we:property name="claude.fileId" value="&quot;33c6ab24-fb63-4c04-8bc5-e11253c50de0&quot;"/>
+  </we:properties>
+  <we:bindings/>
+  <we:snapshot xmlns:r="http://schemas.openxmlformats.org/officeDocument/2006/relationships"/>
+</we:webextension>
 </file>